--- a/01-slides/W02-Object-Oriented-Foundations.pptx
+++ b/01-slides/W02-Object-Oriented-Foundations.pptx
@@ -581,7 +581,7 @@
   <p:cSld>
     <p:spTree>
       <p:nvGrpSpPr>
-        <p:cNvPr id="1" name="" descr="&lt;Slide style={{ background: '#0E3F8C', padding: 0 }}&gt;&#10;  &lt;Box style={{ flexDirection: 'column', height: '100%', justifyContent: 'center', padding: '0 80px', position: 'relative' }}&gt;&#10;    &lt;Box style={{ position: 'absolute', top: 0, left: 0, right: 0, height: 8, background: '#1E4FA8' }} /&gt;&#10;    &lt;Box style={{ position: 'absolute', top: 8, left: 0, right: 0, height: 2, background: '#3D7BD9' }} /&gt;&#10;    &lt;Box style={{ flexDirection: 'row', alignItems: 'center', gap: 14, marginBottom: 30 }}&gt;&#10;      &lt;Box style={{ padding: '7px 18px', background: '#3D7BD9', borderRadius: 18 }}&gt;&#10;        &lt;Text style={{ fontSize: 16, color: '#FFFFFF', fontWeight: 'bold', letterSpacing: 2 }}&gt;ISAD · WEEK 02&lt;/Text&gt;&#10;      &lt;/Box&gt;&#10;      &lt;Box style={{ width: 56, height: 1, background: '#5B84C4' }} /&gt;&#10;      &lt;Text style={{ fontSize: 16, color: '#7FA2D6', letterSpacing: 1 }}&gt;MODULE A · FOUNDATIONS&lt;/Text&gt;&#10;    &lt;/Box&gt;&#10;    &lt;Text style={{ fontSize: 58, fontWeight: 'bold', color: '#FFFFFF', fontFamily: 'Georgia, serif', lineHeight: 1.12 }}&gt;&#10;      Object-Oriented&#10;      &lt;br /&gt;&#10;      Foundations&#10;    &lt;/Text&gt;&#10;    &lt;Box style={{ width: 88, height: 5, background: '#FFC107', marginTop: 28, marginBottom: 22 }} /&gt;&#10;    &lt;Text style={{ fontSize: 26, color: '#B9CDF0', lineHeight: 1.45 }}&gt;&#10;      Objects, Encapsulation, Reuse &amp;amp; Polymorphism&#10;    &lt;/Text&gt;&#10;    &lt;Box style={{ position: 'absolute', bottom: 46, left: 80, right: 80, flexDirection: 'row', justifyContent: 'space-between', alignItems: 'center', borderTop: '1px solid #2B5793', paddingTop: 18 }}&gt;&#10;      &lt;Text style={{ fontSize: 17, color: '#C5D4EA' }}&gt;Ren Zheng · School of Software Engineering&lt;/Text&gt;&#10;      &lt;Text style={{ fontSize: 17, color: '#C5D4EA' }}&gt;Fall 2026&lt;/Text&gt;&#10;    &lt;/Box&gt;&#10;  &lt;/Box&gt;&#10;&lt;/Slide&gt;"/>
+        <p:cNvPr id="1" name=""/>
         <p:cNvGrpSpPr/>
         <p:nvPr/>
       </p:nvGrpSpPr>
@@ -614,7 +614,10 @@
         </p:spPr>
         <p:txBody>
           <a:bodyPr/>
-          <a:p/>
+          <a:p>
+            <a:pPr/>
+            <a:endParaRPr/>
+          </a:p>
         </p:txBody>
       </p:sp>
       <p:sp>
@@ -640,7 +643,10 @@
         </p:spPr>
         <p:txBody>
           <a:bodyPr/>
-          <a:p/>
+          <a:p>
+            <a:pPr/>
+            <a:endParaRPr/>
+          </a:p>
         </p:txBody>
       </p:sp>
       <p:sp>
@@ -699,7 +705,10 @@
         </p:spPr>
         <p:txBody>
           <a:bodyPr/>
-          <a:p/>
+          <a:p>
+            <a:pPr/>
+            <a:endParaRPr/>
+          </a:p>
         </p:txBody>
       </p:sp>
       <p:sp>
@@ -811,7 +820,10 @@
         </p:spPr>
         <p:txBody>
           <a:bodyPr/>
-          <a:p/>
+          <a:p>
+            <a:pPr/>
+            <a:endParaRPr/>
+          </a:p>
         </p:txBody>
       </p:sp>
       <p:sp>
@@ -870,7 +882,10 @@
         </p:spPr>
         <p:txBody>
           <a:bodyPr/>
-          <a:p/>
+          <a:p>
+            <a:pPr/>
+            <a:endParaRPr/>
+          </a:p>
         </p:txBody>
       </p:sp>
       <p:sp>
@@ -894,7 +909,10 @@
         </p:spPr>
         <p:txBody>
           <a:bodyPr/>
-          <a:p/>
+          <a:p>
+            <a:pPr/>
+            <a:endParaRPr/>
+          </a:p>
         </p:txBody>
       </p:sp>
       <p:sp>
@@ -934,7 +952,10 @@
         </p:spPr>
         <p:txBody>
           <a:bodyPr/>
-          <a:p/>
+          <a:p>
+            <a:pPr/>
+            <a:endParaRPr/>
+          </a:p>
         </p:txBody>
       </p:sp>
       <p:sp>
@@ -1017,7 +1038,7 @@
   <p:cSld>
     <p:spTree>
       <p:nvGrpSpPr>
-        <p:cNvPr id="15" name="" descr="&lt;Slide style={{ background: '#FFFFFF', padding: 0 }}&gt;&#10;  &lt;Box style={{ height: 72, background: '#1E4FA8', padding: '0 40px', flexDirection: 'row', alignItems: 'center', justifyContent: 'space-between' }}&gt;&#10;    &lt;Text style={{ fontSize: 15, color: '#B9CDF0', letterSpacing: 1 }}&gt;ISAD · INFORMATION SYSTEMS ANALYSIS &amp;amp; DESIGN&lt;/Text&gt;&#10;    &lt;Text style={{ fontSize: 15, color: '#B9CDF0' }}&gt;W02 · OBJECTS&lt;/Text&gt;&#10;  &lt;/Box&gt;&#10;  &lt;Box style={{ padding: '22px 40px 0 40px' }}&gt;&#10;    &lt;Text style={{ fontSize: 34, fontWeight: 'bold', color: '#0E3F8C' }}&gt;Objects vs. Classes&lt;/Text&gt;&#10;  &lt;/Box&gt;&#10;  &lt;Box style={{ flex: 1, padding: '18px 40px 0 40px', flexDirection: 'row', gap: 28 }}&gt;&#10;    &lt;Box style={{ flex: 3, flexDirection: 'column', gap: 14, justifyContent: 'center' }}&gt;&#10;      &lt;Box style={{ padding: '20px 22px', background: '#E8EFF8', borderRadius: 12, borderLeft: '4px solid #0E3F8C' }}&gt;&#10;        &lt;Text style={{ fontSize: 19, fontWeight: 'bold', color: '#0E3F8C', marginBottom: 6 }}&gt;Class — the mould&lt;/Text&gt;&#10;        &lt;Text style={{ fontSize: 16, color: '#4A5568', lineHeight: 1.5 }}&gt;Written once. Declares what fields and methods every instance will have. Lives in source code.&lt;/Text&gt;&#10;      &lt;/Box&gt;&#10;      &lt;Box style={{ padding: '20px 22px', background: '#F0F5FC', borderRadius: 12, borderLeft: '4px solid #3D7BD9' }}&gt;&#10;        &lt;Text style={{ fontSize: 19, fontWeight: 'bold', color: '#0E3F8C', marginBottom: 6 }}&gt;Object — what you pour&lt;/Text&gt;&#10;        &lt;Text style={{ fontSize: 16, color: '#4A5568', lineHeight: 1.5 }}&gt;Created at runtime, many times over. Each one owns its own state, shares the same behaviour.&lt;/Text&gt;&#10;      &lt;/Box&gt;&#10;      &lt;Box style={{ padding: '14px 18px', background: '#FFFFFF', borderRadius: 10, border: '1px dashed #D6DCE5' }}&gt;&#10;        &lt;Text style={{ fontSize: 15, color: '#8B97A8', lineHeight: 1.5 }}&gt;One &lt;Text style={{ fontWeight: 'bold', color: '#1A2230' }}&gt;Order&lt;/Text&gt; class. Thousands of orders at lunchtime.&lt;/Text&gt;&#10;      &lt;/Box&gt;&#10;    &lt;/Box&gt;&#10;    &lt;Box style={{ flex: 2, padding: '28px 26px', background: '#0E3F8C', borderRadius: 12, flexDirection: 'column', justifyContent: 'center', gap: 16 }}&gt;&#10;      &lt;FAIcon name='layer-group' style={{ fill: '#FFC107', width: 34, height: 34 }} /&gt;&#10;      &lt;Text style={{ fontSize: 22, fontWeight: 'bold', color: '#FFFFFF', lineHeight: 1.35 }}&gt;A class is a blueprint. An object is a house.&lt;/Text&gt;&#10;      &lt;Text style={{ fontSize: 16, color: '#C5D4EA', lineHeight: 1.55 }}&gt;The blueprint is not the house — you cannot cook in it. But every house built from it has the same rooms.&lt;/Text&gt;&#10;      &lt;Box style={{ padding: '12px 16px', background: '#1E4FA8', borderRadius: 8 }}&gt;&#10;        &lt;Text style={{ fontSize: 15, color: '#B9CDF0', lineHeight: 1.45 }}&gt;In analysis we mostly draw &lt;Text style={{ fontWeight: 'bold', color: '#FFFFFF' }}&gt;classes&lt;/Text&gt;. At runtime the system is full of &lt;Text style={{ fontWeight: 'bold', color: '#FFFFFF' }}&gt;objects&lt;/Text&gt;.&lt;/Text&gt;&#10;      &lt;/Box&gt;&#10;    &lt;/Box&gt;&#10;  &lt;/Box&gt;&#10;  &lt;Box style={{ height: 40, padding: '0 40px', flexDirection: 'row', alignItems: 'center', justifyContent: 'space-between' }}&gt;&#10;    &lt;Text style={{ fontSize: 13, color: '#8B97A8' }}&gt;ISAD · Fall 2026&lt;/Text&gt;&#10;    &lt;Text style={{ fontSize: 14, color: '#1E4FA8', fontWeight: 'bold' }}&gt;10 / 38&lt;/Text&gt;&#10;  &lt;/Box&gt;&#10;&lt;/Slide&gt;"/>
+        <p:cNvPr id="15" name=""/>
         <p:cNvGrpSpPr/>
         <p:nvPr/>
       </p:nvGrpSpPr>
@@ -1050,7 +1071,10 @@
         </p:spPr>
         <p:txBody>
           <a:bodyPr/>
-          <a:p/>
+          <a:p>
+            <a:pPr/>
+            <a:endParaRPr/>
+          </a:p>
         </p:txBody>
       </p:sp>
       <p:sp>
@@ -1074,7 +1098,10 @@
         </p:spPr>
         <p:txBody>
           <a:bodyPr/>
-          <a:p/>
+          <a:p>
+            <a:pPr/>
+            <a:endParaRPr/>
+          </a:p>
         </p:txBody>
       </p:sp>
       <p:sp>
@@ -1205,7 +1232,10 @@
         </p:spPr>
         <p:txBody>
           <a:bodyPr/>
-          <a:p/>
+          <a:p>
+            <a:pPr/>
+            <a:endParaRPr/>
+          </a:p>
         </p:txBody>
       </p:sp>
       <p:sp>
@@ -1262,7 +1292,10 @@
         </p:spPr>
         <p:txBody>
           <a:bodyPr/>
-          <a:p/>
+          <a:p>
+            <a:pPr/>
+            <a:endParaRPr/>
+          </a:p>
         </p:txBody>
       </p:sp>
       <p:sp>
@@ -1360,7 +1393,10 @@
         </p:spPr>
         <p:txBody>
           <a:bodyPr/>
-          <a:p/>
+          <a:p>
+            <a:pPr/>
+            <a:endParaRPr/>
+          </a:p>
         </p:txBody>
       </p:sp>
       <p:sp>
@@ -1417,7 +1453,10 @@
         </p:spPr>
         <p:txBody>
           <a:bodyPr/>
-          <a:p/>
+          <a:p>
+            <a:pPr/>
+            <a:endParaRPr/>
+          </a:p>
         </p:txBody>
       </p:sp>
       <p:sp>
@@ -1520,7 +1559,10 @@
         </p:spPr>
         <p:txBody>
           <a:bodyPr/>
-          <a:p/>
+          <a:p>
+            <a:pPr/>
+            <a:endParaRPr/>
+          </a:p>
         </p:txBody>
       </p:sp>
       <p:sp>
@@ -1601,7 +1643,10 @@
         </p:spPr>
         <p:txBody>
           <a:bodyPr/>
-          <a:p/>
+          <a:p>
+            <a:pPr/>
+            <a:endParaRPr/>
+          </a:p>
         </p:txBody>
       </p:sp>
       <p:pic>
@@ -1732,7 +1777,10 @@
         </p:spPr>
         <p:txBody>
           <a:bodyPr/>
-          <a:p/>
+          <a:p>
+            <a:pPr/>
+            <a:endParaRPr/>
+          </a:p>
         </p:txBody>
       </p:sp>
       <p:sp>
@@ -1892,7 +1940,7 @@
   <p:cSld>
     <p:spTree>
       <p:nvGrpSpPr>
-        <p:cNvPr id="39" name="" descr="&lt;Slide style={{ background: '#FFFFFF', padding: 0 }}&gt;&#10;  &lt;Box style={{ height: 72, background: '#1E4FA8', padding: '0 40px', flexDirection: 'row', alignItems: 'center', justifyContent: 'space-between' }}&gt;&#10;    &lt;Text style={{ fontSize: 15, color: '#B9CDF0', letterSpacing: 1 }}&gt;ISAD · INFORMATION SYSTEMS ANALYSIS &amp;amp; DESIGN&lt;/Text&gt;&#10;    &lt;Text style={{ fontSize: 15, color: '#B9CDF0' }}&gt;W02 · OBJECTS&lt;/Text&gt;&#10;  &lt;/Box&gt;&#10;  &lt;Box style={{ padding: '22px 40px 0 40px' }}&gt;&#10;    &lt;Text style={{ fontSize: 34, fontWeight: 'bold', color: '#0E3F8C' }}&gt;Three Objects in CampusBites&lt;/Text&gt;&#10;  &lt;/Box&gt;&#10;  &lt;Box style={{ flex: 1, padding: '22px 40px 0 40px', flexDirection: 'row', gap: 24, alignItems: 'stretch' }}&gt;&#10;    {[&#10;      { icon: 'receipt', name: 'Order', state: 'lines, status, total', behav: 'addItem(), pay(), cancel()' },&#10;      { icon: 'book-open', name: 'MenuItem', state: 'name, price, available', behav: 'applyDiscount(), markSoldOut()' },&#10;      { icon: 'motorcycle', name: 'Rider', state: 'location, onDuty, load', behav: 'acceptDelivery(), reportArrival()' },&#10;    ].map((c) =&gt; (&#10;      &lt;Box key={c.name} style={{ flex: 1, padding: '24px 22px', background: '#F7F9FC', borderRadius: 12, border: '1px solid #E5E7EB', flexDirection: 'column', gap: 12 }}&gt;&#10;        &lt;Box style={{ flexDirection: 'row', alignItems: 'center', gap: 12 }}&gt;&#10;          &lt;Box style={{ width: 48, height: 48, borderRadius: 10, background: '#1E4FA8', justifyContent: 'center', alignItems: 'center' }}&gt;&#10;            &lt;FAIcon name={c.icon} style={{ fill: '#FFFFFF', width: 24, height: 24 }} /&gt;&#10;          &lt;/Box&gt;&#10;          &lt;Text style={{ fontSize: 24, fontWeight: 'bold', color: '#0E3F8C' }}&gt;{c.name}&lt;/Text&gt;&#10;        &lt;/Box&gt;&#10;        &lt;Box style={{ padding: '12px 14px', background: '#E8EFF8', borderRadius: 8 }}&gt;&#10;          &lt;Text style={{ fontSize: 13, color: '#3D7BD9', fontWeight: 'bold', letterSpacing: 1 }}&gt;STATE&lt;/Text&gt;&#10;          &lt;Text style={{ fontSize: 15, color: '#1A2230', marginTop: 5 }}&gt;{c.state}&lt;/Text&gt;&#10;        &lt;/Box&gt;&#10;        &lt;Box style={{ padding: '12px 14px', background: '#F0F5FC', borderRadius: 8 }}&gt;&#10;          &lt;Text style={{ fontSize: 13, color: '#1E4FA8', fontWeight: 'bold', letterSpacing: 1 }}&gt;BEHAVIOUR&lt;/Text&gt;&#10;          &lt;Text style={{ fontSize: 15, color: '#1A2230', marginTop: 5 }}&gt;{c.behav}&lt;/Text&gt;&#10;        &lt;/Box&gt;&#10;      &lt;/Box&gt;&#10;    ))}&#10;  &lt;/Box&gt;&#10;  &lt;Box style={{ height: 52, padding: '0 40px', flexDirection: 'row', alignItems: 'center', gap: 14 }}&gt;&#10;    &lt;FAIcon name='lightbulb' style={{ fill: '#FFC107', width: 22, height: 22 }} /&gt;&#10;    &lt;Text style={{ fontSize: 17, color: '#4A5568' }}&gt;Notice: behaviour sits with the object that owns the data. That is not an accident — it is the whole point.&lt;/Text&gt;&#10;    &lt;Text style={{ fontSize: 14, color: '#1E4FA8', fontWeight: 'bold', marginLeft: 'auto' }}&gt;11 / 38&lt;/Text&gt;&#10;  &lt;/Box&gt;&#10;&lt;/Slide&gt;"/>
+        <p:cNvPr id="39" name=""/>
         <p:cNvGrpSpPr/>
         <p:nvPr/>
       </p:nvGrpSpPr>
@@ -1925,7 +1973,10 @@
         </p:spPr>
         <p:txBody>
           <a:bodyPr/>
-          <a:p/>
+          <a:p>
+            <a:pPr/>
+            <a:endParaRPr/>
+          </a:p>
         </p:txBody>
       </p:sp>
       <p:sp>
@@ -1949,7 +2000,10 @@
         </p:spPr>
         <p:txBody>
           <a:bodyPr/>
-          <a:p/>
+          <a:p>
+            <a:pPr/>
+            <a:endParaRPr/>
+          </a:p>
         </p:txBody>
       </p:sp>
       <p:sp>
@@ -2085,7 +2139,10 @@
         </p:spPr>
         <p:txBody>
           <a:bodyPr/>
-          <a:p/>
+          <a:p>
+            <a:pPr/>
+            <a:endParaRPr/>
+          </a:p>
         </p:txBody>
       </p:sp>
       <p:sp>
@@ -2111,7 +2168,10 @@
         </p:spPr>
         <p:txBody>
           <a:bodyPr/>
-          <a:p/>
+          <a:p>
+            <a:pPr/>
+            <a:endParaRPr/>
+          </a:p>
         </p:txBody>
       </p:sp>
       <p:pic>
@@ -2203,7 +2263,10 @@
         </p:spPr>
         <p:txBody>
           <a:bodyPr/>
-          <a:p/>
+          <a:p>
+            <a:pPr/>
+            <a:endParaRPr/>
+          </a:p>
         </p:txBody>
       </p:sp>
       <p:sp>
@@ -2299,7 +2362,10 @@
         </p:spPr>
         <p:txBody>
           <a:bodyPr/>
-          <a:p/>
+          <a:p>
+            <a:pPr/>
+            <a:endParaRPr/>
+          </a:p>
         </p:txBody>
       </p:sp>
       <p:sp>
@@ -2400,7 +2466,10 @@
         </p:spPr>
         <p:txBody>
           <a:bodyPr/>
-          <a:p/>
+          <a:p>
+            <a:pPr/>
+            <a:endParaRPr/>
+          </a:p>
         </p:txBody>
       </p:sp>
       <p:sp>
@@ -2426,7 +2495,10 @@
         </p:spPr>
         <p:txBody>
           <a:bodyPr/>
-          <a:p/>
+          <a:p>
+            <a:pPr/>
+            <a:endParaRPr/>
+          </a:p>
         </p:txBody>
       </p:sp>
       <p:pic>
@@ -2518,7 +2590,10 @@
         </p:spPr>
         <p:txBody>
           <a:bodyPr/>
-          <a:p/>
+          <a:p>
+            <a:pPr/>
+            <a:endParaRPr/>
+          </a:p>
         </p:txBody>
       </p:sp>
       <p:sp>
@@ -2614,7 +2689,10 @@
         </p:spPr>
         <p:txBody>
           <a:bodyPr/>
-          <a:p/>
+          <a:p>
+            <a:pPr/>
+            <a:endParaRPr/>
+          </a:p>
         </p:txBody>
       </p:sp>
       <p:sp>
@@ -2715,7 +2793,10 @@
         </p:spPr>
         <p:txBody>
           <a:bodyPr/>
-          <a:p/>
+          <a:p>
+            <a:pPr/>
+            <a:endParaRPr/>
+          </a:p>
         </p:txBody>
       </p:sp>
       <p:sp>
@@ -2741,7 +2822,10 @@
         </p:spPr>
         <p:txBody>
           <a:bodyPr/>
-          <a:p/>
+          <a:p>
+            <a:pPr/>
+            <a:endParaRPr/>
+          </a:p>
         </p:txBody>
       </p:sp>
       <p:pic>
@@ -2833,7 +2917,10 @@
         </p:spPr>
         <p:txBody>
           <a:bodyPr/>
-          <a:p/>
+          <a:p>
+            <a:pPr/>
+            <a:endParaRPr/>
+          </a:p>
         </p:txBody>
       </p:sp>
       <p:sp>
@@ -2929,7 +3016,10 @@
         </p:spPr>
         <p:txBody>
           <a:bodyPr/>
-          <a:p/>
+          <a:p>
+            <a:pPr/>
+            <a:endParaRPr/>
+          </a:p>
         </p:txBody>
       </p:sp>
       <p:sp>
@@ -3113,7 +3203,7 @@
   <p:cSld>
     <p:spTree>
       <p:nvGrpSpPr>
-        <p:cNvPr id="78" name="" descr="&lt;Slide style={{ background: '#0E3F8C', padding: 0 }}&gt;&#10;  &lt;Box style={{ flexDirection: 'row', height: '100%', position: 'relative' }}&gt;&#10;    &lt;Box style={{ position: 'absolute', top: 0, left: 0, right: 0, height: 8, background: '#1E4FA8' }} /&gt;&#10;    &lt;Box style={{ width: 300, justifyContent: 'center', alignItems: 'center', borderRight: '1px solid #2B5793' }}&gt;&#10;      &lt;Text style={{ fontSize: 220, fontWeight: 'bold', color: '#3D7BD9', fontFamily: 'Georgia, serif', lineHeight: 1 }}&gt;03&lt;/Text&gt;&#10;    &lt;/Box&gt;&#10;    &lt;Box style={{ flex: 1, padding: '70px 64px', flexDirection: 'column', justifyContent: 'center' }}&gt;&#10;      &lt;Text style={{ fontSize: 15, color: '#7FA2D6', letterSpacing: 2, marginBottom: 18 }}&gt;PART 1 · LECTURE&lt;/Text&gt;&#10;      &lt;Text style={{ fontSize: 48, fontWeight: 'bold', color: '#FFFFFF', lineHeight: 1.18 }}&gt;Encapsulation&lt;/Text&gt;&#10;      &lt;Box style={{ width: 64, height: 4, background: '#FFC107', marginTop: 26, marginBottom: 26 }} /&gt;&#10;      &lt;Box style={{ flexDirection: 'column', gap: 12 }}&gt;&#10;        {[&#10;          'Hide the state; expose the behaviour',&#10;          'Private fields, guarded public methods',&#10;          'Why hiding state protects your rules',&#10;        ].map((t) =&gt; (&#10;          &lt;Box key={t} style={{ flexDirection: 'row', alignItems: 'center', gap: 12 }}&gt;&#10;            &lt;Box style={{ width: 8, height: 8, borderRadius: 4, background: '#3D7BD9' }} /&gt;&#10;            &lt;Text style={{ fontSize: 20, color: '#C5D4EA' }}&gt;{t}&lt;/Text&gt;&#10;          &lt;/Box&gt;&#10;        ))}&#10;      &lt;/Box&gt;&#10;    &lt;/Box&gt;&#10;  &lt;/Box&gt;&#10;&lt;/Slide&gt;"/>
+        <p:cNvPr id="78" name=""/>
         <p:cNvGrpSpPr/>
         <p:nvPr/>
       </p:nvGrpSpPr>
@@ -3146,7 +3236,10 @@
         </p:spPr>
         <p:txBody>
           <a:bodyPr/>
-          <a:p/>
+          <a:p>
+            <a:pPr/>
+            <a:endParaRPr/>
+          </a:p>
         </p:txBody>
       </p:sp>
       <p:sp>
@@ -3186,7 +3279,10 @@
         </p:spPr>
         <p:txBody>
           <a:bodyPr/>
-          <a:p/>
+          <a:p>
+            <a:pPr/>
+            <a:endParaRPr/>
+          </a:p>
         </p:txBody>
       </p:sp>
       <p:sp>
@@ -3315,7 +3411,10 @@
         </p:spPr>
         <p:txBody>
           <a:bodyPr/>
-          <a:p/>
+          <a:p>
+            <a:pPr/>
+            <a:endParaRPr/>
+          </a:p>
         </p:txBody>
       </p:sp>
       <p:sp>
@@ -3341,7 +3440,10 @@
         </p:spPr>
         <p:txBody>
           <a:bodyPr/>
-          <a:p/>
+          <a:p>
+            <a:pPr/>
+            <a:endParaRPr/>
+          </a:p>
         </p:txBody>
       </p:sp>
       <p:sp>
@@ -3402,7 +3504,10 @@
         </p:spPr>
         <p:txBody>
           <a:bodyPr/>
-          <a:p/>
+          <a:p>
+            <a:pPr/>
+            <a:endParaRPr/>
+          </a:p>
         </p:txBody>
       </p:sp>
       <p:sp>
@@ -3463,7 +3568,10 @@
         </p:spPr>
         <p:txBody>
           <a:bodyPr/>
-          <a:p/>
+          <a:p>
+            <a:pPr/>
+            <a:endParaRPr/>
+          </a:p>
         </p:txBody>
       </p:sp>
       <p:sp>
@@ -3522,7 +3630,10 @@
         </p:spPr>
         <p:txBody>
           <a:bodyPr/>
-          <a:p/>
+          <a:p>
+            <a:pPr/>
+            <a:endParaRPr/>
+          </a:p>
         </p:txBody>
       </p:sp>
     </p:spTree>
@@ -3535,7 +3646,7 @@
   <p:cSld>
     <p:spTree>
       <p:nvGrpSpPr>
-        <p:cNvPr id="92" name="" descr="&lt;Slide style={{ background: '#FFFFFF', padding: 0 }}&gt;&#10;  &lt;Box style={{ height: 72, background: '#1E4FA8', padding: '0 40px', flexDirection: 'row', alignItems: 'center', justifyContent: 'space-between' }}&gt;&#10;    &lt;Text style={{ fontSize: 15, color: '#B9CDF0', letterSpacing: 1 }}&gt;ISAD · INFORMATION SYSTEMS ANALYSIS &amp;amp; DESIGN&lt;/Text&gt;&#10;    &lt;Text style={{ fontSize: 15, color: '#B9CDF0' }}&gt;W02 · ENCAPSULATION&lt;/Text&gt;&#10;  &lt;/Box&gt;&#10;  &lt;Box style={{ padding: '22px 40px 0 40px' }}&gt;&#10;    &lt;Text style={{ fontSize: 34, fontWeight: 'bold', color: '#0E3F8C' }}&gt;What Encapsulation Means&lt;/Text&gt;&#10;  &lt;/Box&gt;&#10;  &lt;Box style={{ flex: 1, padding: '20px 40px 0 40px', flexDirection: 'row', gap: 28 }}&gt;&#10;    &lt;Box style={{ flex: 1, flexDirection: 'column', gap: 12, justifyContent: 'center' }}&gt;&#10;      {[&#10;        ['shield-alt', 'Information hiding', 'The object keeps its data private and decides for itself how that data changes.'],&#10;        ['door-closed', 'A public interface', 'Only a small set of methods is visible from outside — the object\'s contract.'],&#10;        ['exchange-alt', 'Change without breaking', 'Internals can be rewritten as long as the public methods behave the same.'],&#10;      ].map(([icon, t, d]) =&gt; (&#10;        &lt;Box key={t} style={{ flexDirection: 'row', gap: 14, alignItems: 'flex-start', padding: '16px 18px', background: '#F7F9FC', borderRadius: 10, border: '1px solid #E5E7EB' }}&gt;&#10;          &lt;Box style={{ width: 44, height: 44, borderRadius: 10, background: '#E8EFF8', justifyContent: 'center', alignItems: 'center' }}&gt;&#10;            &lt;FAIcon name={icon} style={{ fill: '#1E4FA8', width: 22, height: 22 }} /&gt;&#10;          &lt;/Box&gt;&#10;          &lt;Box style={{ flex: 1, flexDirection: 'column', gap: 4 }}&gt;&#10;            &lt;Text style={{ fontSize: 18, fontWeight: 'bold', color: '#1A2230' }}&gt;{t}&lt;/Text&gt;&#10;            &lt;Text style={{ fontSize: 15, color: '#4A5568', lineHeight: 1.5 }}&gt;{d}&lt;/Text&gt;&#10;          &lt;/Box&gt;&#10;        &lt;/Box&gt;&#10;      ))}&#10;    &lt;/Box&gt;&#10;    &lt;Box style={{ width: 340, padding: '28px 26px', background: '#0E3F8C', borderRadius: 12, flexDirection: 'column', justifyContent: 'center', gap: 14 }}&gt;&#10;      &lt;Text style={{ fontSize: 16, color: '#7FA2D6', letterSpacing: 1 }}&gt;IN ONE SENTENCE&lt;/Text&gt;&#10;      &lt;Text style={{ fontSize: 24, fontWeight: 'bold', color: '#FFFFFF', lineHeight: 1.35 }}&gt;Tell an object what to do. Never reach in and do it for it.&lt;/Text&gt;&#10;      &lt;Box style={{ width: 48, height: 4, background: '#FFC107' }} /&gt;&#10;      &lt;Text style={{ fontSize: 16, color: '#C5D4EA', lineHeight: 1.55 }}&gt;This is the &quot;tell, don't ask&quot; rule. It is the seed of almost every design principle we meet later.&lt;/Text&gt;&#10;    &lt;/Box&gt;&#10;  &lt;/Box&gt;&#10;  &lt;Box style={{ height: 40, padding: '0 40px', flexDirection: 'row', alignItems: 'center', justifyContent: 'space-between' }}&gt;&#10;    &lt;Text style={{ fontSize: 13, color: '#8B97A8' }}&gt;ISAD · Fall 2026&lt;/Text&gt;&#10;    &lt;Text style={{ fontSize: 14, color: '#1E4FA8', fontWeight: 'bold' }}&gt;13 / 38&lt;/Text&gt;&#10;  &lt;/Box&gt;&#10;&lt;/Slide&gt;"/>
+        <p:cNvPr id="92" name=""/>
         <p:cNvGrpSpPr/>
         <p:nvPr/>
       </p:nvGrpSpPr>
@@ -3568,7 +3679,10 @@
         </p:spPr>
         <p:txBody>
           <a:bodyPr/>
-          <a:p/>
+          <a:p>
+            <a:pPr/>
+            <a:endParaRPr/>
+          </a:p>
         </p:txBody>
       </p:sp>
       <p:sp>
@@ -3592,7 +3706,10 @@
         </p:spPr>
         <p:txBody>
           <a:bodyPr/>
-          <a:p/>
+          <a:p>
+            <a:pPr/>
+            <a:endParaRPr/>
+          </a:p>
         </p:txBody>
       </p:sp>
       <p:sp>
@@ -3728,7 +3845,10 @@
         </p:spPr>
         <p:txBody>
           <a:bodyPr/>
-          <a:p/>
+          <a:p>
+            <a:pPr/>
+            <a:endParaRPr/>
+          </a:p>
         </p:txBody>
       </p:sp>
       <p:sp>
@@ -3754,7 +3874,10 @@
         </p:spPr>
         <p:txBody>
           <a:bodyPr/>
-          <a:p/>
+          <a:p>
+            <a:pPr/>
+            <a:endParaRPr/>
+          </a:p>
         </p:txBody>
       </p:sp>
       <p:pic>
@@ -3886,7 +4009,10 @@
         </p:spPr>
         <p:txBody>
           <a:bodyPr/>
-          <a:p/>
+          <a:p>
+            <a:pPr/>
+            <a:endParaRPr/>
+          </a:p>
         </p:txBody>
       </p:sp>
       <p:sp>
@@ -3912,7 +4038,10 @@
         </p:spPr>
         <p:txBody>
           <a:bodyPr/>
-          <a:p/>
+          <a:p>
+            <a:pPr/>
+            <a:endParaRPr/>
+          </a:p>
         </p:txBody>
       </p:sp>
       <p:pic>
@@ -4044,7 +4173,10 @@
         </p:spPr>
         <p:txBody>
           <a:bodyPr/>
-          <a:p/>
+          <a:p>
+            <a:pPr/>
+            <a:endParaRPr/>
+          </a:p>
         </p:txBody>
       </p:sp>
       <p:sp>
@@ -4070,7 +4202,10 @@
         </p:spPr>
         <p:txBody>
           <a:bodyPr/>
-          <a:p/>
+          <a:p>
+            <a:pPr/>
+            <a:endParaRPr/>
+          </a:p>
         </p:txBody>
       </p:sp>
       <p:pic>
@@ -4197,7 +4332,10 @@
         </p:spPr>
         <p:txBody>
           <a:bodyPr/>
-          <a:p/>
+          <a:p>
+            <a:pPr/>
+            <a:endParaRPr/>
+          </a:p>
         </p:txBody>
       </p:sp>
       <p:sp>
@@ -4293,7 +4431,10 @@
         </p:spPr>
         <p:txBody>
           <a:bodyPr/>
-          <a:p/>
+          <a:p>
+            <a:pPr/>
+            <a:endParaRPr/>
+          </a:p>
         </p:txBody>
       </p:sp>
       <p:sp>
@@ -4413,7 +4554,7 @@
   <p:cSld>
     <p:spTree>
       <p:nvGrpSpPr>
-        <p:cNvPr id="120" name="" descr="&lt;Slide style={{ background: '#FFFFFF', padding: 0 }}&gt;&#10;  &lt;Box style={{ height: 72, background: '#1E4FA8', padding: '0 40px', flexDirection: 'row', alignItems: 'center', justifyContent: 'space-between' }}&gt;&#10;    &lt;Text style={{ fontSize: 15, color: '#B9CDF0', letterSpacing: 1 }}&gt;ISAD · INFORMATION SYSTEMS ANALYSIS &amp;amp; DESIGN&lt;/Text&gt;&#10;    &lt;Text style={{ fontSize: 15, color: '#B9CDF0' }}&gt;W02 · ENCAPSULATION&lt;/Text&gt;&#10;  &lt;/Box&gt;&#10;  &lt;Box style={{ padding: '20px 40px 0 40px' }}&gt;&#10;    &lt;Text style={{ fontSize: 32, fontWeight: 'bold', color: '#0E3F8C' }}&gt;Encapsulation on Paper&lt;/Text&gt;&#10;  &lt;/Box&gt;&#10;  &lt;Box style={{ flex: 1, padding: '16px 40px 0 40px', flexDirection: 'row', gap: 26 }}&gt;&#10;    &lt;Box style={{ flex: 3, justifyContent: 'center' }}&gt;&#10;      &lt;CodeBlock theme='one-dark-pro' code={`Class Order&#10;    - lines : OrderLine[0..*]&#10;    - status : OrderStatus = DRAFT&#10;&#10;    + addItem(item, qty)&#10;        if status is not DRAFT&#10;            refuse - order already placed&#10;        lines.add(a new OrderLine(item, qty))&#10;&#10;    + total() : Money&#10;        sum = ZERO&#10;        for each line in lines&#10;            sum = sum + line.subtotal()&#10;        return sum`} language='text' width={580} fontSize={13} /&gt;&#10;    &lt;/Box&gt;&#10;    &lt;Box style={{ flex: 2, flexDirection: 'column', gap: 11, justifyContent: 'center' }}&gt;&#10;      {[&#10;        ['lock', 'private fields', 'Nobody outside can set status to a nonsense value.'],&#10;        ['user-check', 'guarded method', 'addItem() refuses once the order is placed.'],&#10;        ['calculator', 'computed, not stored', 'total() is derived — there is no stale copy to drift.'],&#10;      ].map(([icon, t, d]) =&gt; (&#10;        &lt;Box key={t} style={{ flexDirection: 'row', gap: 12, alignItems: 'flex-start', padding: '14px 16px', background: '#F7F9FC', borderRadius: 10, border: '1px solid #E5E7EB' }}&gt;&#10;          &lt;Box style={{ width: 38, height: 38, borderRadius: 9, background: '#E8EFF8', justifyContent: 'center', alignItems: 'center' }}&gt;&#10;            &lt;FAIcon name={icon} style={{ fill: '#1E4FA8', width: 19, height: 19 }} /&gt;&#10;          &lt;/Box&gt;&#10;          &lt;Box style={{ flex: 1, flexDirection: 'column', gap: 2 }}&gt;&#10;            &lt;Text style={{ fontSize: 16, fontWeight: 'bold', color: '#0E3F8C' }}&gt;{t}&lt;/Text&gt;&#10;            &lt;Text style={{ fontSize: 14, color: '#4A5568', lineHeight: 1.45 }}&gt;{d}&lt;/Text&gt;&#10;          &lt;/Box&gt;&#10;        &lt;/Box&gt;&#10;      ))}&#10;    &lt;/Box&gt;&#10;  &lt;/Box&gt;&#10;  &lt;Box style={{ height: 40, padding: '0 40px', flexDirection: 'row', alignItems: 'center', justifyContent: 'space-between' }}&gt;&#10;    &lt;Text style={{ fontSize: 13, color: '#8B97A8' }}&gt;Generic types omitted for slide width; your lab code uses List&amp;lt;OrderLine&amp;gt;.&lt;/Text&gt;&#10;    &lt;Text style={{ fontSize: 14, color: '#1E4FA8', fontWeight: 'bold' }}&gt;14 / 38&lt;/Text&gt;&#10;  &lt;/Box&gt;&#10;&lt;/Slide&gt;"/>
+        <p:cNvPr id="120" name=""/>
         <p:cNvGrpSpPr/>
         <p:nvPr/>
       </p:nvGrpSpPr>
@@ -4446,7 +4587,10 @@
         </p:spPr>
         <p:txBody>
           <a:bodyPr/>
-          <a:p/>
+          <a:p>
+            <a:pPr/>
+            <a:endParaRPr/>
+          </a:p>
         </p:txBody>
       </p:sp>
       <p:sp>
@@ -4470,7 +4614,10 @@
         </p:spPr>
         <p:txBody>
           <a:bodyPr/>
-          <a:p/>
+          <a:p>
+            <a:pPr/>
+            <a:endParaRPr/>
+          </a:p>
         </p:txBody>
       </p:sp>
       <p:sp>
@@ -4606,7 +4753,10 @@
         </p:spPr>
         <p:txBody>
           <a:bodyPr/>
-          <a:p/>
+          <a:p>
+            <a:pPr/>
+            <a:endParaRPr/>
+          </a:p>
         </p:txBody>
       </p:sp>
       <p:sp>
@@ -4632,7 +4782,10 @@
         </p:spPr>
         <p:txBody>
           <a:bodyPr/>
-          <a:p/>
+          <a:p>
+            <a:pPr/>
+            <a:endParaRPr/>
+          </a:p>
         </p:txBody>
       </p:sp>
       <p:pic>
@@ -4764,7 +4917,10 @@
         </p:spPr>
         <p:txBody>
           <a:bodyPr/>
-          <a:p/>
+          <a:p>
+            <a:pPr/>
+            <a:endParaRPr/>
+          </a:p>
         </p:txBody>
       </p:sp>
       <p:sp>
@@ -4790,7 +4946,10 @@
         </p:spPr>
         <p:txBody>
           <a:bodyPr/>
-          <a:p/>
+          <a:p>
+            <a:pPr/>
+            <a:endParaRPr/>
+          </a:p>
         </p:txBody>
       </p:sp>
       <p:pic>
@@ -4922,7 +5081,10 @@
         </p:spPr>
         <p:txBody>
           <a:bodyPr/>
-          <a:p/>
+          <a:p>
+            <a:pPr/>
+            <a:endParaRPr/>
+          </a:p>
         </p:txBody>
       </p:sp>
       <p:sp>
@@ -4948,7 +5110,10 @@
         </p:spPr>
         <p:txBody>
           <a:bodyPr/>
-          <a:p/>
+          <a:p>
+            <a:pPr/>
+            <a:endParaRPr/>
+          </a:p>
         </p:txBody>
       </p:sp>
       <p:pic>
@@ -5145,7 +5310,10 @@
         </p:spPr>
         <p:txBody>
           <a:bodyPr/>
-          <a:p/>
+          <a:p>
+            <a:pPr/>
+            <a:endParaRPr/>
+          </a:p>
         </p:txBody>
       </p:sp>
       <p:sp>
@@ -5202,7 +5370,7 @@
   <p:cSld>
     <p:spTree>
       <p:nvGrpSpPr>
-        <p:cNvPr id="145" name="" descr="&lt;Slide style={{ background: '#FFFFFF', padding: 0 }}&gt;&#10;  &lt;Box style={{ height: 72, background: '#1E4FA8', padding: '0 40px', flexDirection: 'row', alignItems: 'center', justifyContent: 'space-between' }}&gt;&#10;    &lt;Text style={{ fontSize: 15, color: '#B9CDF0', letterSpacing: 1 }}&gt;ISAD · INFORMATION SYSTEMS ANALYSIS &amp;amp; DESIGN&lt;/Text&gt;&#10;    &lt;Text style={{ fontSize: 15, color: '#B9CDF0' }}&gt;W02 · ENCAPSULATION&lt;/Text&gt;&#10;  &lt;/Box&gt;&#10;  &lt;Box style={{ padding: '20px 40px 0 40px' }}&gt;&#10;    &lt;Text style={{ fontSize: 32, fontWeight: 'bold', color: '#0E3F8C' }}&gt;The Getter / Setter Debate&lt;/Text&gt;&#10;  &lt;/Box&gt;&#10;  &lt;Box style={{ flex: 1, padding: '16px 40px 0 40px', flexDirection: 'row', gap: 26 }}&gt;&#10;    &lt;Box style={{ flex: 3, flexDirection: 'column', gap: 12 }}&gt;&#10;      &lt;Box style={{ flex: 1, padding: '16px 18px', background: '#FDF3F3', borderRadius: 12, border: '1px solid #D9534F', flexDirection: 'column' }}&gt;&#10;        &lt;Box style={{ flexDirection: 'row', alignItems: 'center', gap: 10, marginBottom: 8 }}&gt;&#10;          &lt;FAIcon name='times-circle' style={{ fill: '#D9534F', width: 20, height: 20 }} /&gt;&#10;          &lt;Text style={{ fontSize: 16, fontWeight: 'bold', color: '#D9534F' }}&gt;Expose the fields — every caller re-implements the rule&lt;/Text&gt;&#10;        &lt;/Box&gt;&#10;        &lt;CodeBlock theme='one-dark-pro' code={`Class Order&#10;    + lines : OrderLine[0..*]&#10;    + status : OrderStatus&#10;&#10;# every caller must know the rule&#10;if order.status is DRAFT&#10;    order.lines.add(a new OrderLine(item, qty))&#10;# one caller forgets the check.&#10;# now the order is wrong.`} language='text' width={520} fontSize={12} /&gt;&#10;      &lt;/Box&gt;&#10;    &lt;/Box&gt;&#10;    &lt;Box style={{ flex: 2, flexDirection: 'column', gap: 12 }}&gt;&#10;      &lt;Box style={{ padding: '16px 18px', background: '#F0F5FC', borderRadius: 12, border: '1px solid #3D7BD9', flexDirection: 'column' }}&gt;&#10;        &lt;Box style={{ flexDirection: 'row', alignItems: 'center', gap: 10, marginBottom: 8 }}&gt;&#10;          &lt;FAIcon name='check-circle' style={{ fill: '#1E4FA8', width: 20, height: 20 }} /&gt;&#10;          &lt;Text style={{ fontSize: 16, fontWeight: 'bold', color: '#0E3F8C' }}&gt;Ask the object — the rule has one home&lt;/Text&gt;&#10;        &lt;/Box&gt;&#10;        &lt;CodeBlock theme='one-dark-pro' code={`# the rule lives with the data&#10;order.addItem(item, qty)`} language='text' width={330} fontSize={12} /&gt;&#10;      &lt;/Box&gt;&#10;      &lt;Box style={{ flex: 1, padding: '20px 22px', background: '#0E3F8C', borderRadius: 12, flexDirection: 'column', justifyContent: 'center', gap: 12 }}&gt;&#10;        &lt;Text style={{ fontSize: 20, fontWeight: 'bold', color: '#FFFFFF', lineHeight: 1.35 }}&gt;A getter for everything is just public fields with extra steps.&lt;/Text&gt;&#10;        &lt;Text style={{ fontSize: 15, color: '#C5D4EA', lineHeight: 1.5 }}&gt;Ask what the object should &lt;Text style={{ fontWeight: 'bold', color: '#FFC107' }}&gt;do&lt;/Text&gt;, not what it should &lt;Text style={{ fontWeight: 'bold', color: '#FFC107' }}&gt;reveal&lt;/Text&gt;.&lt;/Text&gt;&#10;      &lt;/Box&gt;&#10;    &lt;/Box&gt;&#10;  &lt;/Box&gt;&#10;  &lt;Box style={{ height: 40, padding: '0 40px', flexDirection: 'row', alignItems: 'center', justifyContent: 'space-between' }}&gt;&#10;    &lt;Text style={{ fontSize: 13, color: '#8B97A8' }}&gt;Getters for reporting are fine. Getters that let callers enforce rules are not.&lt;/Text&gt;&#10;    &lt;Text style={{ fontSize: 14, color: '#1E4FA8', fontWeight: 'bold' }}&gt;15 / 38&lt;/Text&gt;&#10;  &lt;/Box&gt;&#10;&lt;/Slide&gt;"/>
+        <p:cNvPr id="145" name=""/>
         <p:cNvGrpSpPr/>
         <p:nvPr/>
       </p:nvGrpSpPr>
@@ -5235,7 +5403,10 @@
         </p:spPr>
         <p:txBody>
           <a:bodyPr/>
-          <a:p/>
+          <a:p>
+            <a:pPr/>
+            <a:endParaRPr/>
+          </a:p>
         </p:txBody>
       </p:sp>
       <p:sp>
@@ -5259,7 +5430,10 @@
         </p:spPr>
         <p:txBody>
           <a:bodyPr/>
-          <a:p/>
+          <a:p>
+            <a:pPr/>
+            <a:endParaRPr/>
+          </a:p>
         </p:txBody>
       </p:sp>
       <p:sp>
@@ -5395,7 +5569,10 @@
         </p:spPr>
         <p:txBody>
           <a:bodyPr/>
-          <a:p/>
+          <a:p>
+            <a:pPr/>
+            <a:endParaRPr/>
+          </a:p>
         </p:txBody>
       </p:sp>
       <p:pic>
@@ -5492,7 +5669,10 @@
         </p:spPr>
         <p:txBody>
           <a:bodyPr/>
-          <a:p/>
+          <a:p>
+            <a:pPr/>
+            <a:endParaRPr/>
+          </a:p>
         </p:txBody>
       </p:sp>
       <p:pic>
@@ -5584,7 +5764,10 @@
         </p:spPr>
         <p:txBody>
           <a:bodyPr/>
-          <a:p/>
+          <a:p>
+            <a:pPr/>
+            <a:endParaRPr/>
+          </a:p>
         </p:txBody>
       </p:sp>
       <p:sp>
@@ -5792,7 +5975,10 @@
         </p:spPr>
         <p:txBody>
           <a:bodyPr/>
-          <a:p/>
+          <a:p>
+            <a:pPr/>
+            <a:endParaRPr/>
+          </a:p>
         </p:txBody>
       </p:sp>
       <p:sp>
@@ -5858,7 +6044,10 @@
         </p:spPr>
         <p:txBody>
           <a:bodyPr/>
-          <a:p/>
+          <a:p>
+            <a:pPr/>
+            <a:endParaRPr/>
+          </a:p>
         </p:txBody>
       </p:sp>
       <p:sp>
@@ -5905,7 +6094,7 @@
   <p:cSld>
     <p:spTree>
       <p:nvGrpSpPr>
-        <p:cNvPr id="166" name="" descr="&lt;Slide style={{ background: '#FFFFFF', padding: 0 }}&gt;&#10;  &lt;Box style={{ height: 72, background: '#1E4FA8', padding: '0 40px', flexDirection: 'row', alignItems: 'center', justifyContent: 'space-between' }}&gt;&#10;    &lt;Text style={{ fontSize: 15, color: '#B9CDF0', letterSpacing: 1 }}&gt;ISAD · INFORMATION SYSTEMS ANALYSIS &amp;amp; DESIGN&lt;/Text&gt;&#10;    &lt;Text style={{ fontSize: 15, color: '#B9CDF0' }}&gt;W02 · ENCAPSULATION&lt;/Text&gt;&#10;  &lt;/Box&gt;&#10;  &lt;Box style={{ padding: '22px 40px 0 40px' }}&gt;&#10;    &lt;Text style={{ fontSize: 32, fontWeight: 'bold', color: '#0E3F8C' }}&gt;Why Hiding State Matters&lt;/Text&gt;&#10;  &lt;/Box&gt;&#10;  &lt;Box style={{ flex: 1, padding: '14px 40px 0 40px', flexDirection: 'row', gap: 26 }}&gt;&#10;    &lt;Box style={{ flex: 5, justifyContent: 'center', alignItems: 'center' }}&gt;&#10;      &lt;svg width={600} height={340} viewBox='0 0 600 340'&gt;&#10;        &lt;text x='300' y='26' textAnchor='middle' fill='#0E3F8C' fontSize='19' fontWeight='bold'&gt;An invariant the object must protect&lt;/text&gt;&#10;        &lt;text x='300' y='52' textAnchor='middle' fill='#8B97A8' fontSize='15'&gt;&quot;A placed order can no longer accept new items.&quot;&lt;/text&gt;&#10;        &lt;rect x='30' y='78' width='250' height='118' rx='12' fill='#FDF3F3' stroke='#D9534F' strokeWidth='2' /&gt;&#10;        &lt;text x='155' y='108' textAnchor='middle' fill='#D9534F' fontSize='17' fontWeight='bold'&gt;+ fields (open)&lt;/text&gt;&#10;        &lt;text x='155' y='136' textAnchor='middle' fill='#4A5568' fontSize='14'&gt;order.status = PLACED;&lt;/text&gt;&#10;        &lt;text x='155' y='158' textAnchor='middle' fill='#4A5568' fontSize='14'&gt;order.lines.add(...)&lt;/text&gt;&#10;        &lt;text x='155' y='184' textAnchor='middle' fill='#D9534F' fontSize='14' fontWeight='bold'&gt;invariant broken&lt;/text&gt;&#10;        &lt;rect x='320' y='78' width='250' height='118' rx='12' fill='#E8EFF8' stroke='#1E4FA8' strokeWidth='2' /&gt;&#10;        &lt;text x='445' y='108' textAnchor='middle' fill='#0E3F8C' fontSize='17' fontWeight='bold'&gt;&amp;#8722; fields + guard&lt;/text&gt;&#10;        &lt;text x='445' y='136' textAnchor='middle' fill='#4A5568' fontSize='14'&gt;order.addItem(...)&lt;/text&gt;&#10;        &lt;text x='445' y='158' textAnchor='middle' fill='#4A5568' fontSize='14'&gt;→ IllegalStateException&lt;/text&gt;&#10;        &lt;text x='445' y='184' textAnchor='middle' fill='#1E4FA8' fontSize='14' fontWeight='bold'&gt;invariant held&lt;/text&gt;&#10;        &lt;line x1='155' y1='196' x2='155' y2='228' stroke='#D9534F' strokeWidth='2' /&gt;&#10;        &lt;line x1='445' y1='196' x2='445' y2='228' stroke='#1E4FA8' strokeWidth='2' /&gt;&#10;        &lt;rect x='30' y='228' width='540' height='86' rx='12' fill='#0E3F8C' /&gt;&#10;        &lt;text x='300' y='258' textAnchor='middle' fill='#FFFFFF' fontSize='17' fontWeight='bold'&gt;Encapsulation is not politeness.&lt;/text&gt;&#10;        &lt;text x='300' y='286' textAnchor='middle' fill='#C5D4EA' fontSize='15'&gt;It is the only place a business rule can be enforced once.&lt;/text&gt;&#10;        &lt;text x='300' y='306' textAnchor='middle' fill='#FFC107' fontSize='14'&gt;Ask yourself: who is allowed to change this field?&lt;/text&gt;&#10;      &lt;/svg&gt;&#10;    &lt;/Box&gt;&#10;    &lt;Box style={{ flex: 4, flexDirection: 'column', gap: 12, justifyContent: 'center' }}&gt;&#10;      {[&#10;        ['balance-scale', 'Invariant', 'A rule that must hold at every moment — not just after a good call.'],&#10;        ['search', 'One place to look', 'When a rule can only be broken in one method, debugging is short.'],&#10;        ['code-branch', 'Safe to refactor', 'Callers depend on the method, never on the fields behind it.'],&#10;      ].map(([icon, t, d]) =&gt; (&#10;        &lt;Box key={t} style={{ flexDirection: 'row', gap: 13, alignItems: 'flex-start', padding: '15px 17px', background: '#F7F9FC', borderRadius: 10, border: '1px solid #E5E7EB' }}&gt;&#10;          &lt;Box style={{ width: 40, height: 40, borderRadius: 9, background: '#E8EFF8', justifyContent: 'center', alignItems: 'center' }}&gt;&#10;            &lt;FAIcon name={icon} style={{ fill: '#1E4FA8', width: 20, height: 20 }} /&gt;&#10;          &lt;/Box&gt;&#10;          &lt;Box style={{ flex: 1, flexDirection: 'column', gap: 3 }}&gt;&#10;            &lt;Text style={{ fontSize: 17, fontWeight: 'bold', color: '#1A2230' }}&gt;{t}&lt;/Text&gt;&#10;            &lt;Text style={{ fontSize: 14, color: '#4A5568', lineHeight: 1.5 }}&gt;{d}&lt;/Text&gt;&#10;          &lt;/Box&gt;&#10;        &lt;/Box&gt;&#10;      ))}&#10;    &lt;/Box&gt;&#10;  &lt;/Box&gt;&#10;  &lt;Box style={{ height: 40, padding: '0 40px', flexDirection: 'row', alignItems: 'center', justifyContent: 'space-between' }}&gt;&#10;    &lt;Text style={{ fontSize: 13, color: '#8B97A8' }}&gt;ISAD · Fall 2026&lt;/Text&gt;&#10;    &lt;Text style={{ fontSize: 14, color: '#1E4FA8', fontWeight: 'bold' }}&gt;16 / 38&lt;/Text&gt;&#10;  &lt;/Box&gt;&#10;&lt;/Slide&gt;"/>
+        <p:cNvPr id="166" name=""/>
         <p:cNvGrpSpPr/>
         <p:nvPr/>
       </p:nvGrpSpPr>
@@ -5938,7 +6127,10 @@
         </p:spPr>
         <p:txBody>
           <a:bodyPr/>
-          <a:p/>
+          <a:p>
+            <a:pPr/>
+            <a:endParaRPr/>
+          </a:p>
         </p:txBody>
       </p:sp>
       <p:sp>
@@ -5962,7 +6154,10 @@
         </p:spPr>
         <p:txBody>
           <a:bodyPr/>
-          <a:p/>
+          <a:p>
+            <a:pPr/>
+            <a:endParaRPr/>
+          </a:p>
         </p:txBody>
       </p:sp>
       <p:sp>
@@ -6129,7 +6324,10 @@
         </p:spPr>
         <p:txBody>
           <a:bodyPr/>
-          <a:p/>
+          <a:p>
+            <a:pPr/>
+            <a:endParaRPr/>
+          </a:p>
         </p:txBody>
       </p:sp>
       <p:sp>
@@ -6155,7 +6353,10 @@
         </p:spPr>
         <p:txBody>
           <a:bodyPr/>
-          <a:p/>
+          <a:p>
+            <a:pPr/>
+            <a:endParaRPr/>
+          </a:p>
         </p:txBody>
       </p:sp>
       <p:pic>
@@ -6287,7 +6488,10 @@
         </p:spPr>
         <p:txBody>
           <a:bodyPr/>
-          <a:p/>
+          <a:p>
+            <a:pPr/>
+            <a:endParaRPr/>
+          </a:p>
         </p:txBody>
       </p:sp>
       <p:sp>
@@ -6313,7 +6517,10 @@
         </p:spPr>
         <p:txBody>
           <a:bodyPr/>
-          <a:p/>
+          <a:p>
+            <a:pPr/>
+            <a:endParaRPr/>
+          </a:p>
         </p:txBody>
       </p:sp>
       <p:pic>
@@ -6445,7 +6652,10 @@
         </p:spPr>
         <p:txBody>
           <a:bodyPr/>
-          <a:p/>
+          <a:p>
+            <a:pPr/>
+            <a:endParaRPr/>
+          </a:p>
         </p:txBody>
       </p:sp>
       <p:sp>
@@ -6471,7 +6681,10 @@
         </p:spPr>
         <p:txBody>
           <a:bodyPr/>
-          <a:p/>
+          <a:p>
+            <a:pPr/>
+            <a:endParaRPr/>
+          </a:p>
         </p:txBody>
       </p:sp>
       <p:pic>
@@ -6655,7 +6868,7 @@
   <p:cSld>
     <p:spTree>
       <p:nvGrpSpPr>
-        <p:cNvPr id="190" name="" descr="&lt;Slide style={{ background: '#0E3F8C', padding: 0 }}&gt;&#10;  &lt;Box style={{ flexDirection: 'row', height: '100%', position: 'relative' }}&gt;&#10;    &lt;Box style={{ position: 'absolute', top: 0, left: 0, right: 0, height: 8, background: '#1E4FA8' }} /&gt;&#10;    &lt;Box style={{ width: 300, justifyContent: 'center', alignItems: 'center', borderRight: '1px solid #2B5793' }}&gt;&#10;      &lt;Text style={{ fontSize: 220, fontWeight: 'bold', color: '#3D7BD9', fontFamily: 'Georgia, serif', lineHeight: 1 }}&gt;04&lt;/Text&gt;&#10;    &lt;/Box&gt;&#10;    &lt;Box style={{ flex: 1, padding: '70px 64px', flexDirection: 'column', justifyContent: 'center' }}&gt;&#10;      &lt;Text style={{ fontSize: 15, color: '#7FA2D6', letterSpacing: 2, marginBottom: 18 }}&gt;PART 1 · LECTURE&lt;/Text&gt;&#10;      &lt;Text style={{ fontSize: 46, fontWeight: 'bold', color: '#FFFFFF', lineHeight: 1.18 }}&gt;Inheritance vs.&lt;br /&gt;Composition&lt;/Text&gt;&#10;      &lt;Box style={{ width: 64, height: 4, background: '#FFC107', marginTop: 26, marginBottom: 26 }} /&gt;&#10;      &lt;Box style={{ flexDirection: 'column', gap: 12 }}&gt;&#10;        {[&#10;          'The two ways to reuse someone else\'s code',&#10;          'The circle–ellipse trap — a classic mistake',&#10;          'Why the textbook says: favour composition',&#10;        ].map((t) =&gt; (&#10;          &lt;Box key={t} style={{ flexDirection: 'row', alignItems: 'center', gap: 12 }}&gt;&#10;            &lt;Box style={{ width: 8, height: 8, borderRadius: 4, background: '#3D7BD9' }} /&gt;&#10;            &lt;Text style={{ fontSize: 20, color: '#C5D4EA' }}&gt;{t}&lt;/Text&gt;&#10;          &lt;/Box&gt;&#10;        ))}&#10;      &lt;/Box&gt;&#10;    &lt;/Box&gt;&#10;  &lt;/Box&gt;&#10;&lt;/Slide&gt;"/>
+        <p:cNvPr id="190" name=""/>
         <p:cNvGrpSpPr/>
         <p:nvPr/>
       </p:nvGrpSpPr>
@@ -6688,7 +6901,10 @@
         </p:spPr>
         <p:txBody>
           <a:bodyPr/>
-          <a:p/>
+          <a:p>
+            <a:pPr/>
+            <a:endParaRPr/>
+          </a:p>
         </p:txBody>
       </p:sp>
       <p:sp>
@@ -6728,7 +6944,10 @@
         </p:spPr>
         <p:txBody>
           <a:bodyPr/>
-          <a:p/>
+          <a:p>
+            <a:pPr/>
+            <a:endParaRPr/>
+          </a:p>
         </p:txBody>
       </p:sp>
       <p:sp>
@@ -6875,7 +7094,10 @@
         </p:spPr>
         <p:txBody>
           <a:bodyPr/>
-          <a:p/>
+          <a:p>
+            <a:pPr/>
+            <a:endParaRPr/>
+          </a:p>
         </p:txBody>
       </p:sp>
       <p:sp>
@@ -6901,7 +7123,10 @@
         </p:spPr>
         <p:txBody>
           <a:bodyPr/>
-          <a:p/>
+          <a:p>
+            <a:pPr/>
+            <a:endParaRPr/>
+          </a:p>
         </p:txBody>
       </p:sp>
       <p:sp>
@@ -6962,7 +7187,10 @@
         </p:spPr>
         <p:txBody>
           <a:bodyPr/>
-          <a:p/>
+          <a:p>
+            <a:pPr/>
+            <a:endParaRPr/>
+          </a:p>
         </p:txBody>
       </p:sp>
       <p:sp>
@@ -7023,7 +7251,10 @@
         </p:spPr>
         <p:txBody>
           <a:bodyPr/>
-          <a:p/>
+          <a:p>
+            <a:pPr/>
+            <a:endParaRPr/>
+          </a:p>
         </p:txBody>
       </p:sp>
       <p:sp>
@@ -7082,7 +7313,10 @@
         </p:spPr>
         <p:txBody>
           <a:bodyPr/>
-          <a:p/>
+          <a:p>
+            <a:pPr/>
+            <a:endParaRPr/>
+          </a:p>
         </p:txBody>
       </p:sp>
     </p:spTree>
@@ -7095,7 +7329,7 @@
   <p:cSld>
     <p:spTree>
       <p:nvGrpSpPr>
-        <p:cNvPr id="204" name="" descr="&lt;Slide style={{ background: '#FFFFFF', padding: 0 }}&gt;&#10;  &lt;Box style={{ height: 72, background: '#1E4FA8', padding: '0 40px', flexDirection: 'row', alignItems: 'center', justifyContent: 'space-between' }}&gt;&#10;    &lt;Text style={{ fontSize: 15, color: '#B9CDF0', letterSpacing: 1 }}&gt;ISAD · INFORMATION SYSTEMS ANALYSIS &amp;amp; DESIGN&lt;/Text&gt;&#10;    &lt;Text style={{ fontSize: 15, color: '#B9CDF0' }}&gt;W02 · REUSE&lt;/Text&gt;&#10;  &lt;/Box&gt;&#10;  &lt;Box style={{ padding: '20px 40px 0 40px' }}&gt;&#10;    &lt;Text style={{ fontSize: 32, fontWeight: 'bold', color: '#0E3F8C' }}&gt;Two Ways to Reuse&lt;/Text&gt;&#10;  &lt;/Box&gt;&#10;  &lt;Box style={{ flex: 1, padding: '18px 40px 0 40px', flexDirection: 'row', gap: 26 }}&gt;&#10;    &lt;Box style={{ flex: 3, padding: '22px 24px', background: '#E8EFF8', borderRadius: 12, borderLeft: '5px solid #3D7BD9', flexDirection: 'column', gap: 12 }}&gt;&#10;      &lt;Box style={{ flexDirection: 'row', alignItems: 'center', gap: 11 }}&gt;&#10;        &lt;FAIcon name='sitemap' style={{ fill: '#1E4FA8', width: 24, height: 24 }} /&gt;&#10;        &lt;Text style={{ fontSize: 22, fontWeight: 'bold', color: '#0E3F8C' }}&gt;Inheritance&lt;/Text&gt;&#10;      &lt;/Box&gt;&#10;      &lt;Text style={{ fontSize: 16, color: '#4A5568', lineHeight: 1.55 }}&gt;A subclass extends a superclass and inherits its methods. The subclass &lt;Text style={{ fontWeight: 'bold', color: '#1A2230' }}&gt;is a&lt;/Text&gt; kind of the parent.&lt;/Text&gt;&#10;      &lt;Box style={{ padding: '12px 15px', background: '#FFFFFF', borderRadius: 8 }}&gt;&#10;        &lt;Text style={{ fontSize: 15, color: '#1A2230' }}&gt;Wallet extends PaymentMethod&lt;/Text&gt;&#10;      &lt;/Box&gt;&#10;      &lt;Box style={{ flexDirection: 'column', gap: 6 }}&gt;&#10;        &lt;Text style={{ fontSize: 15, color: '#4A5568', lineHeight: 1.45 }}&gt;+ Reuse is automatic, no wiring needed&lt;/Text&gt;&#10;        &lt;Text style={{ fontSize: 15, color: '#4A5568', lineHeight: 1.45 }}&gt;+ Substitutability comes for free&lt;/Text&gt;&#10;        &lt;Text style={{ fontSize: 15, color: '#D9534F', lineHeight: 1.45 }}&gt;− White-box: the parent's internals leak in&lt;/Text&gt;&#10;        &lt;Text style={{ fontSize: 15, color: '#D9534F', lineHeight: 1.45 }}&gt;− Fixed at compile time; hard to change&lt;/Text&gt;&#10;      &lt;/Box&gt;&#10;    &lt;/Box&gt;&#10;    &lt;Box style={{ flex: 3, padding: '22px 24px', background: '#F0F5FC', borderRadius: 12, borderLeft: '5px solid #0E3F8C', flexDirection: 'column', gap: 12 }}&gt;&#10;      &lt;Box style={{ flexDirection: 'row', alignItems: 'center', gap: 11 }}&gt;&#10;        &lt;FAIcon name='cubes' style={{ fill: '#0E3F8C', width: 24, height: 24 }} /&gt;&#10;        &lt;Text style={{ fontSize: 22, fontWeight: 'bold', color: '#0E3F8C' }}&gt;Composition&lt;/Text&gt;&#10;      &lt;/Box&gt;&#10;      &lt;Text style={{ fontSize: 16, color: '#4A5568', lineHeight: 1.55 }}&gt;An object &lt;Text style={{ fontWeight: 'bold', color: '#1A2230' }}&gt;holds a reference&lt;/Text&gt; to another and forwards work to it. It &lt;Text style={{ fontWeight: 'bold', color: '#1A2230' }}&gt;has a&lt;/Text&gt; collaborator.&lt;/Text&gt;&#10;      &lt;Box style={{ padding: '12px 15px', background: '#FFFFFF', borderRadius: 8 }}&gt;&#10;        &lt;Text style={{ fontSize: 15, color: '#1A2230' }}&gt;&amp;#8722; payment : PaymentMethod   # a slot inside Order&lt;/Text&gt;&#10;      &lt;/Box&gt;&#10;      &lt;Box style={{ flexDirection: 'column', gap: 6 }}&gt;&#10;        &lt;Text style={{ fontSize: 15, color: '#4A5568', lineHeight: 1.45 }}&gt;+ Black-box: only the interface is visible&lt;/Text&gt;&#10;        &lt;Text style={{ fontSize: 15, color: '#4A5568', lineHeight: 1.45 }}&gt;+ Can be swapped at runtime&lt;/Text&gt;&#10;        &lt;Text style={{ fontSize: 15, color: '#D9534F', lineHeight: 1.45 }}&gt;− Needs an interface to be worthwhile&lt;/Text&gt;&#10;        &lt;Text style={{ fontSize: 15, color: '#D9534F', lineHeight: 1.45 }}&gt;− Slightly more wiring code up front&lt;/Text&gt;&#10;      &lt;/Box&gt;&#10;    &lt;/Box&gt;&#10;  &lt;/Box&gt;&#10;  &lt;Box style={{ height: 40, padding: '0 40px', flexDirection: 'row', alignItems: 'center', justifyContent: 'space-between' }}&gt;&#10;    &lt;Text style={{ fontSize: 13, color: '#8B97A8' }}&gt;Both are legitimate. The skill is knowing which one the situation calls for.&lt;/Text&gt;&#10;    &lt;Text style={{ fontSize: 14, color: '#1E4FA8', fontWeight: 'bold' }}&gt;18 / 38&lt;/Text&gt;&#10;  &lt;/Box&gt;&#10;&lt;/Slide&gt;"/>
+        <p:cNvPr id="204" name=""/>
         <p:cNvGrpSpPr/>
         <p:nvPr/>
       </p:nvGrpSpPr>
@@ -7128,7 +7362,10 @@
         </p:spPr>
         <p:txBody>
           <a:bodyPr/>
-          <a:p/>
+          <a:p>
+            <a:pPr/>
+            <a:endParaRPr/>
+          </a:p>
         </p:txBody>
       </p:sp>
       <p:sp>
@@ -7152,7 +7389,10 @@
         </p:spPr>
         <p:txBody>
           <a:bodyPr/>
-          <a:p/>
+          <a:p>
+            <a:pPr/>
+            <a:endParaRPr/>
+          </a:p>
         </p:txBody>
       </p:sp>
       <p:sp>
@@ -7283,7 +7523,10 @@
         </p:spPr>
         <p:txBody>
           <a:bodyPr/>
-          <a:p/>
+          <a:p>
+            <a:pPr/>
+            <a:endParaRPr/>
+          </a:p>
         </p:txBody>
       </p:sp>
       <p:sp>
@@ -7340,7 +7583,10 @@
         </p:spPr>
         <p:txBody>
           <a:bodyPr/>
-          <a:p/>
+          <a:p>
+            <a:pPr/>
+            <a:endParaRPr/>
+          </a:p>
         </p:txBody>
       </p:sp>
       <p:pic>
@@ -7489,7 +7735,10 @@
         </p:spPr>
         <p:txBody>
           <a:bodyPr/>
-          <a:p/>
+          <a:p>
+            <a:pPr/>
+            <a:endParaRPr/>
+          </a:p>
         </p:txBody>
       </p:sp>
       <p:sp>
@@ -7690,7 +7939,10 @@
         </p:spPr>
         <p:txBody>
           <a:bodyPr/>
-          <a:p/>
+          <a:p>
+            <a:pPr/>
+            <a:endParaRPr/>
+          </a:p>
         </p:txBody>
       </p:sp>
       <p:sp>
@@ -7747,7 +7999,10 @@
         </p:spPr>
         <p:txBody>
           <a:bodyPr/>
-          <a:p/>
+          <a:p>
+            <a:pPr/>
+            <a:endParaRPr/>
+          </a:p>
         </p:txBody>
       </p:sp>
       <p:pic>
@@ -7916,7 +8171,10 @@
         </p:spPr>
         <p:txBody>
           <a:bodyPr/>
-          <a:p/>
+          <a:p>
+            <a:pPr/>
+            <a:endParaRPr/>
+          </a:p>
         </p:txBody>
       </p:sp>
       <p:sp>
@@ -8174,7 +8432,7 @@
   <p:cSld>
     <p:spTree>
       <p:nvGrpSpPr>
-        <p:cNvPr id="234" name="" descr="&lt;Slide style={{ background: '#FFFFFF', padding: 0 }}&gt;&#10;  &lt;Box style={{ padding: '26px 40px 8px 40px', flexDirection: 'row', alignItems: 'center', justifyContent: 'space-between' }}&gt;&#10;    &lt;Text style={{ fontSize: 34, fontWeight: 'bold', color: '#0E3F8C' }}&gt;Is-a or Has-a? Ask Two Questions&lt;/Text&gt;&#10;    &lt;Text style={{ fontSize: 14, color: '#1E4FA8', fontWeight: 'bold' }}&gt;19 / 38&lt;/Text&gt;&#10;  &lt;/Box&gt;&#10;  &lt;Box style={{ flex: 1, padding: '6px 40px 0 40px', justifyContent: 'center', alignItems: 'center' }}&gt;&#10;    &lt;svg width={1180} height={420} viewBox='0 0 1180 420'&gt;&#10;      &lt;rect x='430' y='16' width='320' height='54' rx='10' fill='#0E3F8C' /&gt;&#10;      &lt;text x='590' y='50' textAnchor='middle' fill='#FFFFFF' fontSize='20' fontWeight='bold'&gt;Is X a kind of Y?&lt;/text&gt;&#10;      &lt;line x1='520' y1='70' x2='340' y2='104' stroke='#3D7BD9' strokeWidth='2' /&gt;&#10;      &lt;text x='404' y='94' fill='#3D7BD9' fontSize='16' fontWeight='bold'&gt;YES&lt;/text&gt;&#10;      &lt;line x1='660' y1='70' x2='840' y2='104' stroke='#1E4FA8' strokeWidth='2' /&gt;&#10;      &lt;text x='780' y='94' fill='#1E4FA8' fontSize='16' fontWeight='bold'&gt;NO&lt;/text&gt;&#10;      &lt;rect x='150' y='104' width='380' height='104' rx='12' fill='#E8EFF8' stroke='#3D7BD9' strokeWidth='2' /&gt;&#10;      &lt;text x='340' y='140' textAnchor='middle' fill='#0E3F8C' fontSize='22' fontWeight='bold'&gt;Inheritance — is-a&lt;/text&gt;&#10;      &lt;text x='340' y='168' textAnchor='middle' fill='#4A5568' fontSize='15'&gt;X inherits the interface and behaviour of Y&lt;/text&gt;&#10;      &lt;text x='340' y='192' textAnchor='middle' fill='#8B97A8' fontSize='14'&gt;CampusCard is a PaymentMethod&lt;/text&gt;&#10;      &lt;rect x='650' y='104' width='380' height='52' rx='10' fill='#F7F9FC' stroke='#D6DCE5' strokeWidth='2' /&gt;&#10;      &lt;text x='840' y='138' textAnchor='middle' fill='#1A2230' fontSize='17'&gt;Does X have a Y?&lt;/text&gt;&#10;      &lt;line x1='840' y1='156' x2='840' y2='194' stroke='#1E4FA8' strokeWidth='2' /&gt;&#10;      &lt;text x='852' y='180' fill='#1E4FA8' fontSize='15' fontWeight='bold'&gt;YES&lt;/text&gt;&#10;      &lt;rect x='650' y='194' width='380' height='104' rx='12' fill='#F0F5FC' stroke='#1E4FA8' strokeWidth='2' /&gt;&#10;      &lt;text x='840' y='230' textAnchor='middle' fill='#0E3F8C' fontSize='22' fontWeight='bold'&gt;Composition — has-a&lt;/text&gt;&#10;      &lt;text x='840' y='258' textAnchor='middle' fill='#4A5568' fontSize='15'&gt;X holds a reference and delegates to it&lt;/text&gt;&#10;      &lt;text x='840' y='282' textAnchor='middle' fill='#8B97A8' fontSize='14'&gt;Order has a PaymentMethod&lt;/text&gt;&#10;      &lt;rect x='60' y='336' width='340' height='66' rx='10' fill='#F7F9FC' stroke='#D6DCE5' strokeWidth='1' /&gt;&#10;      &lt;text x='230' y='362' textAnchor='middle' fill='#0E3F8C' fontSize='16' fontWeight='bold'&gt;Wallet IS-A PaymentMethod&lt;/text&gt;&#10;      &lt;text x='230' y='386' textAnchor='middle' fill='#8B97A8' fontSize='14'&gt;it can be used anywhere one is expected&lt;/text&gt;&#10;      &lt;rect x='420' y='336' width='340' height='66' rx='10' fill='#F7F9FC' stroke='#D6DCE5' strokeWidth='1' /&gt;&#10;      &lt;text x='590' y='362' textAnchor='middle' fill='#0E3F8C' fontSize='16' fontWeight='bold'&gt;Order HAS-A PaymentMethod&lt;/text&gt;&#10;      &lt;text x='590' y='386' textAnchor='middle' fill='#8B97A8' fontSize='14'&gt;swappable: card today, cash tomorrow&lt;/text&gt;&#10;      &lt;rect x='780' y='336' width='340' height='66' rx='10' fill='#F7F9FC' stroke='#D6DCE5' strokeWidth='1' /&gt;&#10;      &lt;text x='950' y='362' textAnchor='middle' fill='#0E3F8C' fontSize='16' fontWeight='bold'&gt;Order HAS-A list of lines&lt;/text&gt;&#10;      &lt;text x='950' y='386' textAnchor='middle' fill='#8B97A8' fontSize='14'&gt;an order is not a kind of list&lt;/text&gt;&#10;    &lt;/svg&gt;&#10;  &lt;/Box&gt;&#10;  &lt;Box style={{ height: 56, background: '#0E3F8C', padding: '0 40px', flexDirection: 'row', alignItems: 'center', justifyContent: 'center' }}&gt;&#10;    &lt;Text style={{ fontSize: 18, color: '#FFFFFF', fontWeight: '600' }}&gt;Say the sentence out loud. If &quot;is a kind of&quot; sounds wrong, it is not inheritance.&lt;/Text&gt;&#10;  &lt;/Box&gt;&#10;&lt;/Slide&gt;"/>
+        <p:cNvPr id="234" name=""/>
         <p:cNvGrpSpPr/>
         <p:nvPr/>
       </p:nvGrpSpPr>
@@ -8207,7 +8465,10 @@
         </p:spPr>
         <p:txBody>
           <a:bodyPr/>
-          <a:p/>
+          <a:p>
+            <a:pPr/>
+            <a:endParaRPr/>
+          </a:p>
         </p:txBody>
       </p:sp>
       <p:sp>
@@ -8332,7 +8593,10 @@
         </p:spPr>
         <p:txBody>
           <a:bodyPr/>
-          <a:p/>
+          <a:p>
+            <a:pPr/>
+            <a:endParaRPr/>
+          </a:p>
         </p:txBody>
       </p:sp>
       <p:sp>
@@ -8380,7 +8644,7 @@
   <p:cSld>
     <p:spTree>
       <p:nvGrpSpPr>
-        <p:cNvPr id="241" name="" descr="&lt;Slide style={{ background: '#FFFFFF', padding: 0 }}&gt;&#10;  &lt;Box style={{ flexDirection: 'row', height: '100%' }}&gt;&#10;    &lt;Box style={{ width: 320, background: '#0E3F8C', padding: '60px 44px', flexDirection: 'column', justifyContent: 'space-between' }}&gt;&#10;      &lt;Box&gt;&#10;        &lt;Box style={{ width: 40, height: 4, background: '#FFC107', marginBottom: 24 }} /&gt;&#10;        &lt;Text style={{ fontSize: 46, fontWeight: 'bold', color: '#FFFFFF', fontFamily: 'Georgia, serif', lineHeight: 1.15 }}&gt;Contents&lt;/Text&gt;&#10;        &lt;Text style={{ fontSize: 16, color: '#7FA2D6', marginTop: 18, letterSpacing: 1 }}&gt;WEEK 02 · ROADMAP&lt;/Text&gt;&#10;      &lt;/Box&gt;&#10;      &lt;Text style={{ fontSize: 15, color: '#5B84C4', lineHeight: 1.5 }}&gt;Object-Oriented&lt;br /&gt;Foundations&lt;/Text&gt;&#10;    &lt;/Box&gt;&#10;    &lt;Box style={{ flex: 1, padding: '56px 56px', flexDirection: 'column', gap: 18 }}&gt;&#10;      {[&#10;        { n: '01', t: 'Recap &amp;amp; CampusBites Kickoff', p: '03' },&#10;        { n: '02', t: 'Objects Everywhere', p: '07' },&#10;        { n: '03', t: 'Encapsulation', p: '12' },&#10;        { n: '04', t: 'Inheritance vs. Composition', p: '17' },&#10;        { n: '05', t: 'Polymorphism &amp;amp; Interfaces', p: '23' },&#10;        { n: '06', t: 'Lab — OO Analysis &amp;amp; M0 Kickoff', p: '29' },&#10;      ].map((item) =&gt; (&#10;        &lt;Box key={item.n} style={{ flexDirection: 'row', alignItems: 'center', gap: 20, padding: '16px 20px', background: '#F7F9FC', borderRadius: 10, border: '1px solid #E5E7EB' }}&gt;&#10;          &lt;Box style={{ width: 52, height: 52, borderRadius: 8, background: '#1E4FA8', justifyContent: 'center', alignItems: 'center' }}&gt;&#10;            &lt;Text style={{ fontSize: 22, fontWeight: 'bold', color: '#FFFFFF' }}&gt;{item.n}&lt;/Text&gt;&#10;          &lt;/Box&gt;&#10;          &lt;Text style={{ flex: 1, fontSize: 21, color: '#1A2230', fontWeight: '600' }}&gt;{item.t}&lt;/Text&gt;&#10;          &lt;Text style={{ fontSize: 20, color: '#8B97A8', fontWeight: 'bold' }}&gt;{item.p}&lt;/Text&gt;&#10;        &lt;/Box&gt;&#10;      ))}&#10;    &lt;/Box&gt;&#10;  &lt;/Box&gt;&#10;&lt;/Slide&gt;"/>
+        <p:cNvPr id="241" name="" descr="&lt;Slide style={{ background: '#FFFFFF', padding: 0 }}&gt;&#10;  &lt;Box style={{ flexDirection: 'row', height: '100%' }}&gt;&#10;    &lt;Box style={{ width: 320, background: '#0E3F8C', padding: '60px 44px', flexDirection: 'column', justifyContent: 'space-between' }}&gt;&#10;      &lt;Box&gt;&#10;        &lt;Box style={{ width: 40, height: 4, background: '#FFC107', marginBottom: 24 }} /&gt;&#10;        &lt;Text style={{ fontSize: 46, fontWeight: 'bold', color: '#FFFFFF', fontFamily: 'Georgia, serif', lineHeight: 1.15 }}&gt;Contents&lt;/Text&gt;&#10;        &lt;Text style={{ fontSize: 16, color: '#7FA2D6', marginTop: 18, letterSpacing: 1 }}&gt;WEEK 02 · ROADMAP&lt;/Text&gt;&#10;      &lt;/Box&gt;&#10;      &lt;Text style={{ fontSize: 15, color: '#5B84C4', lineHeight: 1.5 }}&gt;Object-Oriented&lt;br /&gt;Foundations&lt;/Text&gt;&#10;    &lt;/Box&gt;&#10;    &lt;Box style={{ flex: 1, padding: '56px 56px', flexDirection: 'column', gap: 18 }}&gt;&#10;      {[&#10;        { n: '01', t: 'Recap &amp; CampusBites Kickoff', p: '03' },&#10;        { n: '02', t: 'Objects Everywhere', p: '07' },&#10;        { n: '03', t: 'Encapsulation', p: '12' },&#10;        { n: '04', t: 'Inheritance vs. Composition', p: '17' },&#10;        { n: '05', t: 'Polymorphism &amp; Interfaces', p: '23' },&#10;        { n: '06', t: 'Lab — OO Analysis &amp; M0 Kickoff', p: '29' },&#10;      ].map((item) =&gt; (&#10;        &lt;Box key={item.n} style={{ flexDirection: 'row', alignItems: 'center', gap: 20, padding: '16px 20px', background: '#F7F9FC', borderRadius: 10, border: '1px solid #E5E7EB' }}&gt;&#10;          &lt;Box style={{ width: 52, height: 52, borderRadius: 8, background: '#1E4FA8', justifyContent: 'center', alignItems: 'center' }}&gt;&#10;            &lt;Text style={{ fontSize: 22, fontWeight: 'bold', color: '#FFFFFF' }}&gt;{item.n}&lt;/Text&gt;&#10;          &lt;/Box&gt;&#10;          &lt;Text style={{ flex: 1, fontSize: 21, color: '#1A2230', fontWeight: '600' }}&gt;{item.t}&lt;/Text&gt;&#10;          &lt;Text style={{ fontSize: 20, color: '#8B97A8', fontWeight: 'bold' }}&gt;{item.p}&lt;/Text&gt;&#10;        &lt;/Box&gt;&#10;      ))}&#10;    &lt;/Box&gt;&#10;  &lt;/Box&gt;&#10;&lt;/Slide&gt;&#10;"/>
         <p:cNvGrpSpPr/>
         <p:nvPr/>
       </p:nvGrpSpPr>
@@ -8708,7 +8972,7 @@
                 <a:latin typeface="Microsoft YaHei"/>
                 <a:ea typeface="Microsoft YaHei"/>
               </a:rPr>
-              <a:t>Recap &amp;amp; CampusBites Kickoff</a:t>
+              <a:t>Recap &amp; CampusBites Kickoff</a:t>
             </a:r>
             <a:endParaRPr/>
           </a:p>
@@ -9356,7 +9620,7 @@
                 <a:latin typeface="Microsoft YaHei"/>
                 <a:ea typeface="Microsoft YaHei"/>
               </a:rPr>
-              <a:t>Polymorphism &amp;amp; Interfaces</a:t>
+              <a:t>Polymorphism &amp; Interfaces</a:t>
             </a:r>
             <a:endParaRPr/>
           </a:p>
@@ -9518,7 +9782,7 @@
                 <a:latin typeface="Microsoft YaHei"/>
                 <a:ea typeface="Microsoft YaHei"/>
               </a:rPr>
-              <a:t>Lab — OO Analysis &amp;amp; M0 Kickoff</a:t>
+              <a:t>Lab — OO Analysis &amp; M0 Kickoff</a:t>
             </a:r>
             <a:endParaRPr/>
           </a:p>
@@ -9569,7 +9833,7 @@
   <p:cSld>
     <p:spTree>
       <p:nvGrpSpPr>
-        <p:cNvPr id="278" name="" descr="&lt;Slide style={{ background: '#FFFFFF', padding: 0 }}&gt;&#10;  &lt;Box style={{ height: 72, background: '#1E4FA8', padding: '0 40px', flexDirection: 'row', alignItems: 'center', justifyContent: 'space-between' }}&gt;&#10;    &lt;Text style={{ fontSize: 15, color: '#B9CDF0', letterSpacing: 1 }}&gt;ISAD · INFORMATION SYSTEMS ANALYSIS &amp;amp; DESIGN&lt;/Text&gt;&#10;    &lt;Text style={{ fontSize: 15, color: '#B9CDF0' }}&gt;W02 · REUSE&lt;/Text&gt;&#10;  &lt;/Box&gt;&#10;  &lt;Box style={{ padding: '20px 40px 0 40px' }}&gt;&#10;    &lt;Text style={{ fontSize: 32, fontWeight: 'bold', color: '#0E3F8C' }}&gt;The Circle–Ellipse Trap&lt;/Text&gt;&#10;  &lt;/Box&gt;&#10;  &lt;Box style={{ flex: 1, padding: '14px 40px 0 40px', flexDirection: 'row', gap: 26 }}&gt;&#10;    &lt;Box style={{ flex: 3, justifyContent: 'center' }}&gt;&#10;      &lt;CodeBlock theme='one-dark-pro' code={`Class Ellipse&#10;    + setMajorAxis(a)&#10;    + setMinorAxis(b)&#10;&#10;# In geometry, a circle IS an ellipse.&#10;Class Circle extends Ellipse&#10;    + setMajorAxis(a)&#10;        set both axes to a        # stay round&#10;    + setMinorAxis(b)&#10;        refuse - a circle cannot  # breaks the promise&#10;&#10;# ...so why does this break?&#10;e = a new Circle&#10;e.setMinorAxis(3.0)              # fails`} language='text' width={560} fontSize={12} /&gt;&#10;    &lt;/Box&gt;&#10;    &lt;Box style={{ flex: 2, flexDirection: 'column', gap: 11, justifyContent: 'center' }}&gt;&#10;      &lt;Box style={{ padding: '16px 18px', background: '#FDF3F3', borderRadius: 10, borderLeft: '4px solid #D9534F' }}&gt;&#10;        &lt;Text style={{ fontSize: 17, fontWeight: 'bold', color: '#D9534F', marginBottom: 5 }}&gt;What went wrong&lt;/Text&gt;&#10;        &lt;Text style={{ fontSize: 15, color: '#4A5568', lineHeight: 1.5 }}&gt;The subclass &lt;Text style={{ fontWeight: 'bold', color: '#1A2230' }}&gt;refuses&lt;/Text&gt; a method the parent promises. Code written against Ellipse now breaks on a Circle.&lt;/Text&gt;&#10;      &lt;/Box&gt;&#10;      {[&#10;        ['shapes', 'True in maths, false in code', 'A circle has fewer degrees of freedom than an ellipse.'],&#10;        ['unlink', 'Substitutability is the real test', 'Not &quot;is it a kind of&quot; but &quot;can it stand in anywhere?&quot;'],&#10;        ['clock', 'Liskov, Week 12', 'This has a name: the Liskov Substitution Principle.'],&#10;      ].map(([icon, t, d]) =&gt; (&#10;        &lt;Box key={t} style={{ flexDirection: 'row', gap: 12, alignItems: 'flex-start', padding: '13px 16px', background: '#F7F9FC', borderRadius: 10, border: '1px solid #E5E7EB' }}&gt;&#10;          &lt;Box style={{ width: 36, height: 36, borderRadius: 9, background: '#E8EFF8', justifyContent: 'center', alignItems: 'center' }}&gt;&#10;            &lt;FAIcon name={icon} style={{ fill: '#1E4FA8', width: 18, height: 18 }} /&gt;&#10;          &lt;/Box&gt;&#10;          &lt;Box style={{ flex: 1, flexDirection: 'column', gap: 2 }}&gt;&#10;            &lt;Text style={{ fontSize: 15, fontWeight: 'bold', color: '#1A2230' }}&gt;{t}&lt;/Text&gt;&#10;            &lt;Text style={{ fontSize: 13, color: '#4A5568', lineHeight: 1.45 }}&gt;{d}&lt;/Text&gt;&#10;          &lt;/Box&gt;&#10;        &lt;/Box&gt;&#10;      ))}&#10;    &lt;/Box&gt;&#10;  &lt;/Box&gt;&#10;  &lt;Box style={{ height: 40, padding: '0 40px', flexDirection: 'row', alignItems: 'center', justifyContent: 'space-between' }}&gt;&#10;    &lt;Text style={{ fontSize: 13, color: '#8B97A8' }}&gt;Full treatment in Week 12 (LSP). Today: notice that &quot;is-a&quot; is not enough.&lt;/Text&gt;&#10;    &lt;Text style={{ fontSize: 14, color: '#1E4FA8', fontWeight: 'bold' }}&gt;20 / 38&lt;/Text&gt;&#10;  &lt;/Box&gt;&#10;&lt;/Slide&gt;"/>
+        <p:cNvPr id="278" name=""/>
         <p:cNvGrpSpPr/>
         <p:nvPr/>
       </p:nvGrpSpPr>
@@ -9602,7 +9866,10 @@
         </p:spPr>
         <p:txBody>
           <a:bodyPr/>
-          <a:p/>
+          <a:p>
+            <a:pPr/>
+            <a:endParaRPr/>
+          </a:p>
         </p:txBody>
       </p:sp>
       <p:sp>
@@ -9626,7 +9893,10 @@
         </p:spPr>
         <p:txBody>
           <a:bodyPr/>
-          <a:p/>
+          <a:p>
+            <a:pPr/>
+            <a:endParaRPr/>
+          </a:p>
         </p:txBody>
       </p:sp>
       <p:sp>
@@ -9757,7 +10027,10 @@
         </p:spPr>
         <p:txBody>
           <a:bodyPr/>
-          <a:p/>
+          <a:p>
+            <a:pPr/>
+            <a:endParaRPr/>
+          </a:p>
         </p:txBody>
       </p:sp>
       <p:sp>
@@ -9814,7 +10087,10 @@
         </p:spPr>
         <p:txBody>
           <a:bodyPr/>
-          <a:p/>
+          <a:p>
+            <a:pPr/>
+            <a:endParaRPr/>
+          </a:p>
         </p:txBody>
       </p:sp>
       <p:sp>
@@ -9937,7 +10213,10 @@
         </p:spPr>
         <p:txBody>
           <a:bodyPr/>
-          <a:p/>
+          <a:p>
+            <a:pPr/>
+            <a:endParaRPr/>
+          </a:p>
         </p:txBody>
       </p:sp>
       <p:sp>
@@ -9963,7 +10242,10 @@
         </p:spPr>
         <p:txBody>
           <a:bodyPr/>
-          <a:p/>
+          <a:p>
+            <a:pPr/>
+            <a:endParaRPr/>
+          </a:p>
         </p:txBody>
       </p:sp>
       <p:pic>
@@ -10095,7 +10377,10 @@
         </p:spPr>
         <p:txBody>
           <a:bodyPr/>
-          <a:p/>
+          <a:p>
+            <a:pPr/>
+            <a:endParaRPr/>
+          </a:p>
         </p:txBody>
       </p:sp>
       <p:sp>
@@ -10121,7 +10406,10 @@
         </p:spPr>
         <p:txBody>
           <a:bodyPr/>
-          <a:p/>
+          <a:p>
+            <a:pPr/>
+            <a:endParaRPr/>
+          </a:p>
         </p:txBody>
       </p:sp>
       <p:pic>
@@ -10253,7 +10541,10 @@
         </p:spPr>
         <p:txBody>
           <a:bodyPr/>
-          <a:p/>
+          <a:p>
+            <a:pPr/>
+            <a:endParaRPr/>
+          </a:p>
         </p:txBody>
       </p:sp>
       <p:sp>
@@ -10279,7 +10570,10 @@
         </p:spPr>
         <p:txBody>
           <a:bodyPr/>
-          <a:p/>
+          <a:p>
+            <a:pPr/>
+            <a:endParaRPr/>
+          </a:p>
         </p:txBody>
       </p:sp>
       <p:pic>
@@ -10476,7 +10770,10 @@
         </p:spPr>
         <p:txBody>
           <a:bodyPr/>
-          <a:p/>
+          <a:p>
+            <a:pPr/>
+            <a:endParaRPr/>
+          </a:p>
         </p:txBody>
       </p:sp>
       <p:sp>
@@ -10533,7 +10830,7 @@
   <p:cSld>
     <p:spTree>
       <p:nvGrpSpPr>
-        <p:cNvPr id="307" name="" descr="&lt;Slide style={{ background: '#FFFFFF', padding: 0 }}&gt;&#10;  &lt;Box style={{ height: 72, background: '#1E4FA8', padding: '0 40px', flexDirection: 'row', alignItems: 'center', justifyContent: 'space-between' }}&gt;&#10;    &lt;Text style={{ fontSize: 15, color: '#B9CDF0', letterSpacing: 1 }}&gt;ISAD · INFORMATION SYSTEMS ANALYSIS &amp;amp; DESIGN&lt;/Text&gt;&#10;    &lt;Text style={{ fontSize: 15, color: '#B9CDF0' }}&gt;W02 · REUSE&lt;/Text&gt;&#10;  &lt;/Box&gt;&#10;  &lt;Box style={{ flex: 1, padding: '26px 60px 0 60px', flexDirection: 'column', alignItems: 'center', justifyContent: 'center', gap: 20 }}&gt;&#10;    &lt;Box style={{ padding: '6px 18px', background: '#E8EFF8', borderRadius: 16 }}&gt;&#10;      &lt;Text style={{ fontSize: 15, color: '#1E4FA8', fontWeight: 'bold', letterSpacing: 2 }}&gt;PRINCIPLE · FIRST OF THE SEMESTER&lt;/Text&gt;&#10;    &lt;/Box&gt;&#10;    &lt;Text style={{ fontSize: 40, fontWeight: 'bold', color: '#0E3F8C', textAlign: 'center', lineHeight: 1.25, fontFamily: 'Georgia, serif' }}&gt;&#10;      Favour composition&lt;br /&gt;over class inheritance.&#10;    &lt;/Text&gt;&#10;    &lt;Box style={{ width: 72, height: 4, background: '#FFC107' }} /&gt;&#10;    &lt;Box style={{ flexDirection: 'row', gap: 16, marginTop: 4 }}&gt;&#10;      {[&#10;        ['unlock', 'Loose coupling', 'The parent\'s changes cannot silently break the subclass.'],&#10;        ['random', 'Runtime swap', 'Behaviour can be replaced without recompiling.'],&#10;        ['eye-slash', 'Black box', 'You depend on what it does, not how it is built.'],&#10;      ].map(([icon, t, d]) =&gt; (&#10;        &lt;Box key={t} style={{ flex: 1, padding: '20px 20px', background: '#F7F9FC', borderRadius: 12, border: '1px solid #E5E7EB', flexDirection: 'column', gap: 9, alignItems: 'center' }}&gt;&#10;          &lt;Box style={{ width: 50, height: 50, borderRadius: 25, background: '#E8EFF8', justifyContent: 'center', alignItems: 'center' }}&gt;&#10;            &lt;FAIcon name={icon} style={{ fill: '#1E4FA8', width: 24, height: 24 }} /&gt;&#10;          &lt;/Box&gt;&#10;          &lt;Text style={{ fontSize: 18, fontWeight: 'bold', color: '#0E3F8C', textAlign: 'center' }}&gt;{t}&lt;/Text&gt;&#10;          &lt;Text style={{ fontSize: 14, color: '#4A5568', lineHeight: 1.5, textAlign: 'center' }}&gt;{d}&lt;/Text&gt;&#10;        &lt;/Box&gt;&#10;      ))}&#10;    &lt;/Box&gt;&#10;  &lt;/Box&gt;&#10;  &lt;Box style={{ height: 50, padding: '0 60px', flexDirection: 'row', alignItems: 'center', justifyContent: 'center', gap: 12 }}&gt;&#10;    &lt;FAIcon name='exclamation-triangle' style={{ fill: '#FFC107', width: 20, height: 20 }} /&gt;&#10;    &lt;Text style={{ fontSize: 16, color: '#4A5568' }}&gt;Favour, not forbid. Inheritance is right when substitution genuinely holds.&lt;/Text&gt;&#10;    &lt;Text style={{ fontSize: 14, color: '#1E4FA8', fontWeight: 'bold', marginLeft: 'auto' }}&gt;21 / 38&lt;/Text&gt;&#10;  &lt;/Box&gt;&#10;&lt;/Slide&gt;"/>
+        <p:cNvPr id="307" name=""/>
         <p:cNvGrpSpPr/>
         <p:nvPr/>
       </p:nvGrpSpPr>
@@ -10566,7 +10863,10 @@
         </p:spPr>
         <p:txBody>
           <a:bodyPr/>
-          <a:p/>
+          <a:p>
+            <a:pPr/>
+            <a:endParaRPr/>
+          </a:p>
         </p:txBody>
       </p:sp>
       <p:sp>
@@ -10590,7 +10890,10 @@
         </p:spPr>
         <p:txBody>
           <a:bodyPr/>
-          <a:p/>
+          <a:p>
+            <a:pPr/>
+            <a:endParaRPr/>
+          </a:p>
         </p:txBody>
       </p:sp>
       <p:sp>
@@ -10686,7 +10989,10 @@
         </p:spPr>
         <p:txBody>
           <a:bodyPr/>
-          <a:p/>
+          <a:p>
+            <a:pPr/>
+            <a:endParaRPr/>
+          </a:p>
         </p:txBody>
       </p:sp>
       <p:sp>
@@ -10798,7 +11104,10 @@
         </p:spPr>
         <p:txBody>
           <a:bodyPr/>
-          <a:p/>
+          <a:p>
+            <a:pPr/>
+            <a:endParaRPr/>
+          </a:p>
         </p:txBody>
       </p:sp>
       <p:sp>
@@ -10829,7 +11138,10 @@
         </p:spPr>
         <p:txBody>
           <a:bodyPr/>
-          <a:p/>
+          <a:p>
+            <a:pPr/>
+            <a:endParaRPr/>
+          </a:p>
         </p:txBody>
       </p:sp>
       <p:sp>
@@ -10855,7 +11167,10 @@
         </p:spPr>
         <p:txBody>
           <a:bodyPr/>
-          <a:p/>
+          <a:p>
+            <a:pPr/>
+            <a:endParaRPr/>
+          </a:p>
         </p:txBody>
       </p:sp>
       <p:pic>
@@ -10989,7 +11304,10 @@
         </p:spPr>
         <p:txBody>
           <a:bodyPr/>
-          <a:p/>
+          <a:p>
+            <a:pPr/>
+            <a:endParaRPr/>
+          </a:p>
         </p:txBody>
       </p:sp>
       <p:sp>
@@ -11015,7 +11333,10 @@
         </p:spPr>
         <p:txBody>
           <a:bodyPr/>
-          <a:p/>
+          <a:p>
+            <a:pPr/>
+            <a:endParaRPr/>
+          </a:p>
         </p:txBody>
       </p:sp>
       <p:pic>
@@ -11147,7 +11468,10 @@
         </p:spPr>
         <p:txBody>
           <a:bodyPr/>
-          <a:p/>
+          <a:p>
+            <a:pPr/>
+            <a:endParaRPr/>
+          </a:p>
         </p:txBody>
       </p:sp>
       <p:sp>
@@ -11173,7 +11497,10 @@
         </p:spPr>
         <p:txBody>
           <a:bodyPr/>
-          <a:p/>
+          <a:p>
+            <a:pPr/>
+            <a:endParaRPr/>
+          </a:p>
         </p:txBody>
       </p:sp>
       <p:pic>
@@ -11388,7 +11715,7 @@
   <p:cSld>
     <p:spTree>
       <p:nvGrpSpPr>
-        <p:cNvPr id="334" name="" descr="&lt;Slide style={{ background: '#FFFFFF', padding: 0 }}&gt;&#10;  &lt;Box style={{ height: 72, background: '#1E4FA8', padding: '0 40px', flexDirection: 'row', alignItems: 'center', justifyContent: 'space-between' }}&gt;&#10;    &lt;Text style={{ fontSize: 15, color: '#B9CDF0', letterSpacing: 1 }}&gt;ISAD · INFORMATION SYSTEMS ANALYSIS &amp;amp; DESIGN&lt;/Text&gt;&#10;    &lt;Text style={{ fontSize: 15, color: '#B9CDF0' }}&gt;W02 · REUSE&lt;/Text&gt;&#10;  &lt;/Box&gt;&#10;  &lt;Box style={{ padding: '20px 40px 0 40px' }}&gt;&#10;    &lt;Text style={{ fontSize: 32, fontWeight: 'bold', color: '#0E3F8C' }}&gt;Composition on Paper&lt;/Text&gt;&#10;  &lt;/Box&gt;&#10;  &lt;Box style={{ flex: 1, padding: '14px 40px 0 40px', flexDirection: 'row', gap: 26 }}&gt;&#10;    &lt;Box style={{ flex: 1, flexDirection: 'column', gap: 10 }}&gt;&#10;      &lt;Box style={{ flexDirection: 'row', alignItems: 'center', gap: 9 }}&gt;&#10;        &lt;FAIcon name='times-circle' style={{ fill: '#D9534F', width: 19, height: 19 }} /&gt;&#10;        &lt;Text style={{ fontSize: 16, fontWeight: 'bold', color: '#D9534F' }}&gt;Inheriting for convenience&lt;/Text&gt;&#10;      &lt;/Box&gt;&#10;      &lt;CodeBlock theme='one-dark-pro' code={`# &quot;an order is just a list of lines&quot;&#10;Class Order extends List&#10;    + place()&#10;&#10;# now Order inherits 20+ list operations&#10;# that make no sense for an order&#10;order.sort(...)&#10;order.clear()      # wipes a paid order&#10;order.addAll(...)  # bypasses the guard`} language='text' width={520} fontSize={12} /&gt;&#10;    &lt;/Box&gt;&#10;    &lt;Box style={{ flex: 1, flexDirection: 'column', gap: 10 }}&gt;&#10;      &lt;Box style={{ flexDirection: 'row', alignItems: 'center', gap: 9 }}&gt;&#10;        &lt;FAIcon name='check-circle' style={{ fill: '#1E4FA8', width: 19, height: 19 }} /&gt;&#10;        &lt;Text style={{ fontSize: 16, fontWeight: 'bold', color: '#0E3F8C' }}&gt;Composing with collaborators&lt;/Text&gt;&#10;      &lt;/Box&gt;&#10;      &lt;CodeBlock theme='one-dark-pro' code={`Class Order&#10;    - lines : OrderLine[0..*]&#10;    - payment : PaymentMethod&#10;    - route : DeliveryRoute&#10;&#10;    + total() : Money&#10;    + pay() : Receipt&#10;        return payment.pay(total())&#10;&#10;# Order offers only what an order does&#10;order.pay()        # yes&#10;order.clear()      # no such operation`} language='text' width={520} fontSize={12} /&gt;&#10;    &lt;/Box&gt;&#10;  &lt;/Box&gt;&#10;  &lt;Box style={{ height: 44, background: '#0E3F8C', padding: '0 40px', flexDirection: 'row', alignItems: 'center', justifyContent: 'center' }}&gt;&#10;    &lt;Text style={{ fontSize: 17, color: '#FFFFFF', fontWeight: '600' }}&gt;Inheritance reuses everything — including the parts that make no sense. Composition lets you choose.&lt;/Text&gt;&#10;  &lt;/Box&gt;&#10;&lt;/Slide&gt;"/>
+        <p:cNvPr id="334" name=""/>
         <p:cNvGrpSpPr/>
         <p:nvPr/>
       </p:nvGrpSpPr>
@@ -11421,7 +11748,10 @@
         </p:spPr>
         <p:txBody>
           <a:bodyPr/>
-          <a:p/>
+          <a:p>
+            <a:pPr/>
+            <a:endParaRPr/>
+          </a:p>
         </p:txBody>
       </p:sp>
       <p:sp>
@@ -11445,7 +11775,10 @@
         </p:spPr>
         <p:txBody>
           <a:bodyPr/>
-          <a:p/>
+          <a:p>
+            <a:pPr/>
+            <a:endParaRPr/>
+          </a:p>
         </p:txBody>
       </p:sp>
       <p:sp>
@@ -11706,7 +12039,10 @@
         </p:spPr>
         <p:txBody>
           <a:bodyPr/>
-          <a:p/>
+          <a:p>
+            <a:pPr/>
+            <a:endParaRPr/>
+          </a:p>
         </p:txBody>
       </p:sp>
       <p:sp>
@@ -11767,7 +12103,10 @@
         </p:spPr>
         <p:txBody>
           <a:bodyPr/>
-          <a:p/>
+          <a:p>
+            <a:pPr/>
+            <a:endParaRPr/>
+          </a:p>
         </p:txBody>
       </p:sp>
       <p:sp>
@@ -11833,7 +12172,10 @@
         </p:spPr>
         <p:txBody>
           <a:bodyPr/>
-          <a:p/>
+          <a:p>
+            <a:pPr/>
+            <a:endParaRPr/>
+          </a:p>
         </p:txBody>
       </p:sp>
       <p:sp>
@@ -11888,7 +12230,7 @@
   <p:cSld>
     <p:spTree>
       <p:nvGrpSpPr>
-        <p:cNvPr id="350" name="" descr="&lt;Slide style={{ background: '#0E3F8C', padding: 0 }}&gt;&#10;  &lt;Box style={{ flexDirection: 'row', height: '100%', position: 'relative' }}&gt;&#10;    &lt;Box style={{ position: 'absolute', top: 0, left: 0, right: 0, height: 8, background: '#1E4FA8' }} /&gt;&#10;    &lt;Box style={{ width: 300, justifyContent: 'center', alignItems: 'center', borderRight: '1px solid #2B5793' }}&gt;&#10;      &lt;Text style={{ fontSize: 220, fontWeight: 'bold', color: '#3D7BD9', fontFamily: 'Georgia, serif', lineHeight: 1 }}&gt;05&lt;/Text&gt;&#10;    &lt;/Box&gt;&#10;    &lt;Box style={{ flex: 1, padding: '70px 64px', flexDirection: 'column', justifyContent: 'center' }}&gt;&#10;      &lt;Text style={{ fontSize: 15, color: '#7FA2D6', letterSpacing: 2, marginBottom: 18 }}&gt;PART 1 · LECTURE&lt;/Text&gt;&#10;      &lt;Text style={{ fontSize: 46, fontWeight: 'bold', color: '#FFFFFF', lineHeight: 1.18 }}&gt;Polymorphism &amp;amp;&lt;br /&gt;Interfaces&lt;/Text&gt;&#10;      &lt;Box style={{ width: 64, height: 4, background: '#FFC107', marginTop: 26, marginBottom: 26 }} /&gt;&#10;      &lt;Box style={{ flexDirection: 'column', gap: 12 }}&gt;&#10;        {[&#10;          'One message, many behaviours',&#10;          'PaymentMethod: the CampusBites worked example',&#10;          'Program to an interface, not an implementation',&#10;        ].map((t) =&gt; (&#10;          &lt;Box key={t} style={{ flexDirection: 'row', alignItems: 'center', gap: 12 }}&gt;&#10;            &lt;Box style={{ width: 8, height: 8, borderRadius: 4, background: '#3D7BD9' }} /&gt;&#10;            &lt;Text style={{ fontSize: 20, color: '#C5D4EA' }}&gt;{t}&lt;/Text&gt;&#10;          &lt;/Box&gt;&#10;        ))}&#10;      &lt;/Box&gt;&#10;    &lt;/Box&gt;&#10;  &lt;/Box&gt;&#10;&lt;/Slide&gt;"/>
+        <p:cNvPr id="350" name=""/>
         <p:cNvGrpSpPr/>
         <p:nvPr/>
       </p:nvGrpSpPr>
@@ -11921,7 +12263,10 @@
         </p:spPr>
         <p:txBody>
           <a:bodyPr/>
-          <a:p/>
+          <a:p>
+            <a:pPr/>
+            <a:endParaRPr/>
+          </a:p>
         </p:txBody>
       </p:sp>
       <p:sp>
@@ -11961,7 +12306,10 @@
         </p:spPr>
         <p:txBody>
           <a:bodyPr/>
-          <a:p/>
+          <a:p>
+            <a:pPr/>
+            <a:endParaRPr/>
+          </a:p>
         </p:txBody>
       </p:sp>
       <p:sp>
@@ -12108,7 +12456,10 @@
         </p:spPr>
         <p:txBody>
           <a:bodyPr/>
-          <a:p/>
+          <a:p>
+            <a:pPr/>
+            <a:endParaRPr/>
+          </a:p>
         </p:txBody>
       </p:sp>
       <p:sp>
@@ -12134,7 +12485,10 @@
         </p:spPr>
         <p:txBody>
           <a:bodyPr/>
-          <a:p/>
+          <a:p>
+            <a:pPr/>
+            <a:endParaRPr/>
+          </a:p>
         </p:txBody>
       </p:sp>
       <p:sp>
@@ -12195,7 +12549,10 @@
         </p:spPr>
         <p:txBody>
           <a:bodyPr/>
-          <a:p/>
+          <a:p>
+            <a:pPr/>
+            <a:endParaRPr/>
+          </a:p>
         </p:txBody>
       </p:sp>
       <p:sp>
@@ -12256,7 +12613,10 @@
         </p:spPr>
         <p:txBody>
           <a:bodyPr/>
-          <a:p/>
+          <a:p>
+            <a:pPr/>
+            <a:endParaRPr/>
+          </a:p>
         </p:txBody>
       </p:sp>
       <p:sp>
@@ -12315,7 +12675,10 @@
         </p:spPr>
         <p:txBody>
           <a:bodyPr/>
-          <a:p/>
+          <a:p>
+            <a:pPr/>
+            <a:endParaRPr/>
+          </a:p>
         </p:txBody>
       </p:sp>
     </p:spTree>
@@ -12328,7 +12691,7 @@
   <p:cSld>
     <p:spTree>
       <p:nvGrpSpPr>
-        <p:cNvPr id="364" name="" descr="&lt;Slide style={{ background: '#FFFFFF', padding: 0 }}&gt;&#10;  &lt;Box style={{ height: 72, background: '#1E4FA8', padding: '0 40px', flexDirection: 'row', alignItems: 'center', justifyContent: 'space-between' }}&gt;&#10;    &lt;Text style={{ fontSize: 15, color: '#B9CDF0', letterSpacing: 1 }}&gt;ISAD · INFORMATION SYSTEMS ANALYSIS &amp;amp; DESIGN&lt;/Text&gt;&#10;    &lt;Text style={{ fontSize: 15, color: '#B9CDF0' }}&gt;W02 · POLYMORPHISM&lt;/Text&gt;&#10;  &lt;/Box&gt;&#10;  &lt;Box style={{ padding: '20px 40px 0 40px' }}&gt;&#10;    &lt;Text style={{ fontSize: 32, fontWeight: 'bold', color: '#0E3F8C' }}&gt;Same Message, Different Behaviour&lt;/Text&gt;&#10;  &lt;/Box&gt;&#10;  &lt;Box style={{ flex: 1, padding: '12px 40px 0 40px', flexDirection: 'row', gap: 26 }}&gt;&#10;    &lt;Box style={{ flex: 5, justifyContent: 'center', alignItems: 'center' }}&gt;&#10;      &lt;svg width={600} height={350} viewBox='0 0 600 350'&gt;&#10;        &lt;rect x='215' y='16' width='170' height='52' rx='10' fill='#0E3F8C' /&gt;&#10;        &lt;text x='300' y='48' textAnchor='middle' fill='#FFFFFF' fontSize='19' fontWeight='bold'&gt;pay(amount)&lt;/text&gt;&#10;        &lt;text x='300' y='92' textAnchor='middle' fill='#8B97A8' fontSize='14'&gt;one message, sent once&lt;/text&gt;&#10;        &lt;line x1='300' y1='100' x2='300' y2='124' stroke='#3D7BD9' strokeWidth='2' /&gt;&#10;        &lt;line x1='96' y1='124' x2='504' y2='124' stroke='#3D7BD9' strokeWidth='2' /&gt;&#10;        &lt;line x1='96' y1='124' x2='96' y2='152' stroke='#3D7BD9' strokeWidth='2' /&gt;&#10;        &lt;line x1='300' y1='124' x2='300' y2='152' stroke='#3D7BD9' strokeWidth='2' /&gt;&#10;        &lt;line x1='504' y1='124' x2='504' y2='152' stroke='#3D7BD9' strokeWidth='2' /&gt;&#10;        &lt;rect x='20' y='152' width='152' height='104' rx='12' fill='#E8EFF8' stroke='#3D7BD9' strokeWidth='2' /&gt;&#10;        &lt;text x='96' y='188' textAnchor='middle' fill='#0E3F8C' fontSize='18' fontWeight='bold'&gt;CampusCard&lt;/text&gt;&#10;        &lt;text x='96' y='214' textAnchor='middle' fill='#4A5568' fontSize='14'&gt;deduct from&lt;/text&gt;&#10;        &lt;text x='96' y='236' textAnchor='middle' fill='#4A5568' fontSize='14'&gt;the meal card&lt;/text&gt;&#10;        &lt;rect x='224' y='152' width='152' height='104' rx='12' fill='#E8EFF8' stroke='#3D7BD9' strokeWidth='2' /&gt;&#10;        &lt;text x='300' y='188' textAnchor='middle' fill='#0E3F8C' fontSize='18' fontWeight='bold'&gt;Wallet&lt;/text&gt;&#10;        &lt;text x='300' y='214' textAnchor='middle' fill='#4A5568' fontSize='14'&gt;debit the&lt;/text&gt;&#10;        &lt;text x='300' y='236' textAnchor='middle' fill='#4A5568' fontSize='14'&gt;in-app balance&lt;/text&gt;&#10;        &lt;rect x='428' y='152' width='152' height='104' rx='12' fill='#E8EFF8' stroke='#3D7BD9' strokeWidth='2' /&gt;&#10;        &lt;text x='504' y='188' textAnchor='middle' fill='#0E3F8C' fontSize='18' fontWeight='bold'&gt;Cash&lt;/text&gt;&#10;        &lt;text x='504' y='214' textAnchor='middle' fill='#4A5568' fontSize='14'&gt;mark as&lt;/text&gt;&#10;        &lt;text x='504' y='236' textAnchor='middle' fill='#4A5568' fontSize='14'&gt;pay on delivery&lt;/text&gt;&#10;        &lt;rect x='60' y='284' width='480' height='52' rx='10' fill='#F0F5FC' stroke='#1E4FA8' strokeWidth='2' /&gt;&#10;        &lt;text x='300' y='316' textAnchor='middle' fill='#0E3F8C' fontSize='16' fontWeight='bold'&gt;The caller never asks which one it holds.&lt;/text&gt;&#10;      &lt;/svg&gt;&#10;    &lt;/Box&gt;&#10;    &lt;Box style={{ flex: 4, flexDirection: 'column', gap: 12, justifyContent: 'center' }}&gt;&#10;      {[&#10;        ['comments', 'Poly = many, morph = form', 'One call site, many possible shapes of behaviour.'],&#10;        ['bolt', 'Dynamic binding', 'Which method runs is decided at runtime, not compile time.'],&#10;        ['exchange-alt', 'Substitutability', 'Any implementation can stand in — if the contract holds.'],&#10;      ].map(([icon, t, d]) =&gt; (&#10;        &lt;Box key={t} style={{ flexDirection: 'row', gap: 13, alignItems: 'flex-start', padding: '15px 17px', background: '#F7F9FC', borderRadius: 10, border: '1px solid #E5E7EB' }}&gt;&#10;          &lt;Box style={{ width: 40, height: 40, borderRadius: 9, background: '#E8EFF8', justifyContent: 'center', alignItems: 'center' }}&gt;&#10;            &lt;FAIcon name={icon} style={{ fill: '#1E4FA8', width: 20, height: 20 }} /&gt;&#10;          &lt;/Box&gt;&#10;          &lt;Box style={{ flex: 1, flexDirection: 'column', gap: 3 }}&gt;&#10;            &lt;Text style={{ fontSize: 17, fontWeight: 'bold', color: '#1A2230' }}&gt;{t}&lt;/Text&gt;&#10;            &lt;Text style={{ fontSize: 14, color: '#4A5568', lineHeight: 1.5 }}&gt;{d}&lt;/Text&gt;&#10;          &lt;/Box&gt;&#10;        &lt;/Box&gt;&#10;      ))}&#10;      &lt;Box style={{ padding: '13px 16px', background: '#0E3F8C', borderRadius: 10 }}&gt;&#10;        &lt;Text style={{ fontSize: 15, color: '#FFFFFF', lineHeight: 1.5 }}&gt;This is why &lt;Text style={{ fontWeight: 'bold', color: '#FFC107' }}&gt;Order&lt;/Text&gt; does not need to know how you pay.&lt;/Text&gt;&#10;      &lt;/Box&gt;&#10;    &lt;/Box&gt;&#10;  &lt;/Box&gt;&#10;  &lt;Box style={{ height: 40, padding: '0 40px', flexDirection: 'row', alignItems: 'center', justifyContent: 'space-between' }}&gt;&#10;    &lt;Text style={{ fontSize: 13, color: '#8B97A8' }}&gt;ISAD · Fall 2026&lt;/Text&gt;&#10;    &lt;Text style={{ fontSize: 14, color: '#1E4FA8', fontWeight: 'bold' }}&gt;24 / 38&lt;/Text&gt;&#10;  &lt;/Box&gt;&#10;&lt;/Slide&gt;"/>
+        <p:cNvPr id="364" name=""/>
         <p:cNvGrpSpPr/>
         <p:nvPr/>
       </p:nvGrpSpPr>
@@ -12361,7 +12724,10 @@
         </p:spPr>
         <p:txBody>
           <a:bodyPr/>
-          <a:p/>
+          <a:p>
+            <a:pPr/>
+            <a:endParaRPr/>
+          </a:p>
         </p:txBody>
       </p:sp>
       <p:sp>
@@ -12385,7 +12751,10 @@
         </p:spPr>
         <p:txBody>
           <a:bodyPr/>
-          <a:p/>
+          <a:p>
+            <a:pPr/>
+            <a:endParaRPr/>
+          </a:p>
         </p:txBody>
       </p:sp>
       <p:sp>
@@ -12552,7 +12921,10 @@
         </p:spPr>
         <p:txBody>
           <a:bodyPr/>
-          <a:p/>
+          <a:p>
+            <a:pPr/>
+            <a:endParaRPr/>
+          </a:p>
         </p:txBody>
       </p:sp>
       <p:sp>
@@ -12578,7 +12950,10 @@
         </p:spPr>
         <p:txBody>
           <a:bodyPr/>
-          <a:p/>
+          <a:p>
+            <a:pPr/>
+            <a:endParaRPr/>
+          </a:p>
         </p:txBody>
       </p:sp>
       <p:pic>
@@ -12710,7 +13085,10 @@
         </p:spPr>
         <p:txBody>
           <a:bodyPr/>
-          <a:p/>
+          <a:p>
+            <a:pPr/>
+            <a:endParaRPr/>
+          </a:p>
         </p:txBody>
       </p:sp>
       <p:sp>
@@ -12736,7 +13114,10 @@
         </p:spPr>
         <p:txBody>
           <a:bodyPr/>
-          <a:p/>
+          <a:p>
+            <a:pPr/>
+            <a:endParaRPr/>
+          </a:p>
         </p:txBody>
       </p:sp>
       <p:pic>
@@ -12868,7 +13249,10 @@
         </p:spPr>
         <p:txBody>
           <a:bodyPr/>
-          <a:p/>
+          <a:p>
+            <a:pPr/>
+            <a:endParaRPr/>
+          </a:p>
         </p:txBody>
       </p:sp>
       <p:sp>
@@ -12894,7 +13278,10 @@
         </p:spPr>
         <p:txBody>
           <a:bodyPr/>
-          <a:p/>
+          <a:p>
+            <a:pPr/>
+            <a:endParaRPr/>
+          </a:p>
         </p:txBody>
       </p:sp>
       <p:pic>
@@ -13021,7 +13408,10 @@
         </p:spPr>
         <p:txBody>
           <a:bodyPr/>
-          <a:p/>
+          <a:p>
+            <a:pPr/>
+            <a:endParaRPr/>
+          </a:p>
         </p:txBody>
       </p:sp>
       <p:sp>
@@ -13159,7 +13549,7 @@
   <p:cSld>
     <p:spTree>
       <p:nvGrpSpPr>
-        <p:cNvPr id="390" name="" descr="&lt;Slide style={{ background: '#FFFFFF', padding: 0 }}&gt;&#10;  &lt;Box style={{ padding: '22px 40px 6px 40px', flexDirection: 'row', alignItems: 'center', justifyContent: 'space-between' }}&gt;&#10;    &lt;Text style={{ fontSize: 33, fontWeight: 'bold', color: '#0E3F8C' }}&gt;PaymentMethod — Polymorphism on Paper&lt;/Text&gt;&#10;    &lt;Text style={{ fontSize: 14, color: '#1E4FA8', fontWeight: 'bold' }}&gt;25 / 38&lt;/Text&gt;&#10;  &lt;/Box&gt;&#10;  &lt;Box style={{ flex: 1, padding: '10px 40px 0 40px', flexDirection: 'row', gap: 26 }}&gt;&#10;    &lt;Box style={{ flex: 3, justifyContent: 'center' }}&gt;&#10;      &lt;CodeBlock theme='one-dark-pro' code={`PaymentMethod (interface)&#10;    + pay(amount) : Receipt&#10;&#10;Class CampusCard implements PaymentMethod&#10;    + pay(amount) : Receipt&#10;        return cardTerminal.deduct(amount)&#10;&#10;Class Wallet implements PaymentMethod&#10;    + pay(amount) : Receipt&#10;        return balance.debit(amount)&#10;&#10;Class Cash implements PaymentMethod&#10;    + pay(amount) : Receipt&#10;        return Receipt.payOnDelivery(amount)&#10;&#10;# the call site - one stable line&#10;r = method.pay(order.total())`} language='text' width={580} fontSize={11} /&gt;&#10;    &lt;/Box&gt;&#10;    &lt;Box style={{ flex: 2, flexDirection: 'column', gap: 12, justifyContent: 'center' }}&gt;&#10;      &lt;Box style={{ padding: '20px 22px', background: '#0E3F8C', borderRadius: 12, flexDirection: 'column', gap: 12 }}&gt;&#10;        &lt;Text style={{ fontSize: 16, color: '#7FA2D6', letterSpacing: 1 }}&gt;THE ONE LINE THAT MATTERS&lt;/Text&gt;&#10;        &lt;Text style={{ fontSize: 17, color: '#FFFFFF', lineHeight: 1.4, fontWeight: 'bold' }}&gt;method.pay(order.total())&lt;/Text&gt;&#10;        &lt;Box style={{ width: 44, height: 4, background: '#FFC107' }} /&gt;&#10;        &lt;Text style={{ fontSize: 15, color: '#C5D4EA', lineHeight: 1.5 }}&gt;It does not say which payment type. It does not need to. Adding a fourth method changes nothing here.&lt;/Text&gt;&#10;      &lt;/Box&gt;&#10;      &lt;Box style={{ padding: '14px 17px', background: '#F0F5FC', borderRadius: 10, border: '1px solid #3D7BD9' }}&gt;&#10;        &lt;Text style={{ fontSize: 15, color: '#4A5568', lineHeight: 1.5 }}&gt;&lt;Text style={{ fontWeight: 'bold', color: '#0E3F8C' }}&gt;The interface is the contract.&lt;/Text&gt; Each class decides how to honour it.&lt;/Text&gt;&#10;      &lt;/Box&gt;&#10;      &lt;Box style={{ padding: '14px 17px', background: '#FDF3F3', borderRadius: 10, borderLeft: '4px solid #D9534F' }}&gt;&#10;        &lt;Text style={{ fontSize: 15, color: '#4A5568', lineHeight: 1.5 }}&gt;No &lt;Text style={{ fontWeight: 'bold', color: '#D9534F' }}&gt;if&lt;/Text&gt; and no &lt;Text style={{ fontWeight: 'bold', color: '#D9534F' }}&gt;switch&lt;/Text&gt; anywhere in Order.&lt;/Text&gt;&#10;      &lt;/Box&gt;&#10;    &lt;/Box&gt;&#10;  &lt;/Box&gt;&#10;  &lt;Box style={{ height: 44, background: '#0E3F8C', padding: '0 40px', flexDirection: 'row', alignItems: 'center', justifyContent: 'center' }}&gt;&#10;    &lt;Text style={{ fontSize: 17, color: '#FFFFFF', fontWeight: '600' }}&gt;CampusBites uses this exact shape. Your M1 models will too.&lt;/Text&gt;&#10;  &lt;/Box&gt;&#10;&lt;/Slide&gt;"/>
+        <p:cNvPr id="390" name=""/>
         <p:cNvGrpSpPr/>
         <p:nvPr/>
       </p:nvGrpSpPr>
@@ -13192,7 +13582,10 @@
         </p:spPr>
         <p:txBody>
           <a:bodyPr/>
-          <a:p/>
+          <a:p>
+            <a:pPr/>
+            <a:endParaRPr/>
+          </a:p>
         </p:txBody>
       </p:sp>
       <p:sp>
@@ -13288,7 +13681,10 @@
         </p:spPr>
         <p:txBody>
           <a:bodyPr/>
-          <a:p/>
+          <a:p>
+            <a:pPr/>
+            <a:endParaRPr/>
+          </a:p>
         </p:txBody>
       </p:sp>
       <p:sp>
@@ -13382,7 +13778,10 @@
         </p:spPr>
         <p:txBody>
           <a:bodyPr/>
-          <a:p/>
+          <a:p>
+            <a:pPr/>
+            <a:endParaRPr/>
+          </a:p>
         </p:txBody>
       </p:sp>
       <p:sp>
@@ -13450,7 +13849,10 @@
         </p:spPr>
         <p:txBody>
           <a:bodyPr/>
-          <a:p/>
+          <a:p>
+            <a:pPr/>
+            <a:endParaRPr/>
+          </a:p>
         </p:txBody>
       </p:sp>
       <p:sp>
@@ -13523,7 +13925,10 @@
         </p:spPr>
         <p:txBody>
           <a:bodyPr/>
-          <a:p/>
+          <a:p>
+            <a:pPr/>
+            <a:endParaRPr/>
+          </a:p>
         </p:txBody>
       </p:sp>
       <p:sp>
@@ -13580,7 +13985,10 @@
         </p:spPr>
         <p:txBody>
           <a:bodyPr/>
-          <a:p/>
+          <a:p>
+            <a:pPr/>
+            <a:endParaRPr/>
+          </a:p>
         </p:txBody>
       </p:sp>
       <p:sp>
@@ -13679,7 +14087,10 @@
         </p:spPr>
         <p:txBody>
           <a:bodyPr/>
-          <a:p/>
+          <a:p>
+            <a:pPr/>
+            <a:endParaRPr/>
+          </a:p>
         </p:txBody>
       </p:sp>
       <p:sp>
@@ -13740,7 +14151,10 @@
         </p:spPr>
         <p:txBody>
           <a:bodyPr/>
-          <a:p/>
+          <a:p>
+            <a:pPr/>
+            <a:endParaRPr/>
+          </a:p>
         </p:txBody>
       </p:sp>
       <p:sp>
@@ -13798,7 +14212,7 @@
   <p:cSld>
     <p:spTree>
       <p:nvGrpSpPr>
-        <p:cNvPr id="408" name="" descr="&lt;Slide style={{ background: '#FFFFFF', padding: 0 }}&gt;&#10;  &lt;Box style={{ height: 72, background: '#1E4FA8', padding: '0 40px', flexDirection: 'row', alignItems: 'center', justifyContent: 'space-between' }}&gt;&#10;    &lt;Text style={{ fontSize: 15, color: '#B9CDF0', letterSpacing: 1 }}&gt;ISAD · INFORMATION SYSTEMS ANALYSIS &amp;amp; DESIGN&lt;/Text&gt;&#10;    &lt;Text style={{ fontSize: 15, color: '#B9CDF0' }}&gt;W02 · INTERFACES&lt;/Text&gt;&#10;  &lt;/Box&gt;&#10;  &lt;Box style={{ padding: '20px 40px 4px 40px', flexDirection: 'row', alignItems: 'center', justifyContent: 'space-between' }}&gt;&#10;    &lt;Text style={{ fontSize: 32, fontWeight: 'bold', color: '#0E3F8C' }}&gt;Interface or Abstract Class?&lt;/Text&gt;&#10;    &lt;Text style={{ fontSize: 14, color: '#1E4FA8', fontWeight: 'bold' }}&gt;26 / 38&lt;/Text&gt;&#10;  &lt;/Box&gt;&#10;  &lt;Box style={{ flex: 1, padding: '12px 40px 8px 40px' }}&gt;&#10;    &lt;Table&#10;      style={{ width: '100%', height: '100%' }}&#10;      defaultTextStyle={{ fontSize: 14, textAlign: 'left', color: '#1A2230' }}&#10;      defaultCellStyle={{&#10;        border: {&#10;          left: { width: 1, color: '#E5E7EB' },&#10;          right: { width: 1, color: '#E5E7EB' },&#10;          top: { width: 1, color: '#E5E7EB' },&#10;          bottom: { width: 1, color: '#E5E7EB' },&#10;        },&#10;      }}&#10;      cells={[&#10;        [&#10;          { text: 'Question', textStyle: { bold: true, color: '#FFFFFF', textAlign: 'left' }, cellStyle: { background: { color: '#0E3F8C' } } },&#10;          { text: 'Interface', textStyle: { bold: true, color: '#FFFFFF', textAlign: 'left' }, cellStyle: { background: { color: '#1E4FA8' } } },&#10;          { text: 'Abstract class', textStyle: { bold: true, color: '#FFFFFF', textAlign: 'left' }, cellStyle: { background: { color: '#3D7BD9' } } },&#10;        ],&#10;        [&#10;          { text: 'Can a class take several?', textStyle: { bold: true, color: '#0E3F8C' }, cellStyle: { background: { color: '#F7F9FC' } } },&#10;          { text: 'Yes — implement many', textStyle: { color: '#4A5568' }, cellStyle: { background: { color: '#F7F9FC' } } },&#10;          { text: 'No — extend only one', textStyle: { color: '#4A5568' }, cellStyle: { background: { color: '#F7F9FC' } } },&#10;        ],&#10;        [&#10;          { text: 'Holds state (fields)?', textStyle: { bold: true, color: '#0E3F8C' } },&#10;          { text: 'No — constants only', textStyle: { color: '#4A5568' } },&#10;          { text: 'Yes — shared fields', textStyle: { color: '#4A5568' } },&#10;        ],&#10;        [&#10;          { text: 'Ships working code?', textStyle: { bold: true, color: '#0E3F8C' }, cellStyle: { background: { color: '#F7F9FC' } } },&#10;          { text: 'No — signatures only (mostly)', textStyle: { color: '#4A5568' }, cellStyle: { background: { color: '#F7F9FC' } } },&#10;          { text: 'Yes — concrete methods inherited', textStyle: { color: '#4A5568' }, cellStyle: { background: { color: '#F7F9FC' } } },&#10;        ],&#10;        [&#10;          { text: 'What it expresses', textStyle: { bold: true, color: '#0E3F8C' } },&#10;          { text: 'A capability: &quot;can be paid with&quot;', textStyle: { color: '#4A5568' } },&#10;          { text: 'A family: &quot;is a kind of&quot;', textStyle: { color: '#4A5568' } },&#10;        ],&#10;        [&#10;          { text: 'Coupling', textStyle: { bold: true, color: '#0E3F8C' }, cellStyle: { background: { color: '#F7F9FC' } } },&#10;          { text: 'Loose — pure contract', textStyle: { color: '#1E4FA8', bold: true }, cellStyle: { background: { color: '#F7F9FC' } } },&#10;          { text: 'Tighter — shares implementation', textStyle: { color: '#4A5568' }, cellStyle: { background: { color: '#F7F9FC' } } },&#10;        ],&#10;        [&#10;          { text: 'Use it when…', textStyle: { bold: true, color: '#0E3F8C' } },&#10;          { text: 'Unrelated classes share one ability', textStyle: { color: '#4A5568' } },&#10;          { text: 'Close relatives share real code', textStyle: { color: '#4A5568' } },&#10;        ],&#10;      ]}&#10;    /&gt;&#10;  &lt;/Box&gt;&#10;  &lt;Box style={{ height: 46, background: '#0E3F8C', padding: '0 40px', flexDirection: 'row', alignItems: 'center', justifyContent: 'center' }}&gt;&#10;    &lt;Text style={{ fontSize: 17, color: '#FFFFFF', fontWeight: '600' }}&gt;Default: reach for the interface. Move to an abstract class only when you must share code.&lt;/Text&gt;&#10;  &lt;/Box&gt;&#10;&lt;/Slide&gt;"/>
+        <p:cNvPr id="408" name=""/>
         <p:cNvGrpSpPr/>
         <p:nvPr/>
       </p:nvGrpSpPr>
@@ -13831,7 +14245,10 @@
         </p:spPr>
         <p:txBody>
           <a:bodyPr/>
-          <a:p/>
+          <a:p>
+            <a:pPr/>
+            <a:endParaRPr/>
+          </a:p>
         </p:txBody>
       </p:sp>
       <p:sp>
@@ -13855,7 +14272,10 @@
         </p:spPr>
         <p:txBody>
           <a:bodyPr/>
-          <a:p/>
+          <a:p>
+            <a:pPr/>
+            <a:endParaRPr/>
+          </a:p>
         </p:txBody>
       </p:sp>
       <p:sp>
@@ -14963,7 +15383,10 @@
         </p:spPr>
         <p:txBody>
           <a:bodyPr/>
-          <a:p/>
+          <a:p>
+            <a:pPr/>
+            <a:endParaRPr/>
+          </a:p>
         </p:txBody>
       </p:sp>
       <p:sp>
@@ -15011,7 +15434,7 @@
   <p:cSld>
     <p:spTree>
       <p:nvGrpSpPr>
-        <p:cNvPr id="418" name="" descr="&lt;Slide style={{ background: '#FFFFFF', padding: 0 }}&gt;&#10;  &lt;Box style={{ height: 72, background: '#1E4FA8', padding: '0 40px', flexDirection: 'row', alignItems: 'center', justifyContent: 'space-between' }}&gt;&#10;    &lt;Text style={{ fontSize: 15, color: '#B9CDF0', letterSpacing: 1 }}&gt;ISAD · INFORMATION SYSTEMS ANALYSIS &amp;amp; DESIGN&lt;/Text&gt;&#10;    &lt;Text style={{ fontSize: 15, color: '#B9CDF0' }}&gt;W02 · INTERFACES&lt;/Text&gt;&#10;  &lt;/Box&gt;&#10;  &lt;Box style={{ padding: '22px 40px 0 40px' }}&gt;&#10;    &lt;Text style={{ fontSize: 32, fontWeight: 'bold', color: '#0E3F8C' }}&gt;Program to an Interface&lt;/Text&gt;&#10;  &lt;/Box&gt;&#10;  &lt;Box style={{ flex: 1, padding: '18px 40px 0 40px', flexDirection: 'row', gap: 26 }}&gt;&#10;    &lt;Box style={{ flex: 3, flexDirection: 'column', gap: 12 }}&gt;&#10;      &lt;Box style={{ flex: 1, padding: '16px 18px', background: '#FDF3F3', borderRadius: 12, border: '1px solid #D9534F', flexDirection: 'column' }}&gt;&#10;        &lt;Box style={{ flexDirection: 'row', alignItems: 'center', gap: 10, marginBottom: 8 }}&gt;&#10;          &lt;FAIcon name='times-circle' style={{ fill: '#D9534F', width: 20, height: 20 }} /&gt;&#10;          &lt;Text style={{ fontSize: 16, fontWeight: 'bold', color: '#D9534F' }}&gt;Dependent on a concrete class&lt;/Text&gt;&#10;        &lt;/Box&gt;&#10;        &lt;CodeBlock theme='one-dark-pro' code={`Class OrderService&#10;    - card : CampusCard       # one type only&#10;&#10;    + checkout(order)&#10;        card.pay(order.total())&#10;&#10;# adding Wallet means editing OrderService&#10;# and re-testing everything`} language='text' width={520} fontSize={12} /&gt;&#10;      &lt;/Box&gt;&#10;    &lt;/Box&gt;&#10;    &lt;Box style={{ flex: 3, flexDirection: 'column', gap: 12 }}&gt;&#10;      &lt;Box style={{ flex: 1, padding: '16px 18px', background: '#F0F5FC', borderRadius: 12, border: '1px solid #1E4FA8', flexDirection: 'column' }}&gt;&#10;        &lt;Box style={{ flexDirection: 'row', alignItems: 'center', gap: 10, marginBottom: 8 }}&gt;&#10;          &lt;FAIcon name='check-circle' style={{ fill: '#1E4FA8', width: 20, height: 20 }} /&gt;&#10;          &lt;Text style={{ fontSize: 16, fontWeight: 'bold', color: '#0E3F8C' }}&gt;Dependent on an interface&lt;/Text&gt;&#10;        &lt;/Box&gt;&#10;        &lt;CodeBlock theme='one-dark-pro' code={`Class OrderService&#10;    - method : PaymentMethod  # any type&#10;&#10;    + checkout(order)&#10;        method.pay(order.total())&#10;&#10;# adding Wallet changes nothing here.&#10;# new class, same contract.`} language='text' width={520} fontSize={12} /&gt;&#10;      &lt;/Box&gt;&#10;    &lt;/Box&gt;&#10;  &lt;/Box&gt;&#10;  &lt;Box style={{ height: 52, padding: '0 40px', flexDirection: 'row', alignItems: 'center', gap: 14 }}&gt;&#10;    &lt;FAIcon name='lightbulb' style={{ fill: '#FFC107', width: 22, height: 22 }} /&gt;&#10;    &lt;Text style={{ fontSize: 17, color: '#4A5568' }}&gt;Declare the variable by what it must &lt;Text style={{ fontWeight: 'bold', color: '#0E3F8C' }}&gt;do&lt;/Text&gt;, not by what it &lt;Text style={{ fontWeight: 'bold', color: '#0E3F8C' }}&gt;is&lt;/Text&gt;.&lt;/Text&gt;&#10;    &lt;Text style={{ fontSize: 14, color: '#1E4FA8', fontWeight: 'bold', marginLeft: 'auto' }}&gt;27 / 38&lt;/Text&gt;&#10;  &lt;/Box&gt;&#10;&lt;/Slide&gt;"/>
+        <p:cNvPr id="418" name=""/>
         <p:cNvGrpSpPr/>
         <p:nvPr/>
       </p:nvGrpSpPr>
@@ -15044,7 +15467,10 @@
         </p:spPr>
         <p:txBody>
           <a:bodyPr/>
-          <a:p/>
+          <a:p>
+            <a:pPr/>
+            <a:endParaRPr/>
+          </a:p>
         </p:txBody>
       </p:sp>
       <p:sp>
@@ -15068,7 +15494,10 @@
         </p:spPr>
         <p:txBody>
           <a:bodyPr/>
-          <a:p/>
+          <a:p>
+            <a:pPr/>
+            <a:endParaRPr/>
+          </a:p>
         </p:txBody>
       </p:sp>
       <p:sp>
@@ -15204,7 +15633,10 @@
         </p:spPr>
         <p:txBody>
           <a:bodyPr/>
-          <a:p/>
+          <a:p>
+            <a:pPr/>
+            <a:endParaRPr/>
+          </a:p>
         </p:txBody>
       </p:sp>
       <p:pic>
@@ -15301,7 +15733,10 @@
         </p:spPr>
         <p:txBody>
           <a:bodyPr/>
-          <a:p/>
+          <a:p>
+            <a:pPr/>
+            <a:endParaRPr/>
+          </a:p>
         </p:txBody>
       </p:sp>
       <p:pic>
@@ -15534,7 +15969,10 @@
         </p:spPr>
         <p:txBody>
           <a:bodyPr/>
-          <a:p/>
+          <a:p>
+            <a:pPr/>
+            <a:endParaRPr/>
+          </a:p>
         </p:txBody>
       </p:sp>
       <p:sp>
@@ -15598,7 +16036,10 @@
         </p:spPr>
         <p:txBody>
           <a:bodyPr/>
-          <a:p/>
+          <a:p>
+            <a:pPr/>
+            <a:endParaRPr/>
+          </a:p>
         </p:txBody>
       </p:sp>
       <p:sp>
@@ -15649,7 +16090,7 @@
   <p:cSld>
     <p:spTree>
       <p:nvGrpSpPr>
-        <p:cNvPr id="437" name="" descr="&lt;Slide style={{ background: '#FFFFFF', padding: 0 }}&gt;&#10;  &lt;Box style={{ height: 72, background: '#1E4FA8', padding: '0 40px', flexDirection: 'row', alignItems: 'center', justifyContent: 'space-between' }}&gt;&#10;    &lt;Text style={{ fontSize: 15, color: '#B9CDF0', letterSpacing: 1 }}&gt;ISAD · INFORMATION SYSTEMS ANALYSIS &amp;amp; DESIGN&lt;/Text&gt;&#10;    &lt;Text style={{ fontSize: 15, color: '#B9CDF0' }}&gt;W02 · PAYOFF&lt;/Text&gt;&#10;  &lt;/Box&gt;&#10;  &lt;Box style={{ padding: '20px 40px 0 40px', flexDirection: 'row', alignItems: 'center', justifyContent: 'space-between' }}&gt;&#10;    &lt;Text style={{ fontSize: 32, fontWeight: 'bold', color: '#0E3F8C' }}&gt;Closing the Loop from Week 01&lt;/Text&gt;&#10;    &lt;Box style={{ padding: '5px 14px', background: '#E8EFF8', borderRadius: 14 }}&gt;&#10;      &lt;Text style={{ fontSize: 13, color: '#1E4FA8', fontWeight: 'bold' }}&gt;W01 PROBLEM → W02 TOOL&lt;/Text&gt;&#10;    &lt;/Box&gt;&#10;  &lt;/Box&gt;&#10;  &lt;Box style={{ flex: 1, padding: '14px 40px 0 40px', flexDirection: 'row', gap: 22 }}&gt;&#10;    &lt;Box style={{ flex: 1, flexDirection: 'column', gap: 9 }}&gt;&#10;      &lt;Box style={{ flexDirection: 'row', alignItems: 'center', gap: 9 }}&gt;&#10;        &lt;FAIcon name='times-circle' style={{ fill: '#D9534F', width: 18, height: 18 }} /&gt;&#10;        &lt;Text style={{ fontSize: 16, fontWeight: 'bold', color: '#D9534F' }}&gt;Last week: the smell&lt;/Text&gt;&#10;      &lt;/Box&gt;&#10;      &lt;CodeBlock theme='one-dark-pro' code={`if type = CARD    -&gt; chargeCard(order)&#10;if type = WECHAT  -&gt; chargeWechat(order)&#10;if type = ALIPAY  -&gt; chargeAlipay(order)&#10;otherwise         -&gt; refuse: no such type&#10;&#10;# every new type = edit this method&#10;# and re-test every branch`} language='text' width={500} fontSize={11} /&gt;&#10;    &lt;/Box&gt;&#10;    &lt;Box style={{ width: 52, justifyContent: 'center', alignItems: 'center' }}&gt;&#10;      &lt;FAIcon name='long-arrow-alt-right' style={{ fill: '#3D7BD9', width: 34, height: 34 }} /&gt;&#10;    &lt;/Box&gt;&#10;    &lt;Box style={{ flex: 1, flexDirection: 'column', gap: 9 }}&gt;&#10;      &lt;Box style={{ flexDirection: 'row', alignItems: 'center', gap: 9 }}&gt;&#10;        &lt;FAIcon name='check-circle' style={{ fill: '#1E4FA8', width: 18, height: 18 }} /&gt;&#10;        &lt;Text style={{ fontSize: 16, fontWeight: 'bold', color: '#0E3F8C' }}&gt;This week: the tool&lt;/Text&gt;&#10;      &lt;/Box&gt;&#10;      &lt;CodeBlock theme='one-dark-pro' code={`r = method.pay(order.total())&#10;&#10;# a new payment type?&#10;Class Bursary implements PaymentMethod&#10;    + pay(amount) : Receipt&#10;        return award.deduct(amount)&#10;&#10;# no existing line edited.&#10;# no existing test rewritten.`} language='text' width={500} fontSize={11} /&gt;&#10;    &lt;/Box&gt;&#10;  &lt;/Box&gt;&#10;  &lt;Box style={{ height: 48, background: '#0E3F8C', padding: '0 40px', flexDirection: 'row', alignItems: 'center', justifyContent: 'center' }}&gt;&#10;    &lt;Text style={{ fontSize: 17, color: '#FFFFFF', fontWeight: '600' }}&gt;Same problem, one week apart. That gap is what this course is training.&lt;/Text&gt;&#10;  &lt;/Box&gt;&#10;&lt;/Slide&gt;"/>
+        <p:cNvPr id="437" name=""/>
         <p:cNvGrpSpPr/>
         <p:nvPr/>
       </p:nvGrpSpPr>
@@ -15682,7 +16123,10 @@
         </p:spPr>
         <p:txBody>
           <a:bodyPr/>
-          <a:p/>
+          <a:p>
+            <a:pPr/>
+            <a:endParaRPr/>
+          </a:p>
         </p:txBody>
       </p:sp>
       <p:sp>
@@ -15706,7 +16150,10 @@
         </p:spPr>
         <p:txBody>
           <a:bodyPr/>
-          <a:p/>
+          <a:p>
+            <a:pPr/>
+            <a:endParaRPr/>
+          </a:p>
         </p:txBody>
       </p:sp>
       <p:sp>
@@ -15837,7 +16284,10 @@
         </p:spPr>
         <p:txBody>
           <a:bodyPr/>
-          <a:p/>
+          <a:p>
+            <a:pPr/>
+            <a:endParaRPr/>
+          </a:p>
         </p:txBody>
       </p:sp>
       <p:sp>
@@ -16059,7 +16509,10 @@
         </p:spPr>
         <p:txBody>
           <a:bodyPr/>
-          <a:p/>
+          <a:p>
+            <a:pPr/>
+            <a:endParaRPr/>
+          </a:p>
         </p:txBody>
       </p:sp>
       <p:sp>
@@ -16120,7 +16573,10 @@
         </p:spPr>
         <p:txBody>
           <a:bodyPr/>
-          <a:p/>
+          <a:p>
+            <a:pPr/>
+            <a:endParaRPr/>
+          </a:p>
         </p:txBody>
       </p:sp>
       <p:sp>
@@ -16184,7 +16640,10 @@
         </p:spPr>
         <p:txBody>
           <a:bodyPr/>
-          <a:p/>
+          <a:p>
+            <a:pPr/>
+            <a:endParaRPr/>
+          </a:p>
         </p:txBody>
       </p:sp>
       <p:sp>
@@ -16236,7 +16695,7 @@
   <p:cSld>
     <p:spTree>
       <p:nvGrpSpPr>
-        <p:cNvPr id="456" name="" descr="&lt;Slide style={{ background: '#0E3F8C', padding: 0 }}&gt;&#10;  &lt;Box style={{ flexDirection: 'row', height: '100%', position: 'relative' }}&gt;&#10;    &lt;Box style={{ position: 'absolute', top: 0, left: 0, right: 0, height: 8, background: '#1E4FA8' }} /&gt;&#10;    &lt;Box style={{ width: 300, justifyContent: 'center', alignItems: 'center', borderRight: '1px solid #2B5793' }}&gt;&#10;      &lt;Text style={{ fontSize: 220, fontWeight: 'bold', color: '#3D7BD9', fontFamily: 'Georgia, serif', lineHeight: 1 }}&gt;06&lt;/Text&gt;&#10;    &lt;/Box&gt;&#10;    &lt;Box style={{ flex: 1, padding: '70px 64px', flexDirection: 'column', justifyContent: 'center' }}&gt;&#10;      &lt;Text style={{ fontSize: 15, color: '#7FA2D6', letterSpacing: 2, marginBottom: 18 }}&gt;PART 2 · LAB · 2 HOURS&lt;/Text&gt;&#10;      &lt;Text style={{ fontSize: 46, fontWeight: 'bold', color: '#FFFFFF', lineHeight: 1.18 }}&gt;OO Analysis &amp;amp;&lt;br /&gt;M0 Kickoff&lt;/Text&gt;&#10;      &lt;Box style={{ width: 64, height: 4, background: '#FFC107', marginTop: 26, marginBottom: 26 }} /&gt;&#10;      &lt;Box style={{ flexDirection: 'column', gap: 12 }}&gt;&#10;        {[&#10;          'Exercise 2.1 — the class that does everything',&#10;          'From objects to responsibilities',&#10;          'Then: form your team and deliver M0',&#10;        ].map((t) =&gt; (&#10;          &lt;Box key={t} style={{ flexDirection: 'row', alignItems: 'center', gap: 12 }}&gt;&#10;            &lt;Box style={{ width: 8, height: 8, borderRadius: 4, background: '#3D7BD9' }} /&gt;&#10;            &lt;Text style={{ fontSize: 20, color: '#C5D4EA' }}&gt;{t}&lt;/Text&gt;&#10;          &lt;/Box&gt;&#10;        ))}&#10;      &lt;/Box&gt;&#10;    &lt;/Box&gt;&#10;  &lt;/Box&gt;&#10;&lt;/Slide&gt;"/>
+        <p:cNvPr id="456" name=""/>
         <p:cNvGrpSpPr/>
         <p:nvPr/>
       </p:nvGrpSpPr>
@@ -16269,7 +16728,10 @@
         </p:spPr>
         <p:txBody>
           <a:bodyPr/>
-          <a:p/>
+          <a:p>
+            <a:pPr/>
+            <a:endParaRPr/>
+          </a:p>
         </p:txBody>
       </p:sp>
       <p:sp>
@@ -16309,7 +16771,10 @@
         </p:spPr>
         <p:txBody>
           <a:bodyPr/>
-          <a:p/>
+          <a:p>
+            <a:pPr/>
+            <a:endParaRPr/>
+          </a:p>
         </p:txBody>
       </p:sp>
       <p:sp>
@@ -16456,7 +16921,10 @@
         </p:spPr>
         <p:txBody>
           <a:bodyPr/>
-          <a:p/>
+          <a:p>
+            <a:pPr/>
+            <a:endParaRPr/>
+          </a:p>
         </p:txBody>
       </p:sp>
       <p:sp>
@@ -16482,7 +16950,10 @@
         </p:spPr>
         <p:txBody>
           <a:bodyPr/>
-          <a:p/>
+          <a:p>
+            <a:pPr/>
+            <a:endParaRPr/>
+          </a:p>
         </p:txBody>
       </p:sp>
       <p:sp>
@@ -16543,7 +17014,10 @@
         </p:spPr>
         <p:txBody>
           <a:bodyPr/>
-          <a:p/>
+          <a:p>
+            <a:pPr/>
+            <a:endParaRPr/>
+          </a:p>
         </p:txBody>
       </p:sp>
       <p:sp>
@@ -16604,7 +17078,10 @@
         </p:spPr>
         <p:txBody>
           <a:bodyPr/>
-          <a:p/>
+          <a:p>
+            <a:pPr/>
+            <a:endParaRPr/>
+          </a:p>
         </p:txBody>
       </p:sp>
       <p:sp>
@@ -16663,7 +17140,10 @@
         </p:spPr>
         <p:txBody>
           <a:bodyPr/>
-          <a:p/>
+          <a:p>
+            <a:pPr/>
+            <a:endParaRPr/>
+          </a:p>
         </p:txBody>
       </p:sp>
     </p:spTree>
@@ -16676,7 +17156,7 @@
   <p:cSld>
     <p:spTree>
       <p:nvGrpSpPr>
-        <p:cNvPr id="470" name="" descr="&lt;Slide style={{ background: '#0E3F8C', padding: 0 }}&gt;&#10;  &lt;Box style={{ flexDirection: 'row', height: '100%', position: 'relative' }}&gt;&#10;    &lt;Box style={{ position: 'absolute', top: 0, left: 0, right: 0, height: 8, background: '#1E4FA8' }} /&gt;&#10;    &lt;Box style={{ width: 300, justifyContent: 'center', alignItems: 'center', borderRight: '1px solid #2B5793' }}&gt;&#10;      &lt;Text style={{ fontSize: 220, fontWeight: 'bold', color: '#3D7BD9', fontFamily: 'Georgia, serif', lineHeight: 1 }}&gt;01&lt;/Text&gt;&#10;    &lt;/Box&gt;&#10;    &lt;Box style={{ flex: 1, padding: '70px 64px', flexDirection: 'column', justifyContent: 'center' }}&gt;&#10;      &lt;Text style={{ fontSize: 15, color: '#7FA2D6', letterSpacing: 2, marginBottom: 18 }}&gt;PART 1 · LECTURE&lt;/Text&gt;&#10;      &lt;Text style={{ fontSize: 48, fontWeight: 'bold', color: '#FFFFFF', lineHeight: 1.18 }}&gt;Recap &amp;amp;&lt;br /&gt;CampusBites Kickoff&lt;/Text&gt;&#10;      &lt;Box style={{ width: 64, height: 4, background: '#FFC107', marginTop: 26, marginBottom: 26 }} /&gt;&#10;      &lt;Box style={{ flexDirection: 'column', gap: 12 }}&gt;&#10;        {[&#10;          'Where Week 01 left us — and what plugs in here',&#10;          'The four pillars we cover this week',&#10;          'CampusBites starts today; M0 due Fri Sep 11',&#10;        ].map((t) =&gt; (&#10;          &lt;Box key={t} style={{ flexDirection: 'row', alignItems: 'center', gap: 12 }}&gt;&#10;            &lt;Box style={{ width: 8, height: 8, borderRadius: 4, background: '#3D7BD9' }} /&gt;&#10;            &lt;Text style={{ fontSize: 20, color: '#C5D4EA' }}&gt;{t}&lt;/Text&gt;&#10;          &lt;/Box&gt;&#10;        ))}&#10;      &lt;/Box&gt;&#10;    &lt;/Box&gt;&#10;  &lt;/Box&gt;&#10;&lt;/Slide&gt;"/>
+        <p:cNvPr id="470" name=""/>
         <p:cNvGrpSpPr/>
         <p:nvPr/>
       </p:nvGrpSpPr>
@@ -16709,7 +17189,10 @@
         </p:spPr>
         <p:txBody>
           <a:bodyPr/>
-          <a:p/>
+          <a:p>
+            <a:pPr/>
+            <a:endParaRPr/>
+          </a:p>
         </p:txBody>
       </p:sp>
       <p:sp>
@@ -16749,7 +17232,10 @@
         </p:spPr>
         <p:txBody>
           <a:bodyPr/>
-          <a:p/>
+          <a:p>
+            <a:pPr/>
+            <a:endParaRPr/>
+          </a:p>
         </p:txBody>
       </p:sp>
       <p:sp>
@@ -16896,7 +17382,10 @@
         </p:spPr>
         <p:txBody>
           <a:bodyPr/>
-          <a:p/>
+          <a:p>
+            <a:pPr/>
+            <a:endParaRPr/>
+          </a:p>
         </p:txBody>
       </p:sp>
       <p:sp>
@@ -16922,7 +17411,10 @@
         </p:spPr>
         <p:txBody>
           <a:bodyPr/>
-          <a:p/>
+          <a:p>
+            <a:pPr/>
+            <a:endParaRPr/>
+          </a:p>
         </p:txBody>
       </p:sp>
       <p:sp>
@@ -16983,7 +17475,10 @@
         </p:spPr>
         <p:txBody>
           <a:bodyPr/>
-          <a:p/>
+          <a:p>
+            <a:pPr/>
+            <a:endParaRPr/>
+          </a:p>
         </p:txBody>
       </p:sp>
       <p:sp>
@@ -17044,7 +17539,10 @@
         </p:spPr>
         <p:txBody>
           <a:bodyPr/>
-          <a:p/>
+          <a:p>
+            <a:pPr/>
+            <a:endParaRPr/>
+          </a:p>
         </p:txBody>
       </p:sp>
       <p:sp>
@@ -17103,7 +17601,10 @@
         </p:spPr>
         <p:txBody>
           <a:bodyPr/>
-          <a:p/>
+          <a:p>
+            <a:pPr/>
+            <a:endParaRPr/>
+          </a:p>
         </p:txBody>
       </p:sp>
     </p:spTree>
@@ -17116,7 +17617,7 @@
   <p:cSld>
     <p:spTree>
       <p:nvGrpSpPr>
-        <p:cNvPr id="484" name="" descr="&lt;Slide style={{ background: '#FFFFFF', padding: 0 }}&gt;&#10;  &lt;Box style={{ padding: '22px 40px 6px 40px', flexDirection: 'row', alignItems: 'center', justifyContent: 'space-between' }}&gt;&#10;    &lt;Text style={{ fontSize: 32, fontWeight: 'bold', color: '#0E3F8C' }}&gt;Exercise 2.1 — The Class That Does Everything&lt;/Text&gt;&#10;    &lt;Text style={{ fontSize: 14, color: '#1E4FA8', fontWeight: 'bold' }}&gt;30 / 38&lt;/Text&gt;&#10;  &lt;/Box&gt;&#10;  &lt;Box style={{ flex: 1, padding: '10px 40px 0 40px', flexDirection: 'row', gap: 26 }}&gt;&#10;    &lt;Box style={{ flex: 3, flexDirection: 'column', gap: 9 }}&gt;&#10;      &lt;Box style={{ flexDirection: 'row', alignItems: 'center', gap: 9 }}&gt;&#10;        &lt;Box style={{ padding: '4px 12px', background: '#D9534F', borderRadius: 6 }}&gt;&#10;          &lt;Text style={{ fontSize: 13, color: '#FFFFFF', fontWeight: 'bold' }}&gt;BEFORE&lt;/Text&gt;&#10;        &lt;/Box&gt;&#10;        &lt;Text style={{ fontSize: 16, color: '#4A5568' }}&gt;One class, six unrelated reasons to change.&lt;/Text&gt;&#10;      &lt;/Box&gt;&#10;      &lt;CodeBlock theme='one-dark-pro' code={`Class Order&#10;    + placeOrder()&#10;    + chargeCustomer()&#10;    + notifyRider()&#10;    + printReceipt()&#10;    + updateInventory()&#10;    + sendSms()&#10;    + applyDiscount()`} language='text' width={540} fontSize={12} /&gt;&#10;      &lt;Box style={{ padding: '12px 16px', background: '#FDF3F3', borderRadius: 9, borderLeft: '4px solid #D9534F' }}&gt;&#10;        &lt;Text style={{ fontSize: 15, color: '#4A5568', lineHeight: 1.5 }}&gt;Your task: &lt;Text style={{ fontWeight: 'bold', color: '#D9534F' }}&gt;list the distinct responsibilities&lt;/Text&gt; — not the methods.&lt;/Text&gt;&#10;      &lt;/Box&gt;&#10;    &lt;/Box&gt;&#10;    &lt;Box style={{ flex: 2, flexDirection: 'column', gap: 12, justifyContent: 'center' }}&gt;&#10;      &lt;Box style={{ padding: '20px 22px', background: '#0E3F8C', borderRadius: 12, flexDirection: 'column', gap: 12 }}&gt;&#10;        &lt;Text style={{ fontSize: 15, color: '#7FA2D6', letterSpacing: 1 }}&gt;A HINT YOU WILL NEED LATER&lt;/Text&gt;&#10;        &lt;Text style={{ fontSize: 20, fontWeight: 'bold', color: '#FFFFFF', lineHeight: 1.35 }}&gt;A responsibility is a reason to change.&lt;/Text&gt;&#10;        &lt;Text style={{ fontSize: 15, color: '#C5D4EA', lineHeight: 1.5 }}&gt;Two methods that change for the same reason belong together. Two that change for different reasons do not.&lt;/Text&gt;&#10;      &lt;/Box&gt;&#10;      &lt;Box style={{ padding: '14px 17px', background: '#F7F9FC', borderRadius: 10, border: '1px dashed #D9534F' }}&gt;&#10;        &lt;Text style={{ fontSize: 15, color: '#4A5568', lineHeight: 1.5 }}&gt;&lt;Text style={{ fontWeight: 'bold', color: '#D9534F' }}&gt;Remember this class.&lt;/Text&gt; We meet it again in Week 11, when GRASP tells us how to fix it properly.&lt;/Text&gt;&#10;      &lt;/Box&gt;&#10;    &lt;/Box&gt;&#10;  &lt;/Box&gt;&#10;  &lt;Box style={{ height: 44, background: '#0E3F8C', padding: '0 40px', flexDirection: 'row', alignItems: 'center', justifyContent: 'center' }}&gt;&#10;    &lt;Text style={{ fontSize: 17, color: '#FFFFFF', fontWeight: '600' }}&gt;90 minutes. Work in pairs first, then report back as a group.&lt;/Text&gt;&#10;  &lt;/Box&gt;&#10;&lt;/Slide&gt;"/>
+        <p:cNvPr id="484" name=""/>
         <p:cNvGrpSpPr/>
         <p:nvPr/>
       </p:nvGrpSpPr>
@@ -17149,7 +17650,10 @@
         </p:spPr>
         <p:txBody>
           <a:bodyPr/>
-          <a:p/>
+          <a:p>
+            <a:pPr/>
+            <a:endParaRPr/>
+          </a:p>
         </p:txBody>
       </p:sp>
       <p:sp>
@@ -17245,7 +17749,10 @@
         </p:spPr>
         <p:txBody>
           <a:bodyPr/>
-          <a:p/>
+          <a:p>
+            <a:pPr/>
+            <a:endParaRPr/>
+          </a:p>
         </p:txBody>
       </p:sp>
       <p:sp>
@@ -17341,7 +17848,10 @@
         </p:spPr>
         <p:txBody>
           <a:bodyPr/>
-          <a:p/>
+          <a:p>
+            <a:pPr/>
+            <a:endParaRPr/>
+          </a:p>
         </p:txBody>
       </p:sp>
       <p:sp>
@@ -17398,7 +17908,10 @@
         </p:spPr>
         <p:txBody>
           <a:bodyPr/>
-          <a:p/>
+          <a:p>
+            <a:pPr/>
+            <a:endParaRPr/>
+          </a:p>
         </p:txBody>
       </p:sp>
       <p:sp>
@@ -17479,7 +17992,10 @@
         </p:spPr>
         <p:txBody>
           <a:bodyPr/>
-          <a:p/>
+          <a:p>
+            <a:pPr/>
+            <a:endParaRPr/>
+          </a:p>
         </p:txBody>
       </p:sp>
       <p:sp>
@@ -17617,7 +18133,10 @@
         </p:spPr>
         <p:txBody>
           <a:bodyPr/>
-          <a:p/>
+          <a:p>
+            <a:pPr/>
+            <a:endParaRPr/>
+          </a:p>
         </p:txBody>
       </p:sp>
       <p:sp>
@@ -17688,7 +18207,10 @@
         </p:spPr>
         <p:txBody>
           <a:bodyPr/>
-          <a:p/>
+          <a:p>
+            <a:pPr/>
+            <a:endParaRPr/>
+          </a:p>
         </p:txBody>
       </p:sp>
       <p:sp>
@@ -17749,7 +18271,10 @@
         </p:spPr>
         <p:txBody>
           <a:bodyPr/>
-          <a:p/>
+          <a:p>
+            <a:pPr/>
+            <a:endParaRPr/>
+          </a:p>
         </p:txBody>
       </p:sp>
       <p:sp>
@@ -17802,7 +18327,7 @@
   <p:cSld>
     <p:spTree>
       <p:nvGrpSpPr>
-        <p:cNvPr id="504" name="" descr="&lt;Slide style={{ background: '#FFFFFF', padding: 0 }}&gt;&#10;  &lt;Box style={{ height: 72, background: '#1E4FA8', padding: '0 40px', flexDirection: 'row', alignItems: 'center', justifyContent: 'space-between' }}&gt;&#10;    &lt;Text style={{ fontSize: 15, color: '#B9CDF0', letterSpacing: 1 }}&gt;ISAD · INFORMATION SYSTEMS ANALYSIS &amp;amp; DESIGN&lt;/Text&gt;&#10;    &lt;Text style={{ fontSize: 15, color: '#B9CDF0' }}&gt;W02 · LAB 2.1&lt;/Text&gt;&#10;  &lt;/Box&gt;&#10;  &lt;Box style={{ padding: '22px 40px 0 40px' }}&gt;&#10;    &lt;Text style={{ fontSize: 32, fontWeight: 'bold', color: '#0E3F8C' }}&gt;Listing Its Responsibilities&lt;/Text&gt;&#10;  &lt;/Box&gt;&#10;  &lt;Box style={{ flex: 1, padding: '22px 40px 0 40px', flexDirection: 'row', gap: 22, alignItems: 'stretch' }}&gt;&#10;    {[&#10;      { icon: 'calculator', n: '01', name: 'Know the money', methods: 'total() · applyDiscount()', why: 'changes when pricing rules change', color: '#1E4FA8' },&#10;      { icon: 'credit-card', n: '02', name: 'Take the payment', methods: 'chargeCustomer()', why: 'changes when a payment type appears', color: '#0E3F8C' },&#10;      { icon: 'bell', n: '03', name: 'Tell people things', methods: 'notifyRider() · sendSms() · printReceipt()', why: 'changes when a channel is added', color: '#3D7BD9' },&#10;    ].map((c) =&gt; (&#10;      &lt;Box key={c.n} style={{ flex: 1, padding: '22px 20px', background: '#F7F9FC', borderRadius: 12, border: '1px solid #E5E7EB', flexDirection: 'column', gap: 12 }}&gt;&#10;        &lt;Box style={{ flexDirection: 'row', alignItems: 'center', gap: 11 }}&gt;&#10;          &lt;Box style={{ width: 46, height: 46, borderRadius: 10, background: c.color, justifyContent: 'center', alignItems: 'center' }}&gt;&#10;            &lt;FAIcon name={c.icon} style={{ fill: '#FFFFFF', width: 22, height: 22 }} /&gt;&#10;          &lt;/Box&gt;&#10;          &lt;Text style={{ fontSize: 26, fontWeight: 'bold', color: '#E8EFF8', fontFamily: 'Georgia, serif' }}&gt;{c.n}&lt;/Text&gt;&#10;        &lt;/Box&gt;&#10;        &lt;Text style={{ fontSize: 20, fontWeight: 'bold', color: '#0E3F8C', lineHeight: 1.3 }}&gt;{c.name}&lt;/Text&gt;&#10;        &lt;Box style={{ padding: '11px 13px', background: '#FFFFFF', borderRadius: 8, border: '1px solid #E5E7EB' }}&gt;&#10;          &lt;Text style={{ fontSize: 14, color: '#1A2230', lineHeight: 1.45 }}&gt;{c.methods}&lt;/Text&gt;&#10;        &lt;/Box&gt;&#10;        &lt;Box style={{ padding: '11px 13px', background: '#E8EFF8', borderRadius: 8 }}&gt;&#10;          &lt;Text style={{ fontSize: 13, color: '#3D7BD9', fontWeight: 'bold', letterSpacing: 1, marginBottom: 4 }}&gt;REASON TO CHANGE&lt;/Text&gt;&#10;          &lt;Text style={{ fontSize: 14, color: '#4A5568', lineHeight: 1.45 }}&gt;{c.why}&lt;/Text&gt;&#10;        &lt;/Box&gt;&#10;      &lt;/Box&gt;&#10;    ))}&#10;  &lt;/Box&gt;&#10;  &lt;Box style={{ height: 50, padding: '0 40px', flexDirection: 'row', alignItems: 'center', gap: 14 }}&gt;&#10;    &lt;FAIcon name='lightbulb' style={{ fill: '#FFC107', width: 21, height: 21 }} /&gt;&#10;    &lt;Text style={{ fontSize: 17, color: '#4A5568' }}&gt;Three responsibilities, three separate reasons. One class holding all three is doing three jobs.&lt;/Text&gt;&#10;    &lt;Text style={{ fontSize: 14, color: '#1E4FA8', fontWeight: 'bold', marginLeft: 'auto' }}&gt;31 / 38&lt;/Text&gt;&#10;  &lt;/Box&gt;&#10;&lt;/Slide&gt;"/>
+        <p:cNvPr id="504" name=""/>
         <p:cNvGrpSpPr/>
         <p:nvPr/>
       </p:nvGrpSpPr>
@@ -17835,7 +18360,10 @@
         </p:spPr>
         <p:txBody>
           <a:bodyPr/>
-          <a:p/>
+          <a:p>
+            <a:pPr/>
+            <a:endParaRPr/>
+          </a:p>
         </p:txBody>
       </p:sp>
       <p:sp>
@@ -17859,7 +18387,10 @@
         </p:spPr>
         <p:txBody>
           <a:bodyPr/>
-          <a:p/>
+          <a:p>
+            <a:pPr/>
+            <a:endParaRPr/>
+          </a:p>
         </p:txBody>
       </p:sp>
       <p:sp>
@@ -17995,7 +18526,10 @@
         </p:spPr>
         <p:txBody>
           <a:bodyPr/>
-          <a:p/>
+          <a:p>
+            <a:pPr/>
+            <a:endParaRPr/>
+          </a:p>
         </p:txBody>
       </p:sp>
       <p:sp>
@@ -18021,7 +18555,10 @@
         </p:spPr>
         <p:txBody>
           <a:bodyPr/>
-          <a:p/>
+          <a:p>
+            <a:pPr/>
+            <a:endParaRPr/>
+          </a:p>
         </p:txBody>
       </p:sp>
       <p:pic>
@@ -18153,7 +18690,10 @@
         </p:spPr>
         <p:txBody>
           <a:bodyPr/>
-          <a:p/>
+          <a:p>
+            <a:pPr/>
+            <a:endParaRPr/>
+          </a:p>
         </p:txBody>
       </p:sp>
       <p:sp>
@@ -18214,7 +18754,10 @@
         </p:spPr>
         <p:txBody>
           <a:bodyPr/>
-          <a:p/>
+          <a:p>
+            <a:pPr/>
+            <a:endParaRPr/>
+          </a:p>
         </p:txBody>
       </p:sp>
       <p:sp>
@@ -18315,7 +18858,10 @@
         </p:spPr>
         <p:txBody>
           <a:bodyPr/>
-          <a:p/>
+          <a:p>
+            <a:pPr/>
+            <a:endParaRPr/>
+          </a:p>
         </p:txBody>
       </p:sp>
       <p:sp>
@@ -18341,7 +18887,10 @@
         </p:spPr>
         <p:txBody>
           <a:bodyPr/>
-          <a:p/>
+          <a:p>
+            <a:pPr/>
+            <a:endParaRPr/>
+          </a:p>
         </p:txBody>
       </p:sp>
       <p:pic>
@@ -18473,7 +19022,10 @@
         </p:spPr>
         <p:txBody>
           <a:bodyPr/>
-          <a:p/>
+          <a:p>
+            <a:pPr/>
+            <a:endParaRPr/>
+          </a:p>
         </p:txBody>
       </p:sp>
       <p:sp>
@@ -18534,7 +19086,10 @@
         </p:spPr>
         <p:txBody>
           <a:bodyPr/>
-          <a:p/>
+          <a:p>
+            <a:pPr/>
+            <a:endParaRPr/>
+          </a:p>
         </p:txBody>
       </p:sp>
       <p:sp>
@@ -18635,7 +19190,10 @@
         </p:spPr>
         <p:txBody>
           <a:bodyPr/>
-          <a:p/>
+          <a:p>
+            <a:pPr/>
+            <a:endParaRPr/>
+          </a:p>
         </p:txBody>
       </p:sp>
       <p:sp>
@@ -18661,7 +19219,10 @@
         </p:spPr>
         <p:txBody>
           <a:bodyPr/>
-          <a:p/>
+          <a:p>
+            <a:pPr/>
+            <a:endParaRPr/>
+          </a:p>
         </p:txBody>
       </p:sp>
       <p:pic>
@@ -18793,7 +19354,10 @@
         </p:spPr>
         <p:txBody>
           <a:bodyPr/>
-          <a:p/>
+          <a:p>
+            <a:pPr/>
+            <a:endParaRPr/>
+          </a:p>
         </p:txBody>
       </p:sp>
       <p:sp>
@@ -18854,7 +19418,10 @@
         </p:spPr>
         <p:txBody>
           <a:bodyPr/>
-          <a:p/>
+          <a:p>
+            <a:pPr/>
+            <a:endParaRPr/>
+          </a:p>
         </p:txBody>
       </p:sp>
       <p:sp>
@@ -19038,7 +19605,7 @@
   <p:cSld>
     <p:spTree>
       <p:nvGrpSpPr>
-        <p:cNvPr id="543" name="" descr="&lt;Slide style={{ background: '#FFFFFF', padding: 0 }}&gt;&#10;  &lt;Box style={{ padding: '26px 40px 8px 40px', flexDirection: 'row', alignItems: 'center', justifyContent: 'space-between' }}&gt;&#10;    &lt;Text style={{ fontSize: 33, fontWeight: 'bold', color: '#0E3F8C' }}&gt;OO Analysis Is About Responsibilities&lt;/Text&gt;&#10;    &lt;Text style={{ fontSize: 14, color: '#1E4FA8', fontWeight: 'bold' }}&gt;32 / 38&lt;/Text&gt;&#10;  &lt;/Box&gt;&#10;  &lt;Box style={{ flex: 1, padding: '6px 40px 0 40px', justifyContent: 'center', alignItems: 'center' }}&gt;&#10;    &lt;svg width={1180} height={420} viewBox='0 0 1180 420'&gt;&#10;      &lt;rect x='50' y='40' width='400' height='300' rx='14' fill='#FDF3F3' stroke='#D9534F' strokeWidth='2' /&gt;&#10;      &lt;text x='250' y='74' textAnchor='middle' fill='#D9534F' fontSize='19' fontWeight='bold'&gt;Order — 7 methods, 3 jobs&lt;/text&gt;&#10;      &lt;text x='250' y='98' textAnchor='middle' fill='#8B97A8' fontSize='14'&gt;one class, three reasons to change&lt;/text&gt;&#10;      &lt;text x='80' y='134' fill='#4A5568' fontSize='15'&gt;placeOrder()      — coordinating&lt;/text&gt;&#10;      &lt;text x='80' y='164' fill='#4A5568' fontSize='15'&gt;total()           — money&lt;/text&gt;&#10;      &lt;text x='80' y='194' fill='#4A5568' fontSize='15'&gt;applyDiscount()   — money&lt;/text&gt;&#10;      &lt;text x='80' y='224' fill='#4A5568' fontSize='15'&gt;chargeCustomer()  — payment&lt;/text&gt;&#10;      &lt;text x='80' y='254' fill='#4A5568' fontSize='15'&gt;notifyRider()     — telling people&lt;/text&gt;&#10;      &lt;text x='80' y='284' fill='#4A5568' fontSize='15'&gt;sendSms()         — telling people&lt;/text&gt;&#10;      &lt;text x='80' y='314' fill='#4A5568' fontSize='15'&gt;printReceipt()    — telling people&lt;/text&gt;&#10;      &lt;line x1='460' y1='190' x2='556' y2='190' stroke='#3D7BD9' strokeWidth='3' markerEnd='url(#arrow32)' /&gt;&#10;      &lt;text x='508' y='176' textAnchor='middle' fill='#3D7BD9' fontSize='14' fontWeight='bold'&gt;assign&lt;/text&gt;&#10;      &lt;text x='508' y='216' textAnchor='middle' fill='#3D7BD9' fontSize='14' fontWeight='bold'&gt;responsibilities&lt;/text&gt;&#10;      &lt;defs&gt;&#10;        &lt;marker id='arrow32' markerWidth='10' markerHeight='10' refX='9' refY='5' orient='auto'&gt;&#10;          &lt;path d='M0,0 L10,5 L0,10 z' fill='#3D7BD9' /&gt;&#10;        &lt;/marker&gt;&#10;      &lt;/defs&gt;&#10;      &lt;rect x='566' y='40' width='560' height='88' rx='12' fill='#E8EFF8' stroke='#3D7BD9' strokeWidth='2' /&gt;&#10;      &lt;text x='594' y='74' fill='#0E3F8C' fontSize='18' fontWeight='bold'&gt;Order&lt;/text&gt;&#10;      &lt;text x='594' y='100' fill='#4A5568' fontSize='14'&gt;knows the items and the money&lt;/text&gt;&#10;      &lt;text x='1078' y='92' textAnchor='end' fill='#3D7BD9' fontSize='13' fontWeight='bold'&gt;1 reason: pricing&lt;/text&gt;&#10;      &lt;rect x='566' y='146' width='560' height='88' rx='12' fill='#F0F5FC' stroke='#1E4FA8' strokeWidth='2' /&gt;&#10;      &lt;text x='594' y='180' fill='#0E3F8C' fontSize='18' fontWeight='bold'&gt;PaymentService&lt;/text&gt;&#10;      &lt;text x='594' y='206' fill='#4A5568' fontSize='14'&gt;takes the payment via an interface&lt;/text&gt;&#10;      &lt;text x='1078' y='198' textAnchor='end' fill='#1E4FA8' fontSize='13' fontWeight='bold'&gt;1 reason: payment types&lt;/text&gt;&#10;      &lt;rect x='566' y='252' width='560' height='88' rx='12' fill='#F7F9FC' stroke='#3D7BD9' strokeWidth='2' /&gt;&#10;      &lt;text x='594' y='286' fill='#0E3F8C' fontSize='18' fontWeight='bold'&gt;NotificationService&lt;/text&gt;&#10;      &lt;text x='594' y='312' fill='#4A5568' fontSize='14'&gt;tells the rider, the shop, the student&lt;/text&gt;&#10;      &lt;text x='1078' y='304' textAnchor='end' fill='#3D7BD9' fontSize='13' fontWeight='bold'&gt;1 reason: channels&lt;/text&gt;&#10;      &lt;text x='846' y='380' textAnchor='middle' fill='#8B97A8' fontSize='14'&gt;Each object keeps the data its own job needs. That is cohesion.&lt;/text&gt;&#10;    &lt;/svg&gt;&#10;  &lt;/Box&gt;&#10;  &lt;Box style={{ height: 52, background: '#0E3F8C', padding: '0 40px', flexDirection: 'row', alignItems: 'center', justifyContent: 'center' }}&gt;&#10;    &lt;Text style={{ fontSize: 18, color: '#FFFFFF', fontWeight: '600' }}&gt;Syntax was the warm-up. Deciding who is responsible — that is analysis.&lt;/Text&gt;&#10;  &lt;/Box&gt;&#10;&lt;/Slide&gt;"/>
+        <p:cNvPr id="543" name=""/>
         <p:cNvGrpSpPr/>
         <p:nvPr/>
       </p:nvGrpSpPr>
@@ -19071,7 +19638,10 @@
         </p:spPr>
         <p:txBody>
           <a:bodyPr/>
-          <a:p/>
+          <a:p>
+            <a:pPr/>
+            <a:endParaRPr/>
+          </a:p>
         </p:txBody>
       </p:sp>
       <p:sp>
@@ -19196,7 +19766,10 @@
         </p:spPr>
         <p:txBody>
           <a:bodyPr/>
-          <a:p/>
+          <a:p>
+            <a:pPr/>
+            <a:endParaRPr/>
+          </a:p>
         </p:txBody>
       </p:sp>
       <p:sp>
@@ -19244,7 +19817,7 @@
   <p:cSld>
     <p:spTree>
       <p:nvGrpSpPr>
-        <p:cNvPr id="550" name="" descr="&lt;Slide style={{ background: '#FFFFFF', padding: 0 }}&gt;&#10;  &lt;Box style={{ height: 72, background: '#1E4FA8', padding: '0 40px', flexDirection: 'row', alignItems: 'center', justifyContent: 'space-between' }}&gt;&#10;    &lt;Text style={{ fontSize: 15, color: '#B9CDF0', letterSpacing: 1 }}&gt;ISAD · INFORMATION SYSTEMS ANALYSIS &amp;amp; DESIGN&lt;/Text&gt;&#10;    &lt;Text style={{ fontSize: 15, color: '#B9CDF0' }}&gt;W02 · MILESTONE M0&lt;/Text&gt;&#10;  &lt;/Box&gt;&#10;  &lt;Box style={{ padding: '20px 40px 0 40px', flexDirection: 'row', alignItems: 'center', justifyContent: 'space-between' }}&gt;&#10;    &lt;Text style={{ fontSize: 32, fontWeight: 'bold', color: '#0E3F8C' }}&gt;Project M0 — What Is Due&lt;/Text&gt;&#10;    &lt;Box style={{ padding: '6px 16px', background: '#D9534F', borderRadius: 6 }}&gt;&#10;      &lt;Text style={{ fontSize: 15, color: '#FFFFFF', fontWeight: 'bold' }}&gt;DUE FRI SEP 11&lt;/Text&gt;&#10;    &lt;/Box&gt;&#10;  &lt;/Box&gt;&#10;  &lt;Box style={{ flex: 1, padding: '18px 40px 0 40px', flexDirection: 'column', gap: 11, justifyContent: 'center' }}&gt;&#10;    {[&#10;      ['file-signature', 'Team charter', 'Team name, member roles, communication rules, role rotation plan.', 'Guidebook Appendix A'],&#10;      ['users', 'Stakeholder list', 'Everyone with an interest in CampusBites — name them and say why.', '5–8 is a good range'],&#10;      ['eye', 'One-paragraph vision', 'What it does, for whom, and why it beats the current way.', '150 words or fewer'],&#10;      ['code-branch', 'Repository registered', 'Create the team repo, invite klausren, push one README.', 'Deadline Schedule §4'],&#10;    ].map(([icon, t, d, tag]) =&gt; (&#10;      &lt;Box key={t} style={{ flexDirection: 'row', gap: 16, alignItems: 'center', padding: '15px 20px', background: '#F7F9FC', borderRadius: 10, border: '1px solid #E5E7EB' }}&gt;&#10;        &lt;Box style={{ width: 44, height: 44, borderRadius: 10, background: '#E8EFF8', justifyContent: 'center', alignItems: 'center' }}&gt;&#10;          &lt;FAIcon name={icon} style={{ fill: '#1E4FA8', width: 22, height: 22 }} /&gt;&#10;        &lt;/Box&gt;&#10;        &lt;Box style={{ flex: 1, flexDirection: 'column', gap: 3 }}&gt;&#10;          &lt;Text style={{ fontSize: 18, fontWeight: 'bold', color: '#1A2230' }}&gt;{t}&lt;/Text&gt;&#10;          &lt;Text style={{ fontSize: 14, color: '#4A5568', lineHeight: 1.45 }}&gt;{d}&lt;/Text&gt;&#10;        &lt;/Box&gt;&#10;        &lt;Box style={{ padding: '6px 13px', background: '#F0F5FC', borderRadius: 14 }}&gt;&#10;          &lt;Text style={{ fontSize: 13, color: '#1E4FA8', fontWeight: 'bold' }}&gt;{tag}&lt;/Text&gt;&#10;        &lt;/Box&gt;&#10;      &lt;/Box&gt;&#10;    ))}&#10;  &lt;/Box&gt;&#10;  &lt;Box style={{ height: 46, background: '#0E3F8C', padding: '0 40px', flexDirection: 'row', alignItems: 'center', justifyContent: 'center', gap: 12 }}&gt;&#10;    &lt;FAIcon name='info-circle' style={{ fill: '#FFC107', width: 20, height: 20 }} /&gt;&#10;    &lt;Text style={{ fontSize: 17, color: '#FFFFFF', fontWeight: '600' }}&gt;M0 is pass / fail — but a failed M0 blocks nothing yet. It is your rehearsal.&lt;/Text&gt;&#10;  &lt;/Box&gt;&#10;&lt;/Slide&gt;"/>
+        <p:cNvPr id="550" name=""/>
         <p:cNvGrpSpPr/>
         <p:nvPr/>
       </p:nvGrpSpPr>
@@ -19277,7 +19850,10 @@
         </p:spPr>
         <p:txBody>
           <a:bodyPr/>
-          <a:p/>
+          <a:p>
+            <a:pPr/>
+            <a:endParaRPr/>
+          </a:p>
         </p:txBody>
       </p:sp>
       <p:sp>
@@ -19301,7 +19877,10 @@
         </p:spPr>
         <p:txBody>
           <a:bodyPr/>
-          <a:p/>
+          <a:p>
+            <a:pPr/>
+            <a:endParaRPr/>
+          </a:p>
         </p:txBody>
       </p:sp>
       <p:sp>
@@ -19432,7 +20011,10 @@
         </p:spPr>
         <p:txBody>
           <a:bodyPr/>
-          <a:p/>
+          <a:p>
+            <a:pPr/>
+            <a:endParaRPr/>
+          </a:p>
         </p:txBody>
       </p:sp>
       <p:sp>
@@ -19498,7 +20080,10 @@
         </p:spPr>
         <p:txBody>
           <a:bodyPr/>
-          <a:p/>
+          <a:p>
+            <a:pPr/>
+            <a:endParaRPr/>
+          </a:p>
         </p:txBody>
       </p:sp>
       <p:sp>
@@ -19524,7 +20109,10 @@
         </p:spPr>
         <p:txBody>
           <a:bodyPr/>
-          <a:p/>
+          <a:p>
+            <a:pPr/>
+            <a:endParaRPr/>
+          </a:p>
         </p:txBody>
       </p:sp>
       <p:pic>
@@ -19651,7 +20239,10 @@
         </p:spPr>
         <p:txBody>
           <a:bodyPr/>
-          <a:p/>
+          <a:p>
+            <a:pPr/>
+            <a:endParaRPr/>
+          </a:p>
         </p:txBody>
       </p:sp>
       <p:sp>
@@ -19717,7 +20308,10 @@
         </p:spPr>
         <p:txBody>
           <a:bodyPr/>
-          <a:p/>
+          <a:p>
+            <a:pPr/>
+            <a:endParaRPr/>
+          </a:p>
         </p:txBody>
       </p:sp>
       <p:sp>
@@ -19743,7 +20337,10 @@
         </p:spPr>
         <p:txBody>
           <a:bodyPr/>
-          <a:p/>
+          <a:p>
+            <a:pPr/>
+            <a:endParaRPr/>
+          </a:p>
         </p:txBody>
       </p:sp>
       <p:pic>
@@ -19870,7 +20467,10 @@
         </p:spPr>
         <p:txBody>
           <a:bodyPr/>
-          <a:p/>
+          <a:p>
+            <a:pPr/>
+            <a:endParaRPr/>
+          </a:p>
         </p:txBody>
       </p:sp>
       <p:sp>
@@ -19936,7 +20536,10 @@
         </p:spPr>
         <p:txBody>
           <a:bodyPr/>
-          <a:p/>
+          <a:p>
+            <a:pPr/>
+            <a:endParaRPr/>
+          </a:p>
         </p:txBody>
       </p:sp>
       <p:sp>
@@ -19962,7 +20565,10 @@
         </p:spPr>
         <p:txBody>
           <a:bodyPr/>
-          <a:p/>
+          <a:p>
+            <a:pPr/>
+            <a:endParaRPr/>
+          </a:p>
         </p:txBody>
       </p:sp>
       <p:pic>
@@ -20089,7 +20695,10 @@
         </p:spPr>
         <p:txBody>
           <a:bodyPr/>
-          <a:p/>
+          <a:p>
+            <a:pPr/>
+            <a:endParaRPr/>
+          </a:p>
         </p:txBody>
       </p:sp>
       <p:sp>
@@ -20155,7 +20764,10 @@
         </p:spPr>
         <p:txBody>
           <a:bodyPr/>
-          <a:p/>
+          <a:p>
+            <a:pPr/>
+            <a:endParaRPr/>
+          </a:p>
         </p:txBody>
       </p:sp>
       <p:sp>
@@ -20181,7 +20793,10 @@
         </p:spPr>
         <p:txBody>
           <a:bodyPr/>
-          <a:p/>
+          <a:p>
+            <a:pPr/>
+            <a:endParaRPr/>
+          </a:p>
         </p:txBody>
       </p:sp>
       <p:pic>
@@ -20308,7 +20923,10 @@
         </p:spPr>
         <p:txBody>
           <a:bodyPr/>
-          <a:p/>
+          <a:p>
+            <a:pPr/>
+            <a:endParaRPr/>
+          </a:p>
         </p:txBody>
       </p:sp>
       <p:sp>
@@ -20367,7 +20985,10 @@
         </p:spPr>
         <p:txBody>
           <a:bodyPr/>
-          <a:p/>
+          <a:p>
+            <a:pPr/>
+            <a:endParaRPr/>
+          </a:p>
         </p:txBody>
       </p:sp>
       <p:pic>
@@ -20446,7 +21067,7 @@
   <p:cSld>
     <p:spTree>
       <p:nvGrpSpPr>
-        <p:cNvPr id="589" name="" descr="&lt;Slide style={{ background: '#FFFFFF', padding: 0 }}&gt;&#10;  &lt;Box style={{ height: 72, background: '#1E4FA8', padding: '0 40px', flexDirection: 'row', alignItems: 'center', justifyContent: 'space-between' }}&gt;&#10;    &lt;Text style={{ fontSize: 15, color: '#B9CDF0', letterSpacing: 1 }}&gt;ISAD · INFORMATION SYSTEMS ANALYSIS &amp;amp; DESIGN&lt;/Text&gt;&#10;    &lt;Text style={{ fontSize: 15, color: '#B9CDF0' }}&gt;W02 · M0 · CHARTER&lt;/Text&gt;&#10;  &lt;/Box&gt;&#10;  &lt;Box style={{ padding: '20px 40px 0 40px' }}&gt;&#10;    &lt;Text style={{ fontSize: 32, fontWeight: 'bold', color: '#0E3F8C' }}&gt;Team Charter Essentials&lt;/Text&gt;&#10;  &lt;/Box&gt;&#10;  &lt;Box style={{ flex: 1, padding: '18px 40px 0 40px', flexDirection: 'row', gap: 26 }}&gt;&#10;    &lt;Box style={{ flex: 3, flexDirection: 'column', gap: 10, justifyContent: 'center' }}&gt;&#10;      {[&#10;        ['tag', 'Team name', 'One line. You will be called this all semester.'],&#10;        ['user-tag', 'Roles', 'Team Lead, Recorder, Reviewer — write down who starts in which.'],&#10;        ['comments', 'Communication rules', 'Where you talk, how fast you reply, what counts as an emergency.'],&#10;        ['sync', 'Role rotation', 'Rotate every milestone so nobody owns one job all term.'],&#10;        ['gavel', 'Conflict rule', 'What you do when two members disagree — decide now, not at 23:59.'],&#10;      ].map(([icon, t, d]) =&gt; (&#10;        &lt;Box key={t} style={{ flexDirection: 'row', gap: 13, alignItems: 'center', padding: '13px 17px', background: '#F7F9FC', borderRadius: 10, border: '1px solid #E5E7EB' }}&gt;&#10;          &lt;Box style={{ width: 40, height: 40, borderRadius: 9, background: '#E8EFF8', justifyContent: 'center', alignItems: 'center' }}&gt;&#10;            &lt;FAIcon name={icon} style={{ fill: '#1E4FA8', width: 20, height: 20 }} /&gt;&#10;          &lt;/Box&gt;&#10;          &lt;Box style={{ flex: 1, flexDirection: 'column', gap: 2 }}&gt;&#10;            &lt;Text style={{ fontSize: 16, fontWeight: 'bold', color: '#1A2230' }}&gt;{t}&lt;/Text&gt;&#10;            &lt;Text style={{ fontSize: 13, color: '#4A5568', lineHeight: 1.4 }}&gt;{d}&lt;/Text&gt;&#10;          &lt;/Box&gt;&#10;        &lt;/Box&gt;&#10;      ))}&#10;    &lt;/Box&gt;&#10;    &lt;Box style={{ flex: 2, padding: '26px 24px', background: '#0E3F8C', borderRadius: 12, flexDirection: 'column', justifyContent: 'center', gap: 14 }}&gt;&#10;      &lt;FAIcon name='handshake' style={{ fill: '#FFC107', width: 32, height: 32 }} /&gt;&#10;      &lt;Text style={{ fontSize: 21, fontWeight: 'bold', color: '#FFFFFF', lineHeight: 1.35 }}&gt;The charter is a contract between the four of you.&lt;/Text&gt;&#10;      &lt;Text style={{ fontSize: 15, color: '#C5D4EA', lineHeight: 1.55 }}&gt;Not with me. When a milestone slips, this document is what you point at.&lt;/Text&gt;&#10;      &lt;Box style={{ padding: '13px 16px', background: '#1E4FA8', borderRadius: 8 }}&gt;&#10;        &lt;Text style={{ fontSize: 14, color: '#B9CDF0', lineHeight: 1.45 }}&gt;Template: &lt;Text style={{ fontWeight: 'bold', color: '#FFFFFF' }}&gt;Project Guidebook, Appendix A&lt;/Text&gt;&lt;/Text&gt;&#10;      &lt;/Box&gt;&#10;    &lt;/Box&gt;&#10;  &lt;/Box&gt;&#10;  &lt;Box style={{ height: 40, padding: '0 40px', flexDirection: 'row', alignItems: 'center', justifyContent: 'space-between' }}&gt;&#10;    &lt;Text style={{ fontSize: 13, color: '#8B97A8' }}&gt;ISAD · Fall 2026&lt;/Text&gt;&#10;    &lt;Text style={{ fontSize: 14, color: '#1E4FA8', fontWeight: 'bold' }}&gt;34 / 38&lt;/Text&gt;&#10;  &lt;/Box&gt;&#10;&lt;/Slide&gt;"/>
+        <p:cNvPr id="589" name=""/>
         <p:cNvGrpSpPr/>
         <p:nvPr/>
       </p:nvGrpSpPr>
@@ -20479,7 +21100,10 @@
         </p:spPr>
         <p:txBody>
           <a:bodyPr/>
-          <a:p/>
+          <a:p>
+            <a:pPr/>
+            <a:endParaRPr/>
+          </a:p>
         </p:txBody>
       </p:sp>
       <p:sp>
@@ -20503,7 +21127,10 @@
         </p:spPr>
         <p:txBody>
           <a:bodyPr/>
-          <a:p/>
+          <a:p>
+            <a:pPr/>
+            <a:endParaRPr/>
+          </a:p>
         </p:txBody>
       </p:sp>
       <p:sp>
@@ -20639,7 +21266,10 @@
         </p:spPr>
         <p:txBody>
           <a:bodyPr/>
-          <a:p/>
+          <a:p>
+            <a:pPr/>
+            <a:endParaRPr/>
+          </a:p>
         </p:txBody>
       </p:sp>
       <p:sp>
@@ -20665,7 +21295,10 @@
         </p:spPr>
         <p:txBody>
           <a:bodyPr/>
-          <a:p/>
+          <a:p>
+            <a:pPr/>
+            <a:endParaRPr/>
+          </a:p>
         </p:txBody>
       </p:sp>
       <p:pic>
@@ -20797,7 +21430,10 @@
         </p:spPr>
         <p:txBody>
           <a:bodyPr/>
-          <a:p/>
+          <a:p>
+            <a:pPr/>
+            <a:endParaRPr/>
+          </a:p>
         </p:txBody>
       </p:sp>
       <p:sp>
@@ -20823,7 +21459,10 @@
         </p:spPr>
         <p:txBody>
           <a:bodyPr/>
-          <a:p/>
+          <a:p>
+            <a:pPr/>
+            <a:endParaRPr/>
+          </a:p>
         </p:txBody>
       </p:sp>
       <p:pic>
@@ -20955,7 +21594,10 @@
         </p:spPr>
         <p:txBody>
           <a:bodyPr/>
-          <a:p/>
+          <a:p>
+            <a:pPr/>
+            <a:endParaRPr/>
+          </a:p>
         </p:txBody>
       </p:sp>
       <p:sp>
@@ -20981,7 +21623,10 @@
         </p:spPr>
         <p:txBody>
           <a:bodyPr/>
-          <a:p/>
+          <a:p>
+            <a:pPr/>
+            <a:endParaRPr/>
+          </a:p>
         </p:txBody>
       </p:sp>
       <p:pic>
@@ -21113,7 +21758,10 @@
         </p:spPr>
         <p:txBody>
           <a:bodyPr/>
-          <a:p/>
+          <a:p>
+            <a:pPr/>
+            <a:endParaRPr/>
+          </a:p>
         </p:txBody>
       </p:sp>
       <p:sp>
@@ -21139,7 +21787,10 @@
         </p:spPr>
         <p:txBody>
           <a:bodyPr/>
-          <a:p/>
+          <a:p>
+            <a:pPr/>
+            <a:endParaRPr/>
+          </a:p>
         </p:txBody>
       </p:sp>
       <p:pic>
@@ -21271,7 +21922,10 @@
         </p:spPr>
         <p:txBody>
           <a:bodyPr/>
-          <a:p/>
+          <a:p>
+            <a:pPr/>
+            <a:endParaRPr/>
+          </a:p>
         </p:txBody>
       </p:sp>
       <p:sp>
@@ -21297,7 +21951,10 @@
         </p:spPr>
         <p:txBody>
           <a:bodyPr/>
-          <a:p/>
+          <a:p>
+            <a:pPr/>
+            <a:endParaRPr/>
+          </a:p>
         </p:txBody>
       </p:sp>
       <p:pic>
@@ -21424,7 +22081,10 @@
         </p:spPr>
         <p:txBody>
           <a:bodyPr/>
-          <a:p/>
+          <a:p>
+            <a:pPr/>
+            <a:endParaRPr/>
+          </a:p>
         </p:txBody>
       </p:sp>
       <p:pic>
@@ -21555,7 +22215,10 @@
         </p:spPr>
         <p:txBody>
           <a:bodyPr/>
-          <a:p/>
+          <a:p>
+            <a:pPr/>
+            <a:endParaRPr/>
+          </a:p>
         </p:txBody>
       </p:sp>
       <p:sp>
@@ -21683,7 +22346,7 @@
   <p:cSld>
     <p:spTree>
       <p:nvGrpSpPr>
-        <p:cNvPr id="628" name="" descr="&lt;Slide style={{ background: '#FFFFFF', padding: 0 }}&gt;&#10;  &lt;Box style={{ padding: '24px 40px 6px 40px', flexDirection: 'row', alignItems: 'center', justifyContent: 'space-between' }}&gt;&#10;    &lt;Text style={{ fontSize: 32, fontWeight: 'bold', color: '#0E3F8C' }}&gt;Stakeholders &amp;amp; Vision&lt;/Text&gt;&#10;    &lt;Text style={{ fontSize: 14, color: '#1E4FA8', fontWeight: 'bold' }}&gt;35 / 38&lt;/Text&gt;&#10;  &lt;/Box&gt;&#10;  &lt;Box style={{ flex: 1, padding: '8px 40px 0 40px', flexDirection: 'row', gap: 26 }}&gt;&#10;    &lt;Box style={{ flex: 5, justifyContent: 'center', alignItems: 'center' }}&gt;&#10;      &lt;svg width={600} height={350} viewBox='0 0 600 350'&gt;&#10;        &lt;rect x='215' y='18' width='170' height='56' rx='12' fill='#0E3F8C' /&gt;&#10;        &lt;text x='300' y='42' textAnchor='middle' fill='#FFFFFF' fontSize='18' fontWeight='bold'&gt;CampusBites&lt;/text&gt;&#10;        &lt;text x='300' y='64' textAnchor='middle' fill='#FFC107' fontSize='14'&gt;the system&lt;/text&gt;&#10;        &lt;line x1='240' y1='74' x2='90' y2='112' stroke='#3D7BD9' strokeWidth='2' /&gt;&#10;        &lt;line x1='360' y1='74' x2='510' y2='112' stroke='#3D7BD9' strokeWidth='2' /&gt;&#10;        &lt;line x1='300' y1='74' x2='300' y2='118' stroke='#3D7BD9' strokeWidth='2' /&gt;&#10;        &lt;rect x='10' y='118' width='170' height='76' rx='12' fill='#E8EFF8' stroke='#3D7BD9' strokeWidth='2' /&gt;&#10;        &lt;text x='95' y='146' textAnchor='middle' fill='#0E3F8C' fontSize='16' fontWeight='bold'&gt;Students&lt;/text&gt;&#10;        &lt;text x='95' y='168' textAnchor='middle' fill='#4A5568' fontSize='13'&gt;want food fast,&lt;/text&gt;&#10;        &lt;text x='95' y='186' textAnchor='middle' fill='#4A5568' fontSize='13'&gt;want to track it&lt;/text&gt;&#10;        &lt;rect x='215' y='118' width='170' height='76' rx='12' fill='#E8EFF8' stroke='#3D7BD9' strokeWidth='2' /&gt;&#10;        &lt;text x='300' y='146' textAnchor='middle' fill='#0E3F8C' fontSize='16' fontWeight='bold'&gt;Restaurants&lt;/text&gt;&#10;        &lt;text x='300' y='168' textAnchor='middle' fill='#4A5568' fontSize='13'&gt;want more orders,&lt;/text&gt;&#10;        &lt;text x='300' y='186' textAnchor='middle' fill='#4A5568' fontSize='13'&gt;fewer errors&lt;/text&gt;&#10;        &lt;rect x='420' y='118' width='170' height='76' rx='12' fill='#E8EFF8' stroke='#3D7BD9' strokeWidth='2' /&gt;&#10;        &lt;text x='505' y='146' textAnchor='middle' fill='#0E3F8C' fontSize='16' fontWeight='bold'&gt;Riders&lt;/text&gt;&#10;        &lt;text x='505' y='168' textAnchor='middle' fill='#4A5568' fontSize='13'&gt;want clear routes,&lt;/text&gt;&#10;        &lt;text x='505' y='186' textAnchor='middle' fill='#4A5568' fontSize='13'&gt;fair pay&lt;/text&gt;&#10;        &lt;rect x='10' y='216' width='170' height='66' rx='12' fill='#F7F9FC' stroke='#D6DCE5' strokeWidth='1' /&gt;&#10;        &lt;text x='95' y='244' textAnchor='middle' fill='#0E3F8C' fontSize='15' fontWeight='bold'&gt;Canteen admin&lt;/text&gt;&#10;        &lt;text x='95' y='266' textAnchor='middle' fill='#8B97A8' fontSize='13'&gt;compliance, reports&lt;/text&gt;&#10;        &lt;rect x='215' y='216' width='170' height='66' rx='12' fill='#F7F9FC' stroke='#D6DCE5' strokeWidth='1' /&gt;&#10;        &lt;text x='300' y='244' textAnchor='middle' fill='#0E3F8C' fontSize='15' fontWeight='bold'&gt;IT services&lt;/text&gt;&#10;        &lt;text x='300' y='266' textAnchor='middle' fill='#8B97A8' fontSize='13'&gt;runs and maintains it&lt;/text&gt;&#10;        &lt;rect x='420' y='216' width='170' height='66' rx='12' fill='#F7F9FC' stroke='#D6DCE5' strokeWidth='1' /&gt;&#10;        &lt;text x='505' y='244' textAnchor='middle' fill='#0E3F8C' fontSize='15' fontWeight='bold'&gt;Dorm supervisors&lt;/text&gt;&#10;        &lt;text x='505' y='266' textAnchor='middle' fill='#8B97A8' fontSize='13'&gt;delivery hand-off&lt;/text&gt;&#10;        &lt;text x='300' y='312' textAnchor='middle' fill='#4A5568' fontSize='14'&gt;A stakeholder is anyone who can affect — or is affected by — the system.&lt;/text&gt;&#10;        &lt;text x='300' y='334' textAnchor='middle' fill='#8B97A8' fontSize='13'&gt;You will add more in Week 4.&lt;/text&gt;&#10;      &lt;/svg&gt;&#10;    &lt;/Box&gt;&#10;    &lt;Box style={{ flex: 4, flexDirection: 'column', gap: 12, justifyContent: 'center' }}&gt;&#10;      &lt;Text style={{ fontSize: 17, fontWeight: 'bold', color: '#0E3F8C' }}&gt;The vision paragraph&lt;/Text&gt;&#10;      &lt;Box style={{ padding: '18px 20px', background: '#F0F5FC', borderRadius: 10, borderLeft: '4px solid #1E4FA8' }}&gt;&#10;        &lt;Text style={{ fontSize: 16, color: '#1A2230', lineHeight: 1.6, fontStyle: 'italic' }}&gt;&quot;For students and staff who want hot food delivered across campus, CampusBites is a mobile ordering platform that connects dorm kitchens and canteens with student riders. Unlike messaging a seller directly, it tracks every order from kitchen to door.&quot;&lt;/Text&gt;&#10;      &lt;/Box&gt;&#10;      &lt;Box style={{ flexDirection: 'column', gap: 7 }}&gt;&#10;        &lt;Text style={{ fontSize: 15, color: '#4A5568', lineHeight: 1.5 }}&gt;&lt;Text style={{ fontWeight: 'bold', color: '#0E3F8C' }}&gt;For…&lt;/Text&gt; who has the problem&lt;/Text&gt;&#10;        &lt;Text style={{ fontSize: 15, color: '#4A5568', lineHeight: 1.5 }}&gt;&lt;Text style={{ fontWeight: 'bold', color: '#0E3F8C' }}&gt;…is a…&lt;/Text&gt; what it is, in one noun phrase&lt;/Text&gt;&#10;        &lt;Text style={{ fontSize: 15, color: '#4A5568', lineHeight: 1.5 }}&gt;&lt;Text style={{ fontWeight: 'bold', color: '#0E3F8C' }}&gt;Unlike…&lt;/Text&gt; what makes it worth building&lt;/Text&gt;&#10;      &lt;/Box&gt;&#10;    &lt;/Box&gt;&#10;  &lt;/Box&gt;&#10;  &lt;Box style={{ height: 42, padding: '0 40px', flexDirection: 'row', alignItems: 'center', gap: 12 }}&gt;&#10;    &lt;FAIcon name='exclamation-triangle' style={{ fill: '#FFC107', width: 19, height: 19 }} /&gt;&#10;    &lt;Text style={{ fontSize: 16, color: '#4A5568' }}&gt;Stakeholder ≠ user. Someone can be affected without ever logging in.&lt;/Text&gt;&#10;  &lt;/Box&gt;&#10;&lt;/Slide&gt;"/>
+        <p:cNvPr id="628" name=""/>
         <p:cNvGrpSpPr/>
         <p:nvPr/>
       </p:nvGrpSpPr>
@@ -21716,7 +22379,10 @@
         </p:spPr>
         <p:txBody>
           <a:bodyPr/>
-          <a:p/>
+          <a:p>
+            <a:pPr/>
+            <a:endParaRPr/>
+          </a:p>
         </p:txBody>
       </p:sp>
       <p:sp>
@@ -21878,7 +22544,10 @@
         </p:spPr>
         <p:txBody>
           <a:bodyPr/>
-          <a:p/>
+          <a:p>
+            <a:pPr/>
+            <a:endParaRPr/>
+          </a:p>
         </p:txBody>
       </p:sp>
       <p:sp>
@@ -21935,7 +22604,10 @@
         </p:spPr>
         <p:txBody>
           <a:bodyPr/>
-          <a:p/>
+          <a:p>
+            <a:pPr/>
+            <a:endParaRPr/>
+          </a:p>
         </p:txBody>
       </p:sp>
       <p:sp>
@@ -22186,7 +22858,7 @@
   <p:cSld>
     <p:spTree>
       <p:nvGrpSpPr>
-        <p:cNvPr id="642" name="" descr="&lt;Slide style={{ background: '#FFFFFF', padding: 0 }}&gt;&#10;  &lt;Box style={{ height: 72, background: '#1E4FA8', padding: '0 40px', flexDirection: 'row', alignItems: 'center', justifyContent: 'space-between' }}&gt;&#10;    &lt;Text style={{ fontSize: 15, color: '#B9CDF0', letterSpacing: 1 }}&gt;ISAD · INFORMATION SYSTEMS ANALYSIS &amp;amp; DESIGN&lt;/Text&gt;&#10;    &lt;Text style={{ fontSize: 15, color: '#B9CDF0' }}&gt;W02 · HOMEWORK&lt;/Text&gt;&#10;  &lt;/Box&gt;&#10;  &lt;Box style={{ padding: '22px 40px 0 40px' }}&gt;&#10;    &lt;Text style={{ fontSize: 33, fontWeight: 'bold', color: '#0E3F8C' }}&gt;Homework for Week 2&lt;/Text&gt;&#10;  &lt;/Box&gt;&#10;  &lt;Box style={{ flex: 1, padding: '18px 40px 0 40px', flexDirection: 'row', gap: 28 }}&gt;&#10;    &lt;Box style={{ width: 300, padding: '28px 24px', background: '#0E3F8C', borderRadius: 12, flexDirection: 'column', justifyContent: 'center', gap: 14 }}&gt;&#10;      &lt;Text style={{ fontSize: 22, fontWeight: 'bold', color: '#FFFFFF', lineHeight: 1.35 }}&gt;Read a little. Write a little code.&lt;/Text&gt;&#10;      &lt;Text style={{ fontSize: 16, color: '#C5D4EA', lineHeight: 1.55 }}&gt;Both tasks feed next week's UML work. Do the code task before Friday.&lt;/Text&gt;&#10;    &lt;/Box&gt;&#10;    &lt;Box style={{ flex: 1, flexDirection: 'column', gap: 12, justifyContent: 'center' }}&gt;&#10;      {[&#10;        ['book', 'Read Larman on OO basics', 'Chapters as assigned. Skim for vocabulary, not for mastery.'],&#10;        ['code', 'Refactor the Order class', 'Extract one interface and two implementations from the messy version.'],&#10;        ['terminal', 'Push it to your team repo', 'A commit history is your contribution evidence. Start it now.'],&#10;        ['edit', 'Draft your vision paragraph', 'Bring a first draft to the lab on Friday.'],&#10;      ].map(([icon, t, d]) =&gt; (&#10;        &lt;Box key={t} style={{ flexDirection: 'row', gap: 14, alignItems: 'center', padding: '14px 18px', background: '#F7F9FC', borderRadius: 10, border: '1px solid #E5E7EB' }}&gt;&#10;          &lt;Box style={{ width: 44, height: 44, borderRadius: 10, background: '#E8EFF8', justifyContent: 'center', alignItems: 'center' }}&gt;&#10;            &lt;FAIcon name={icon} style={{ fill: '#1E4FA8', width: 22, height: 22 }} /&gt;&#10;          &lt;/Box&gt;&#10;          &lt;Box style={{ flexDirection: 'column', gap: 3 }}&gt;&#10;            &lt;Text style={{ fontSize: 17, fontWeight: 'bold', color: '#1A2230' }}&gt;{t}&lt;/Text&gt;&#10;            &lt;Text style={{ fontSize: 14, color: '#4A5568', lineHeight: 1.5 }}&gt;{d}&lt;/Text&gt;&#10;          &lt;/Box&gt;&#10;        &lt;/Box&gt;&#10;      ))}&#10;    &lt;/Box&gt;&#10;  &lt;/Box&gt;&#10;  &lt;Box style={{ height: 44, padding: '0 40px', flexDirection: 'row', alignItems: 'center', justifyContent: 'space-between' }}&gt;&#10;    &lt;Text style={{ fontSize: 13, color: '#8B97A8' }}&gt;Stuck on the refactor? Bring the broken version to Friday's lab — that is a better question than no question.&lt;/Text&gt;&#10;    &lt;Text style={{ fontSize: 14, color: '#1E4FA8', fontWeight: 'bold' }}&gt;36 / 38&lt;/Text&gt;&#10;  &lt;/Box&gt;&#10;&lt;/Slide&gt;"/>
+        <p:cNvPr id="642" name=""/>
         <p:cNvGrpSpPr/>
         <p:nvPr/>
       </p:nvGrpSpPr>
@@ -22219,7 +22891,10 @@
         </p:spPr>
         <p:txBody>
           <a:bodyPr/>
-          <a:p/>
+          <a:p>
+            <a:pPr/>
+            <a:endParaRPr/>
+          </a:p>
         </p:txBody>
       </p:sp>
       <p:sp>
@@ -22243,7 +22918,10 @@
         </p:spPr>
         <p:txBody>
           <a:bodyPr/>
-          <a:p/>
+          <a:p>
+            <a:pPr/>
+            <a:endParaRPr/>
+          </a:p>
         </p:txBody>
       </p:sp>
       <p:sp>
@@ -22374,7 +23052,10 @@
         </p:spPr>
         <p:txBody>
           <a:bodyPr/>
-          <a:p/>
+          <a:p>
+            <a:pPr/>
+            <a:endParaRPr/>
+          </a:p>
         </p:txBody>
       </p:sp>
       <p:sp>
@@ -22479,7 +23160,10 @@
         </p:spPr>
         <p:txBody>
           <a:bodyPr/>
-          <a:p/>
+          <a:p>
+            <a:pPr/>
+            <a:endParaRPr/>
+          </a:p>
         </p:txBody>
       </p:sp>
       <p:sp>
@@ -22505,7 +23189,10 @@
         </p:spPr>
         <p:txBody>
           <a:bodyPr/>
-          <a:p/>
+          <a:p>
+            <a:pPr/>
+            <a:endParaRPr/>
+          </a:p>
         </p:txBody>
       </p:sp>
       <p:pic>
@@ -22637,7 +23324,10 @@
         </p:spPr>
         <p:txBody>
           <a:bodyPr/>
-          <a:p/>
+          <a:p>
+            <a:pPr/>
+            <a:endParaRPr/>
+          </a:p>
         </p:txBody>
       </p:sp>
       <p:sp>
@@ -22663,7 +23353,10 @@
         </p:spPr>
         <p:txBody>
           <a:bodyPr/>
-          <a:p/>
+          <a:p>
+            <a:pPr/>
+            <a:endParaRPr/>
+          </a:p>
         </p:txBody>
       </p:sp>
       <p:pic>
@@ -22795,7 +23488,10 @@
         </p:spPr>
         <p:txBody>
           <a:bodyPr/>
-          <a:p/>
+          <a:p>
+            <a:pPr/>
+            <a:endParaRPr/>
+          </a:p>
         </p:txBody>
       </p:sp>
       <p:sp>
@@ -22821,7 +23517,10 @@
         </p:spPr>
         <p:txBody>
           <a:bodyPr/>
-          <a:p/>
+          <a:p>
+            <a:pPr/>
+            <a:endParaRPr/>
+          </a:p>
         </p:txBody>
       </p:sp>
       <p:pic>
@@ -22953,7 +23652,10 @@
         </p:spPr>
         <p:txBody>
           <a:bodyPr/>
-          <a:p/>
+          <a:p>
+            <a:pPr/>
+            <a:endParaRPr/>
+          </a:p>
         </p:txBody>
       </p:sp>
       <p:sp>
@@ -22979,7 +23681,10 @@
         </p:spPr>
         <p:txBody>
           <a:bodyPr/>
-          <a:p/>
+          <a:p>
+            <a:pPr/>
+            <a:endParaRPr/>
+          </a:p>
         </p:txBody>
       </p:sp>
       <p:pic>
@@ -23163,7 +23868,7 @@
   <p:cSld>
     <p:spTree>
       <p:nvGrpSpPr>
-        <p:cNvPr id="673" name="" descr="&lt;Slide style={{ background: '#FFFFFF', padding: 0 }}&gt;&#10;  &lt;Box style={{ padding: '24px 40px 6px 40px', flexDirection: 'row', alignItems: 'center', justifyContent: 'space-between' }}&gt;&#10;    &lt;Text style={{ fontSize: 32, fontWeight: 'bold', color: '#0E3F8C' }}&gt;Getting Ready for M0&lt;/Text&gt;&#10;    &lt;Text style={{ fontSize: 14, color: '#1E4FA8', fontWeight: 'bold' }}&gt;37 / 38&lt;/Text&gt;&#10;  &lt;/Box&gt;&#10;  &lt;Box style={{ flex: 1, padding: '10px 40px 0 40px', flexDirection: 'row', gap: 26 }}&gt;&#10;    &lt;Box style={{ flex: 3, justifyContent: 'center', alignItems: 'center' }}&gt;&#10;      &lt;svg width={560} height={330} viewBox='0 0 560 330'&gt;&#10;        &lt;line x1='60' y1='60' x2='60' y2='286' stroke='#D6DCE5' strokeWidth='3' /&gt;&#10;        &lt;circle cx='60' cy='60' r='9' fill='#3D7BD9' /&gt;&#10;        &lt;text x='86' y='56' fill='#0E3F8C' fontSize='16' fontWeight='bold'&gt;Today — in the lab&lt;/text&gt;&#10;        &lt;text x='86' y='78' fill='#4A5568' fontSize='14'&gt;Form the team. Appoint the Lead. Draft the charter.&lt;/text&gt;&#10;        &lt;circle cx='60' cy='130' r='9' fill='#3D7BD9' /&gt;&#10;        &lt;text x='86' y='126' fill='#0E3F8C' fontSize='16' fontWeight='bold'&gt;Wed Sep 09&lt;/text&gt;&#10;        &lt;text x='86' y='148' fill='#4A5568' fontSize='14'&gt;Stakeholder list. Vision paragraph, first draft.&lt;/text&gt;&#10;        &lt;circle cx='60' cy='200' r='9' fill='#3D7BD9' /&gt;&#10;        &lt;text x='86' y='196' fill='#0E3F8C' fontSize='16' fontWeight='bold'&gt;Thu Sep 10&lt;/text&gt;&#10;        &lt;text x='86' y='218' fill='#4A5568' fontSize='14'&gt;Create the repo. Invite klausren. Push the README.&lt;/text&gt;&#10;        &lt;circle cx='60' cy='270' r='11' fill='#D9534F' /&gt;&#10;        &lt;text x='86' y='266' fill='#D9534F' fontSize='17' fontWeight='bold'&gt;Fri Sep 11 · 23:59&lt;/text&gt;&#10;        &lt;text x='86' y='288' fill='#4A5568' fontSize='14'&gt;Tag m0 and push the tag. This is the submission.&lt;/text&gt;&#10;        &lt;rect x='40' y='304' width='480' height='4' rx='2' fill='#FFC107' /&gt;&#10;      &lt;/svg&gt;&#10;    &lt;/Box&gt;&#10;    &lt;Box style={{ flex: 2, flexDirection: 'column', gap: 12, justifyContent: 'center' }}&gt;&#10;      &lt;Text style={{ fontSize: 17, fontWeight: 'bold', color: '#0E3F8C' }}&gt;The one rule that trips people&lt;/Text&gt;&#10;      &lt;Box style={{ padding: '16px 18px', background: '#FDF3F3', borderRadius: 10, borderLeft: '4px solid #D9534F' }}&gt;&#10;        &lt;Text style={{ fontSize: 16, color: '#4A5568', lineHeight: 1.5 }}&gt;A milestone is &lt;Text style={{ fontWeight: 'bold', color: '#D9534F' }}&gt;only submitted when the tag is pushed&lt;/Text&gt;. A commit on Friday is not enough.&lt;/Text&gt;&#10;      &lt;/Box&gt;&#10;      &lt;Box style={{ padding: '14px 16px', background: '#F7F9FC', borderRadius: 9, border: '1px solid #E5E7EB' }}&gt;&#10;        &lt;Text style={{ fontSize: 14, color: '#4A5568', lineHeight: 1.5 }}&gt;git tag m0&lt;br /&gt;git push origin m0&lt;/Text&gt;&#10;      &lt;/Box&gt;&#10;      &lt;Box style={{ padding: '14px 16px', background: '#F0F5FC', borderRadius: 9 }}&gt;&#10;        &lt;Text style={{ fontSize: 14, color: '#4A5568', lineHeight: 1.5 }}&gt;Full protocol and the zip fallback: &lt;Text style={{ fontWeight: 'bold', color: '#0E3F8C' }}&gt;Deadline Schedule §4&lt;/Text&gt;&lt;/Text&gt;&#10;      &lt;/Box&gt;&#10;    &lt;/Box&gt;&#10;  &lt;/Box&gt;&#10;  &lt;Box style={{ height: 44, background: '#0E3F8C', padding: '0 40px', flexDirection: 'row', alignItems: 'center', justifyContent: 'center' }}&gt;&#10;    &lt;Text style={{ fontSize: 17, color: '#FFFFFF', fontWeight: '600' }}&gt;M0 is small on purpose. It exists to test your pipeline before anything is graded.&lt;/Text&gt;&#10;  &lt;/Box&gt;&#10;&lt;/Slide&gt;"/>
+        <p:cNvPr id="673" name=""/>
         <p:cNvGrpSpPr/>
         <p:nvPr/>
       </p:nvGrpSpPr>
@@ -23196,7 +23901,10 @@
         </p:spPr>
         <p:txBody>
           <a:bodyPr/>
-          <a:p/>
+          <a:p>
+            <a:pPr/>
+            <a:endParaRPr/>
+          </a:p>
         </p:txBody>
       </p:sp>
       <p:sp>
@@ -23358,7 +24066,10 @@
         </p:spPr>
         <p:txBody>
           <a:bodyPr/>
-          <a:p/>
+          <a:p>
+            <a:pPr/>
+            <a:endParaRPr/>
+          </a:p>
         </p:txBody>
       </p:sp>
       <p:sp>
@@ -23415,7 +24126,10 @@
         </p:spPr>
         <p:txBody>
           <a:bodyPr/>
-          <a:p/>
+          <a:p>
+            <a:pPr/>
+            <a:endParaRPr/>
+          </a:p>
         </p:txBody>
       </p:sp>
       <p:sp>
@@ -23503,7 +24217,10 @@
         </p:spPr>
         <p:txBody>
           <a:bodyPr/>
-          <a:p/>
+          <a:p>
+            <a:pPr/>
+            <a:endParaRPr/>
+          </a:p>
         </p:txBody>
       </p:sp>
       <p:sp>
@@ -23582,7 +24299,10 @@
         </p:spPr>
         <p:txBody>
           <a:bodyPr/>
-          <a:p/>
+          <a:p>
+            <a:pPr/>
+            <a:endParaRPr/>
+          </a:p>
         </p:txBody>
       </p:sp>
       <p:sp>
@@ -23651,7 +24371,10 @@
         </p:spPr>
         <p:txBody>
           <a:bodyPr/>
-          <a:p/>
+          <a:p>
+            <a:pPr/>
+            <a:endParaRPr/>
+          </a:p>
         </p:txBody>
       </p:sp>
       <p:sp>
@@ -23699,7 +24422,7 @@
   <p:cSld>
     <p:spTree>
       <p:nvGrpSpPr>
-        <p:cNvPr id="688" name="" descr="&lt;Slide style={{ background: '#0E3F8C', padding: 0 }}&gt;&#10;  &lt;Box style={{ flexDirection: 'column', height: '100%', justifyContent: 'center', padding: '0 80px', position: 'relative' }}&gt;&#10;    &lt;Box style={{ position: 'absolute', top: 0, left: 0, right: 0, height: 8, background: '#1E4FA8' }} /&gt;&#10;    &lt;Box style={{ position: 'absolute', top: 8, left: 0, right: 0, height: 2, background: '#3D7BD9' }} /&gt;&#10;    &lt;Text style={{ fontSize: 15, color: '#7FA2D6', letterSpacing: 2, marginBottom: 20 }}&gt;WEEK 02 · WRAP-UP&lt;/Text&gt;&#10;    &lt;Text style={{ fontSize: 46, fontWeight: 'bold', color: '#FFFFFF', fontFamily: 'Georgia, serif', lineHeight: 1.15 }}&gt;&#10;      Four pillars.&lt;br /&gt;One idea.&#10;    &lt;/Text&gt;&#10;    &lt;Box style={{ width: 76, height: 4, background: '#FFC107', marginTop: 24, marginBottom: 24 }} /&gt;&#10;    &lt;Box style={{ flexDirection: 'row', gap: 14, marginBottom: 26 }}&gt;&#10;      {[&#10;        ['Objects', 'state · behaviour · identity'],&#10;        ['Encapsulation', 'hide state, expose behaviour'],&#10;        ['Composition', 'has-a beats is-a, usually'],&#10;        ['Interfaces', 'depend on what it does'],&#10;      ].map(([t, d]) =&gt; (&#10;        &lt;Box key={t} style={{ flex: 1, padding: '16px 16px', background: '#1E4FA8', borderRadius: 10, flexDirection: 'column', gap: 5 }}&gt;&#10;          &lt;Text style={{ fontSize: 17, fontWeight: 'bold', color: '#FFFFFF' }}&gt;{t}&lt;/Text&gt;&#10;          &lt;Text style={{ fontSize: 13, color: '#B9CDF0', lineHeight: 1.4 }}&gt;{d}&lt;/Text&gt;&#10;        &lt;/Box&gt;&#10;      ))}&#10;    &lt;/Box&gt;&#10;    &lt;Text style={{ fontSize: 21, color: '#C5D4EA', lineHeight: 1.5 }}&gt;&#10;      All four serve one purpose: &lt;Text style={{ fontWeight: 'bold', color: '#FFC107' }}&gt;put each responsibility in the right place.&lt;/Text&gt;&#10;    &lt;/Text&gt;&#10;    &lt;Box style={{ position: 'absolute', bottom: 46, left: 80, right: 80, flexDirection: 'row', justifyContent: 'space-between', alignItems: 'center', borderTop: '1px solid #2B5793', paddingTop: 18 }}&gt;&#10;      &lt;Text style={{ fontSize: 17, color: '#C5D4EA' }}&gt;Next week — UML Essentials: the diagrams you will draw all term.&lt;/Text&gt;&#10;      &lt;Text style={{ fontSize: 17, color: '#FFC107', fontWeight: 'bold' }}&gt;Questions?&lt;/Text&gt;&#10;    &lt;/Box&gt;&#10;  &lt;/Box&gt;&#10;&lt;/Slide&gt;"/>
+        <p:cNvPr id="688" name=""/>
         <p:cNvGrpSpPr/>
         <p:nvPr/>
       </p:nvGrpSpPr>
@@ -23732,7 +24455,10 @@
         </p:spPr>
         <p:txBody>
           <a:bodyPr/>
-          <a:p/>
+          <a:p>
+            <a:pPr/>
+            <a:endParaRPr/>
+          </a:p>
         </p:txBody>
       </p:sp>
       <p:sp>
@@ -23844,7 +24570,10 @@
         </p:spPr>
         <p:txBody>
           <a:bodyPr/>
-          <a:p/>
+          <a:p>
+            <a:pPr/>
+            <a:endParaRPr/>
+          </a:p>
         </p:txBody>
       </p:sp>
       <p:sp>
@@ -23870,7 +24599,10 @@
         </p:spPr>
         <p:txBody>
           <a:bodyPr/>
-          <a:p/>
+          <a:p>
+            <a:pPr/>
+            <a:endParaRPr/>
+          </a:p>
         </p:txBody>
       </p:sp>
       <p:sp>
@@ -23966,7 +24698,10 @@
         </p:spPr>
         <p:txBody>
           <a:bodyPr/>
-          <a:p/>
+          <a:p>
+            <a:pPr/>
+            <a:endParaRPr/>
+          </a:p>
         </p:txBody>
       </p:sp>
       <p:sp>
@@ -24062,7 +24797,10 @@
         </p:spPr>
         <p:txBody>
           <a:bodyPr/>
-          <a:p/>
+          <a:p>
+            <a:pPr/>
+            <a:endParaRPr/>
+          </a:p>
         </p:txBody>
       </p:sp>
       <p:sp>
@@ -24158,7 +24896,10 @@
         </p:spPr>
         <p:txBody>
           <a:bodyPr/>
-          <a:p/>
+          <a:p>
+            <a:pPr/>
+            <a:endParaRPr/>
+          </a:p>
         </p:txBody>
       </p:sp>
       <p:sp>
@@ -24297,7 +25038,10 @@
         </p:spPr>
         <p:txBody>
           <a:bodyPr/>
-          <a:p/>
+          <a:p>
+            <a:pPr/>
+            <a:endParaRPr/>
+          </a:p>
         </p:txBody>
       </p:sp>
       <p:sp>
@@ -24321,7 +25065,10 @@
         </p:spPr>
         <p:txBody>
           <a:bodyPr/>
-          <a:p/>
+          <a:p>
+            <a:pPr/>
+            <a:endParaRPr/>
+          </a:p>
         </p:txBody>
       </p:sp>
       <p:sp>
@@ -24361,7 +25108,10 @@
         </p:spPr>
         <p:txBody>
           <a:bodyPr/>
-          <a:p/>
+          <a:p>
+            <a:pPr/>
+            <a:endParaRPr/>
+          </a:p>
         </p:txBody>
       </p:sp>
       <p:sp>
@@ -24444,7 +25194,7 @@
   <p:cSld>
     <p:spTree>
       <p:nvGrpSpPr>
-        <p:cNvPr id="711" name="" descr="&lt;Slide style={{ background: '#FFFFFF', padding: 0 }}&gt;&#10;  &lt;Box style={{ height: 72, background: '#1E4FA8', padding: '0 40px', flexDirection: 'row', alignItems: 'center', justifyContent: 'space-between' }}&gt;&#10;    &lt;Text style={{ fontSize: 15, color: '#B9CDF0', letterSpacing: 1 }}&gt;ISAD · INFORMATION SYSTEMS ANALYSIS &amp;amp; DESIGN&lt;/Text&gt;&#10;    &lt;Text style={{ fontSize: 15, color: '#B9CDF0' }}&gt;W02 · RECAP&lt;/Text&gt;&#10;  &lt;/Box&gt;&#10;  &lt;Box style={{ padding: '24px 40px 0 40px' }}&gt;&#10;    &lt;Text style={{ fontSize: 34, fontWeight: 'bold', color: '#0E3F8C' }}&gt;Where We Left Off&lt;/Text&gt;&#10;  &lt;/Box&gt;&#10;  &lt;Box style={{ flex: 1, padding: '20px 40px 0 40px', flexDirection: 'row', gap: 28 }}&gt;&#10;    &lt;Box style={{ flex: 3, flexDirection: 'column', gap: 10, justifyContent: 'center' }}&gt;&#10;      {[&#10;        ['info-circle', 'An information system is People + Process + Data + Technology', 'Not just software.'],&#10;        ['user-tie', 'The analyst translates between business and technology', 'W01, Part 3.'],&#10;        ['stream', 'Analysis asks what; design asks how', 'W01, Part 4.'],&#10;        ['map', 'Roadmap: models → principles → patterns → architecture', 'W01, Part 5.'],&#10;      ].map(([icon, t, d]) =&gt; (&#10;        &lt;Box key={t} style={{ flexDirection: 'row', gap: 14, alignItems: 'center', padding: '13px 18px', background: '#F7F9FC', borderRadius: 10, border: '1px solid #E5E7EB' }}&gt;&#10;          &lt;Box style={{ width: 40, height: 40, borderRadius: 9, background: '#E8EFF8', justifyContent: 'center', alignItems: 'center' }}&gt;&#10;            &lt;FAIcon name={icon} style={{ fill: '#1E4FA8', width: 20, height: 20 }} /&gt;&#10;          &lt;/Box&gt;&#10;          &lt;Box style={{ flexDirection: 'column', gap: 2 }}&gt;&#10;            &lt;Text style={{ fontSize: 16, fontWeight: 'bold', color: '#1A2230' }}&gt;{t}&lt;/Text&gt;&#10;            &lt;Text style={{ fontSize: 13, color: '#8B97A8' }}&gt;{d}&lt;/Text&gt;&#10;          &lt;/Box&gt;&#10;        &lt;/Box&gt;&#10;      ))}&#10;    &lt;/Box&gt;&#10;    &lt;Box style={{ flex: 2, padding: '26px 24px', background: '#0E3F8C', borderRadius: 12, flexDirection: 'column', justifyContent: 'center', gap: 14 }}&gt;&#10;      &lt;FAIcon name='plug' style={{ fill: '#FFC107', width: 32, height: 32 }} /&gt;&#10;      &lt;Text style={{ fontSize: 21, fontWeight: 'bold', color: '#FFFFFF', lineHeight: 1.35 }}&gt;The missing piece: what an object actually is.&lt;/Text&gt;&#10;      &lt;Text style={{ fontSize: 16, color: '#C5D4EA', lineHeight: 1.55 }}&gt;Last week we said this course is about objects. This week we get precise — before any diagram, before any pattern.&lt;/Text&gt;&#10;    &lt;/Box&gt;&#10;  &lt;/Box&gt;&#10;  &lt;Box style={{ height: 40, padding: '0 40px', flexDirection: 'row', alignItems: 'center', justifyContent: 'space-between' }}&gt;&#10;    &lt;Text style={{ fontSize: 13, color: '#8B97A8' }}&gt;ISAD · Fall 2026&lt;/Text&gt;&#10;    &lt;Text style={{ fontSize: 14, color: '#1E4FA8', fontWeight: 'bold' }}&gt;04 / 38&lt;/Text&gt;&#10;  &lt;/Box&gt;&#10;&lt;/Slide&gt;"/>
+        <p:cNvPr id="711" name=""/>
         <p:cNvGrpSpPr/>
         <p:nvPr/>
       </p:nvGrpSpPr>
@@ -24477,7 +25227,10 @@
         </p:spPr>
         <p:txBody>
           <a:bodyPr/>
-          <a:p/>
+          <a:p>
+            <a:pPr/>
+            <a:endParaRPr/>
+          </a:p>
         </p:txBody>
       </p:sp>
       <p:sp>
@@ -24501,7 +25254,10 @@
         </p:spPr>
         <p:txBody>
           <a:bodyPr/>
-          <a:p/>
+          <a:p>
+            <a:pPr/>
+            <a:endParaRPr/>
+          </a:p>
         </p:txBody>
       </p:sp>
       <p:sp>
@@ -24637,7 +25393,10 @@
         </p:spPr>
         <p:txBody>
           <a:bodyPr/>
-          <a:p/>
+          <a:p>
+            <a:pPr/>
+            <a:endParaRPr/>
+          </a:p>
         </p:txBody>
       </p:sp>
       <p:sp>
@@ -24663,7 +25422,10 @@
         </p:spPr>
         <p:txBody>
           <a:bodyPr/>
-          <a:p/>
+          <a:p>
+            <a:pPr/>
+            <a:endParaRPr/>
+          </a:p>
         </p:txBody>
       </p:sp>
       <p:pic>
@@ -24795,7 +25557,10 @@
         </p:spPr>
         <p:txBody>
           <a:bodyPr/>
-          <a:p/>
+          <a:p>
+            <a:pPr/>
+            <a:endParaRPr/>
+          </a:p>
         </p:txBody>
       </p:sp>
       <p:sp>
@@ -24821,7 +25586,10 @@
         </p:spPr>
         <p:txBody>
           <a:bodyPr/>
-          <a:p/>
+          <a:p>
+            <a:pPr/>
+            <a:endParaRPr/>
+          </a:p>
         </p:txBody>
       </p:sp>
       <p:pic>
@@ -24953,7 +25721,10 @@
         </p:spPr>
         <p:txBody>
           <a:bodyPr/>
-          <a:p/>
+          <a:p>
+            <a:pPr/>
+            <a:endParaRPr/>
+          </a:p>
         </p:txBody>
       </p:sp>
       <p:sp>
@@ -24979,7 +25750,10 @@
         </p:spPr>
         <p:txBody>
           <a:bodyPr/>
-          <a:p/>
+          <a:p>
+            <a:pPr/>
+            <a:endParaRPr/>
+          </a:p>
         </p:txBody>
       </p:sp>
       <p:pic>
@@ -25111,7 +25885,10 @@
         </p:spPr>
         <p:txBody>
           <a:bodyPr/>
-          <a:p/>
+          <a:p>
+            <a:pPr/>
+            <a:endParaRPr/>
+          </a:p>
         </p:txBody>
       </p:sp>
       <p:sp>
@@ -25137,7 +25914,10 @@
         </p:spPr>
         <p:txBody>
           <a:bodyPr/>
-          <a:p/>
+          <a:p>
+            <a:pPr/>
+            <a:endParaRPr/>
+          </a:p>
         </p:txBody>
       </p:sp>
       <p:pic>
@@ -25264,7 +26044,10 @@
         </p:spPr>
         <p:txBody>
           <a:bodyPr/>
-          <a:p/>
+          <a:p>
+            <a:pPr/>
+            <a:endParaRPr/>
+          </a:p>
         </p:txBody>
       </p:sp>
       <p:pic>
@@ -25452,7 +26235,7 @@
   <p:cSld>
     <p:spTree>
       <p:nvGrpSpPr>
-        <p:cNvPr id="743" name="" descr="&lt;Slide style={{ background: '#FFFFFF', padding: 0 }}&gt;&#10;  &lt;Box style={{ height: 72, background: '#1E4FA8', padding: '0 40px', flexDirection: 'row', alignItems: 'center', justifyContent: 'space-between' }}&gt;&#10;    &lt;Text style={{ fontSize: 15, color: '#B9CDF0', letterSpacing: 1 }}&gt;ISAD · INFORMATION SYSTEMS ANALYSIS &amp;amp; DESIGN&lt;/Text&gt;&#10;    &lt;Text style={{ fontSize: 15, color: '#B9CDF0' }}&gt;W02 · THIS WEEK&lt;/Text&gt;&#10;  &lt;/Box&gt;&#10;  &lt;Box style={{ flex: 1, flexDirection: 'row', alignItems: 'center', padding: '20px 40px', gap: 40 }}&gt;&#10;    &lt;Box style={{ width: 280, alignItems: 'center', justifyContent: 'center' }}&gt;&#10;      &lt;Text style={{ fontSize: 190, fontWeight: 'bold', color: '#E8EFF8', fontFamily: 'Georgia, serif', lineHeight: 1 }}&gt;4&lt;/Text&gt;&#10;      &lt;Text style={{ fontSize: 20, fontWeight: 'bold', color: '#1E4FA8', letterSpacing: 2, marginTop: 6 }}&gt;PILLARS&lt;/Text&gt;&#10;      &lt;Box style={{ width: 56, height: 4, background: '#FFC107', marginTop: 12 }} /&gt;&#10;    &lt;/Box&gt;&#10;    &lt;Box style={{ flex: 1, flexDirection: 'column', gap: 13 }}&gt;&#10;      {[&#10;        { n: '01', t: 'Objects', d: 'State, behaviour, identity — what an object is made of.' },&#10;        { n: '02', t: 'Encapsulation', d: 'Hide the state; expose behaviour. Guard your invariants.' },&#10;        { n: '03', t: 'Reuse', d: 'Inheritance vs. composition — and why one is preferred.' },&#10;        { n: '04', t: 'Polymorphism', d: 'One message, many behaviours. Program to an interface.' },&#10;      ].map((item) =&gt; (&#10;        &lt;Box key={item.n} style={{ flexDirection: 'row', alignItems: 'center', gap: 18, padding: '14px 20px', background: '#F0F5FC', borderRadius: 10, borderLeft: '4px solid #3D7BD9' }}&gt;&#10;          &lt;Text style={{ fontSize: 24, fontWeight: 'bold', color: '#3D7BD9', fontFamily: 'Georgia, serif' }}&gt;{item.n}&lt;/Text&gt;&#10;          &lt;Box style={{ flexDirection: 'column', gap: 2 }}&gt;&#10;            &lt;Text style={{ fontSize: 19, fontWeight: 'bold', color: '#0E3F8C' }}&gt;{item.t}&lt;/Text&gt;&#10;            &lt;Text style={{ fontSize: 14, color: '#4A5568', lineHeight: 1.45 }}&gt;{item.d}&lt;/Text&gt;&#10;          &lt;/Box&gt;&#10;        &lt;/Box&gt;&#10;      ))}&#10;    &lt;/Box&gt;&#10;  &lt;/Box&gt;&#10;  &lt;Box style={{ height: 56, background: '#0E3F8C', padding: '0 40px', flexDirection: 'row', alignItems: 'center', justifyContent: 'center' }}&gt;&#10;    &lt;Text style={{ fontSize: 18, color: '#FFFFFF', fontWeight: '600' }}&gt;These four are the grammar. Design patterns (Weeks 13–15) are the literature built on it.&lt;/Text&gt;&#10;  &lt;/Box&gt;&#10;&lt;/Slide&gt;"/>
+        <p:cNvPr id="743" name=""/>
         <p:cNvGrpSpPr/>
         <p:nvPr/>
       </p:nvGrpSpPr>
@@ -25485,7 +26268,10 @@
         </p:spPr>
         <p:txBody>
           <a:bodyPr/>
-          <a:p/>
+          <a:p>
+            <a:pPr/>
+            <a:endParaRPr/>
+          </a:p>
         </p:txBody>
       </p:sp>
       <p:sp>
@@ -25509,7 +26295,10 @@
         </p:spPr>
         <p:txBody>
           <a:bodyPr/>
-          <a:p/>
+          <a:p>
+            <a:pPr/>
+            <a:endParaRPr/>
+          </a:p>
         </p:txBody>
       </p:sp>
       <p:sp>
@@ -25673,7 +26462,10 @@
         </p:spPr>
         <p:txBody>
           <a:bodyPr/>
-          <a:p/>
+          <a:p>
+            <a:pPr/>
+            <a:endParaRPr/>
+          </a:p>
         </p:txBody>
       </p:sp>
       <p:sp>
@@ -25699,7 +26491,10 @@
         </p:spPr>
         <p:txBody>
           <a:bodyPr/>
-          <a:p/>
+          <a:p>
+            <a:pPr/>
+            <a:endParaRPr/>
+          </a:p>
         </p:txBody>
       </p:sp>
       <p:sp>
@@ -25756,7 +26551,10 @@
         </p:spPr>
         <p:txBody>
           <a:bodyPr/>
-          <a:p/>
+          <a:p>
+            <a:pPr/>
+            <a:endParaRPr/>
+          </a:p>
         </p:txBody>
       </p:sp>
       <p:sp>
@@ -25887,7 +26685,10 @@
         </p:spPr>
         <p:txBody>
           <a:bodyPr/>
-          <a:p/>
+          <a:p>
+            <a:pPr/>
+            <a:endParaRPr/>
+          </a:p>
         </p:txBody>
       </p:sp>
       <p:sp>
@@ -25944,7 +26745,10 @@
         </p:spPr>
         <p:txBody>
           <a:bodyPr/>
-          <a:p/>
+          <a:p>
+            <a:pPr/>
+            <a:endParaRPr/>
+          </a:p>
         </p:txBody>
       </p:sp>
       <p:sp>
@@ -26075,7 +26879,10 @@
         </p:spPr>
         <p:txBody>
           <a:bodyPr/>
-          <a:p/>
+          <a:p>
+            <a:pPr/>
+            <a:endParaRPr/>
+          </a:p>
         </p:txBody>
       </p:sp>
       <p:sp>
@@ -26132,7 +26939,10 @@
         </p:spPr>
         <p:txBody>
           <a:bodyPr/>
-          <a:p/>
+          <a:p>
+            <a:pPr/>
+            <a:endParaRPr/>
+          </a:p>
         </p:txBody>
       </p:sp>
       <p:sp>
@@ -26263,7 +27073,10 @@
         </p:spPr>
         <p:txBody>
           <a:bodyPr/>
-          <a:p/>
+          <a:p>
+            <a:pPr/>
+            <a:endParaRPr/>
+          </a:p>
         </p:txBody>
       </p:sp>
       <p:sp>
@@ -26320,7 +27133,10 @@
         </p:spPr>
         <p:txBody>
           <a:bodyPr/>
-          <a:p/>
+          <a:p>
+            <a:pPr/>
+            <a:endParaRPr/>
+          </a:p>
         </p:txBody>
       </p:sp>
       <p:sp>
@@ -26449,7 +27265,10 @@
         </p:spPr>
         <p:txBody>
           <a:bodyPr/>
-          <a:p/>
+          <a:p>
+            <a:pPr/>
+            <a:endParaRPr/>
+          </a:p>
         </p:txBody>
       </p:sp>
       <p:sp>
@@ -26497,7 +27316,7 @@
   <p:cSld>
     <p:spTree>
       <p:nvGrpSpPr>
-        <p:cNvPr id="773" name="" descr="&lt;Slide style={{ background: '#FFFFFF', padding: 0 }}&gt;&#10;  &lt;Box style={{ height: 72, background: '#1E4FA8', padding: '0 40px', flexDirection: 'row', alignItems: 'center', justifyContent: 'space-between' }}&gt;&#10;    &lt;Text style={{ fontSize: 15, color: '#B9CDF0', letterSpacing: 1 }}&gt;ISAD · INFORMATION SYSTEMS ANALYSIS &amp;amp; DESIGN&lt;/Text&gt;&#10;    &lt;Text style={{ fontSize: 15, color: '#B9CDF0' }}&gt;W02 · KICKOFF&lt;/Text&gt;&#10;  &lt;/Box&gt;&#10;  &lt;Box style={{ padding: '22px 40px 0 40px' }}&gt;&#10;    &lt;Text style={{ fontSize: 34, fontWeight: 'bold', color: '#0E3F8C' }}&gt;CampusBites Starts Today&lt;/Text&gt;&#10;  &lt;/Box&gt;&#10;  &lt;Box style={{ flex: 1, padding: '16px 40px 0 40px', flexDirection: 'row', gap: 26 }}&gt;&#10;    &lt;Box style={{ flex: 5, justifyContent: 'center', alignItems: 'center' }}&gt;&#10;      &lt;svg width={560} height={360} viewBox='0 0 560 360'&gt;&#10;        &lt;rect x='30' y='150' width='140' height='78' rx='12' fill='#E8EFF8' stroke='#3D7BD9' strokeWidth='2' /&gt;&#10;        &lt;text x='100' y='182' textAnchor='middle' fill='#0E3F8C' fontSize='19' fontWeight='bold'&gt;Student&lt;/text&gt;&#10;        &lt;text x='100' y='206' textAnchor='middle' fill='#8B97A8' fontSize='14'&gt;places the order&lt;/text&gt;&#10;        &lt;rect x='125' y='34' width='150' height='66' rx='12' fill='#E8EFF8' stroke='#3D7BD9' strokeWidth='2' /&gt;&#10;        &lt;text x='200' y='62' textAnchor='middle' fill='#0E3F8C' fontSize='19' fontWeight='bold'&gt;Restaurant&lt;/text&gt;&#10;        &lt;text x='200' y='84' textAnchor='middle' fill='#8B97A8' fontSize='14'&gt;prepares the food&lt;/text&gt;&#10;        &lt;rect x='125' y='266' width='150' height='66' rx='12' fill='#E8EFF8' stroke='#3D7BD9' strokeWidth='2' /&gt;&#10;        &lt;text x='200' y='294' textAnchor='middle' fill='#0E3F8C' fontSize='19' fontWeight='bold'&gt;Rider&lt;/text&gt;&#10;        &lt;text x='200' y='316' textAnchor='middle' fill='#8B97A8' fontSize='14'&gt;delivers to campus&lt;/text&gt;&#10;        &lt;rect x='360' y='150' width='160' height='78' rx='12' fill='#0E3F8C' /&gt;&#10;        &lt;text x='440' y='182' textAnchor='middle' fill='#FFFFFF' fontSize='19' fontWeight='bold'&gt;Order&lt;/text&gt;&#10;        &lt;text x='440' y='206' textAnchor='middle' fill='#FFC107' fontSize='15'&gt;state + payment&lt;/text&gt;&#10;        &lt;line x1='170' y1='168' x2='358' y2='178' stroke='#3D7BD9' strokeWidth='2' /&gt;&#10;        &lt;line x1='212' y1='100' x2='400' y2='172' stroke='#3D7BD9' strokeWidth='2' /&gt;&#10;        &lt;line x1='212' y1='266' x2='400' y2='212' stroke='#3D7BD9' strokeWidth='2' /&gt;&#10;        &lt;text x='440' y='268' textAnchor='middle' fill='#8B97A8' fontSize='14'&gt;campus food delivery&lt;/text&gt;&#10;      &lt;/svg&gt;&#10;    &lt;/Box&gt;&#10;    &lt;Box style={{ flex: 4, flexDirection: 'column', gap: 10, justifyContent: 'center' }}&gt;&#10;      &lt;Text style={{ fontSize: 17, fontWeight: 'bold', color: '#0E3F8C', marginBottom: 2 }}&gt;M0 — due Fri Sep 11 (pass / fail)&lt;/Text&gt;&#10;      {[&#10;        ['file-signature', 'Team charter', 'Name, roles, communication rules'],&#10;        ['users', 'Stakeholder list', 'Who cares about CampusBites'],&#10;        ['eye', 'One-paragraph vision', 'What it does, for whom'],&#10;        ['code-branch', 'Repository registered', 'Create repo, invite klausren'],&#10;      ].map(([icon, t, d]) =&gt; (&#10;        &lt;Box key={t} style={{ flexDirection: 'row', gap: 12, alignItems: 'center', padding: '12px 16px', background: '#F7F9FC', borderRadius: 9, border: '1px solid #E5E7EB' }}&gt;&#10;          &lt;Box style={{ width: 36, height: 36, borderRadius: 8, background: '#E8EFF8', justifyContent: 'center', alignItems: 'center' }}&gt;&#10;            &lt;FAIcon name={icon} style={{ fill: '#1E4FA8', width: 18, height: 18 }} /&gt;&#10;          &lt;/Box&gt;&#10;          &lt;Box style={{ flexDirection: 'column', gap: 1 }}&gt;&#10;            &lt;Text style={{ fontSize: 15, fontWeight: 'bold', color: '#1A2230' }}&gt;{t}&lt;/Text&gt;&#10;            &lt;Text style={{ fontSize: 13, color: '#4A5568' }}&gt;{d}&lt;/Text&gt;&#10;          &lt;/Box&gt;&#10;        &lt;/Box&gt;&#10;      ))}&#10;      &lt;Box style={{ marginTop: 4, padding: '11px 16px', background: '#FDF3F3', borderRadius: 9, borderLeft: '3px solid #D9534F' }}&gt;&#10;        &lt;Text style={{ fontSize: 14, color: '#D9534F', fontWeight: 'bold' }}&gt;One team of four. You settle the roles in this week's lab.&lt;/Text&gt;&#10;      &lt;/Box&gt;&#10;    &lt;/Box&gt;&#10;  &lt;/Box&gt;&#10;  &lt;Box style={{ height: 40, padding: '0 40px', flexDirection: 'row', alignItems: 'center', justifyContent: 'space-between' }}&gt;&#10;    &lt;Text style={{ fontSize: 13, color: '#8B97A8' }}&gt;Full brief: Project Guidebook · Deadline Schedule §4&lt;/Text&gt;&#10;    &lt;Text style={{ fontSize: 14, color: '#1E4FA8', fontWeight: 'bold' }}&gt;06 / 38&lt;/Text&gt;&#10;  &lt;/Box&gt;&#10;&lt;/Slide&gt;"/>
+        <p:cNvPr id="773" name=""/>
         <p:cNvGrpSpPr/>
         <p:nvPr/>
       </p:nvGrpSpPr>
@@ -26530,7 +27349,10 @@
         </p:spPr>
         <p:txBody>
           <a:bodyPr/>
-          <a:p/>
+          <a:p>
+            <a:pPr/>
+            <a:endParaRPr/>
+          </a:p>
         </p:txBody>
       </p:sp>
       <p:sp>
@@ -26554,7 +27376,10 @@
         </p:spPr>
         <p:txBody>
           <a:bodyPr/>
-          <a:p/>
+          <a:p>
+            <a:pPr/>
+            <a:endParaRPr/>
+          </a:p>
         </p:txBody>
       </p:sp>
       <p:sp>
@@ -26756,7 +27581,10 @@
         </p:spPr>
         <p:txBody>
           <a:bodyPr/>
-          <a:p/>
+          <a:p>
+            <a:pPr/>
+            <a:endParaRPr/>
+          </a:p>
         </p:txBody>
       </p:sp>
       <p:sp>
@@ -26782,7 +27610,10 @@
         </p:spPr>
         <p:txBody>
           <a:bodyPr/>
-          <a:p/>
+          <a:p>
+            <a:pPr/>
+            <a:endParaRPr/>
+          </a:p>
         </p:txBody>
       </p:sp>
       <p:pic>
@@ -26914,7 +27745,10 @@
         </p:spPr>
         <p:txBody>
           <a:bodyPr/>
-          <a:p/>
+          <a:p>
+            <a:pPr/>
+            <a:endParaRPr/>
+          </a:p>
         </p:txBody>
       </p:sp>
       <p:sp>
@@ -26940,7 +27774,10 @@
         </p:spPr>
         <p:txBody>
           <a:bodyPr/>
-          <a:p/>
+          <a:p>
+            <a:pPr/>
+            <a:endParaRPr/>
+          </a:p>
         </p:txBody>
       </p:sp>
       <p:pic>
@@ -27072,7 +27909,10 @@
         </p:spPr>
         <p:txBody>
           <a:bodyPr/>
-          <a:p/>
+          <a:p>
+            <a:pPr/>
+            <a:endParaRPr/>
+          </a:p>
         </p:txBody>
       </p:sp>
       <p:sp>
@@ -27098,7 +27938,10 @@
         </p:spPr>
         <p:txBody>
           <a:bodyPr/>
-          <a:p/>
+          <a:p>
+            <a:pPr/>
+            <a:endParaRPr/>
+          </a:p>
         </p:txBody>
       </p:sp>
       <p:pic>
@@ -27230,7 +28073,10 @@
         </p:spPr>
         <p:txBody>
           <a:bodyPr/>
-          <a:p/>
+          <a:p>
+            <a:pPr/>
+            <a:endParaRPr/>
+          </a:p>
         </p:txBody>
       </p:sp>
       <p:sp>
@@ -27256,7 +28102,10 @@
         </p:spPr>
         <p:txBody>
           <a:bodyPr/>
-          <a:p/>
+          <a:p>
+            <a:pPr/>
+            <a:endParaRPr/>
+          </a:p>
         </p:txBody>
       </p:sp>
       <p:pic>
@@ -27383,7 +28232,10 @@
         </p:spPr>
         <p:txBody>
           <a:bodyPr/>
-          <a:p/>
+          <a:p>
+            <a:pPr/>
+            <a:endParaRPr/>
+          </a:p>
         </p:txBody>
       </p:sp>
       <p:sp>
@@ -27440,7 +28292,10 @@
         </p:spPr>
         <p:txBody>
           <a:bodyPr/>
-          <a:p/>
+          <a:p>
+            <a:pPr/>
+            <a:endParaRPr/>
+          </a:p>
         </p:txBody>
       </p:sp>
       <p:sp>
@@ -27558,7 +28413,7 @@
   <p:cSld>
     <p:spTree>
       <p:nvGrpSpPr>
-        <p:cNvPr id="806" name="" descr="&lt;Slide style={{ background: '#0E3F8C', padding: 0 }}&gt;&#10;  &lt;Box style={{ flexDirection: 'row', height: '100%', position: 'relative' }}&gt;&#10;    &lt;Box style={{ position: 'absolute', top: 0, left: 0, right: 0, height: 8, background: '#1E4FA8' }} /&gt;&#10;    &lt;Box style={{ width: 300, justifyContent: 'center', alignItems: 'center', borderRight: '1px solid #2B5793' }}&gt;&#10;      &lt;Text style={{ fontSize: 220, fontWeight: 'bold', color: '#3D7BD9', fontFamily: 'Georgia, serif', lineHeight: 1 }}&gt;02&lt;/Text&gt;&#10;    &lt;/Box&gt;&#10;    &lt;Box style={{ flex: 1, padding: '70px 64px', flexDirection: 'column', justifyContent: 'center' }}&gt;&#10;      &lt;Text style={{ fontSize: 15, color: '#7FA2D6', letterSpacing: 2, marginBottom: 18 }}&gt;PART 1 · LECTURE&lt;/Text&gt;&#10;      &lt;Text style={{ fontSize: 48, fontWeight: 'bold', color: '#FFFFFF', lineHeight: 1.18 }}&gt;Objects&lt;br /&gt;Everywhere&lt;/Text&gt;&#10;      &lt;Box style={{ width: 64, height: 4, background: '#FFC107', marginTop: 26, marginBottom: 26 }} /&gt;&#10;      &lt;Box style={{ flexDirection: 'column', gap: 12 }}&gt;&#10;        {[&#10;          'From things in the world to things in code',&#10;          'State, behaviour, identity — the three parts',&#10;          'Class is the mould; object is what you pour',&#10;        ].map((t) =&gt; (&#10;          &lt;Box key={t} style={{ flexDirection: 'row', alignItems: 'center', gap: 12 }}&gt;&#10;            &lt;Box style={{ width: 8, height: 8, borderRadius: 4, background: '#3D7BD9' }} /&gt;&#10;            &lt;Text style={{ fontSize: 20, color: '#C5D4EA' }}&gt;{t}&lt;/Text&gt;&#10;          &lt;/Box&gt;&#10;        ))}&#10;      &lt;/Box&gt;&#10;    &lt;/Box&gt;&#10;  &lt;/Box&gt;&#10;&lt;/Slide&gt;"/>
+        <p:cNvPr id="806" name=""/>
         <p:cNvGrpSpPr/>
         <p:nvPr/>
       </p:nvGrpSpPr>
@@ -27591,7 +28446,10 @@
         </p:spPr>
         <p:txBody>
           <a:bodyPr/>
-          <a:p/>
+          <a:p>
+            <a:pPr/>
+            <a:endParaRPr/>
+          </a:p>
         </p:txBody>
       </p:sp>
       <p:sp>
@@ -27631,7 +28489,10 @@
         </p:spPr>
         <p:txBody>
           <a:bodyPr/>
-          <a:p/>
+          <a:p>
+            <a:pPr/>
+            <a:endParaRPr/>
+          </a:p>
         </p:txBody>
       </p:sp>
       <p:sp>
@@ -27778,7 +28639,10 @@
         </p:spPr>
         <p:txBody>
           <a:bodyPr/>
-          <a:p/>
+          <a:p>
+            <a:pPr/>
+            <a:endParaRPr/>
+          </a:p>
         </p:txBody>
       </p:sp>
       <p:sp>
@@ -27804,7 +28668,10 @@
         </p:spPr>
         <p:txBody>
           <a:bodyPr/>
-          <a:p/>
+          <a:p>
+            <a:pPr/>
+            <a:endParaRPr/>
+          </a:p>
         </p:txBody>
       </p:sp>
       <p:sp>
@@ -27865,7 +28732,10 @@
         </p:spPr>
         <p:txBody>
           <a:bodyPr/>
-          <a:p/>
+          <a:p>
+            <a:pPr/>
+            <a:endParaRPr/>
+          </a:p>
         </p:txBody>
       </p:sp>
       <p:sp>
@@ -27926,7 +28796,10 @@
         </p:spPr>
         <p:txBody>
           <a:bodyPr/>
-          <a:p/>
+          <a:p>
+            <a:pPr/>
+            <a:endParaRPr/>
+          </a:p>
         </p:txBody>
       </p:sp>
       <p:sp>
@@ -27985,7 +28858,10 @@
         </p:spPr>
         <p:txBody>
           <a:bodyPr/>
-          <a:p/>
+          <a:p>
+            <a:pPr/>
+            <a:endParaRPr/>
+          </a:p>
         </p:txBody>
       </p:sp>
     </p:spTree>
@@ -27998,7 +28874,7 @@
   <p:cSld>
     <p:spTree>
       <p:nvGrpSpPr>
-        <p:cNvPr id="820" name="" descr="&lt;Slide style={{ background: '#FFFFFF', padding: 0 }}&gt;&#10;  &lt;Box style={{ height: 72, background: '#1E4FA8', padding: '0 40px', flexDirection: 'row', alignItems: 'center', justifyContent: 'space-between' }}&gt;&#10;    &lt;Text style={{ fontSize: 15, color: '#B9CDF0', letterSpacing: 1 }}&gt;ISAD · INFORMATION SYSTEMS ANALYSIS &amp;amp; DESIGN&lt;/Text&gt;&#10;    &lt;Text style={{ fontSize: 15, color: '#B9CDF0' }}&gt;W02 · OBJECTS&lt;/Text&gt;&#10;  &lt;/Box&gt;&#10;  &lt;Box style={{ padding: '22px 40px 0 40px' }}&gt;&#10;    &lt;Text style={{ fontSize: 34, fontWeight: 'bold', color: '#0E3F8C' }}&gt;From Real Objects to Software Objects&lt;/Text&gt;&#10;  &lt;/Box&gt;&#10;  &lt;Box style={{ flex: 1, padding: '14px 40px 0 40px', flexDirection: 'row', gap: 26 }}&gt;&#10;    &lt;Box style={{ flex: 5, justifyContent: 'center', alignItems: 'center' }}&gt;&#10;      &lt;svg width={580} height={340} viewBox='0 0 580 340'&gt;&#10;        &lt;text x='140' y='30' textAnchor='middle' fill='#8B97A8' fontSize='15' letterSpacing='1'&gt;IN THE WORLD&lt;/text&gt;&#10;        &lt;text x='440' y='30' textAnchor='middle' fill='#8B97A8' fontSize='15' letterSpacing='1'&gt;IN CODE&lt;/text&gt;&#10;        &lt;rect x='30' y='48' width='220' height='52' rx='10' fill='#E8EFF8' stroke='#3D7BD9' strokeWidth='2' /&gt;&#10;        &lt;text x='140' y='80' textAnchor='middle' fill='#1A2230' fontSize='17'&gt;A real order on a tray&lt;/text&gt;&#10;        &lt;rect x='30' y='112' width='220' height='52' rx='10' fill='#E8EFF8' stroke='#3D7BD9' strokeWidth='2' /&gt;&#10;        &lt;text x='140' y='144' textAnchor='middle' fill='#1A2230' fontSize='17'&gt;Its items, its total&lt;/text&gt;&#10;        &lt;rect x='30' y='176' width='220' height='52' rx='10' fill='#E8EFF8' stroke='#3D7BD9' strokeWidth='2' /&gt;&#10;        &lt;text x='140' y='208' textAnchor='middle' fill='#1A2230' fontSize='17'&gt;It can be paid, cancelled&lt;/text&gt;&#10;        &lt;rect x='30' y='240' width='220' height='52' rx='10' fill='#E8EFF8' stroke='#3D7BD9' strokeWidth='2' /&gt;&#10;        &lt;text x='140' y='272' textAnchor='middle' fill='#1A2230' fontSize='17'&gt;This order, not that one&lt;/text&gt;&#10;        &lt;line x1='256' y1='74' x2='324' y2='74' stroke='#3D7BD9' strokeWidth='2' markerEnd='url(#arrow08)' /&gt;&#10;        &lt;line x1='256' y1='138' x2='324' y2='138' stroke='#3D7BD9' strokeWidth='2' markerEnd='url(#arrow08)' /&gt;&#10;        &lt;line x1='256' y1='202' x2='324' y2='202' stroke='#3D7BD9' strokeWidth='2' markerEnd='url(#arrow08)' /&gt;&#10;        &lt;line x1='256' y1='266' x2='324' y2='266' stroke='#3D7BD9' strokeWidth='2' markerEnd='url(#arrow08)' /&gt;&#10;        &lt;rect x='330' y='48' width='220' height='52' rx='10' fill='#F0F5FC' stroke='#1E4FA8' strokeWidth='2' /&gt;&#10;        &lt;text x='440' y='80' textAnchor='middle' fill='#0E3F8C' fontSize='17' fontWeight='bold'&gt;order = a new Order&lt;/text&gt;&#10;        &lt;rect x='330' y='112' width='220' height='52' rx='10' fill='#F0F5FC' stroke='#1E4FA8' strokeWidth='2' /&gt;&#10;        &lt;text x='440' y='144' textAnchor='middle' fill='#0E3F8C' fontSize='17' fontWeight='bold'&gt;fields: lines, status&lt;/text&gt;&#10;        &lt;rect x='330' y='176' width='220' height='52' rx='10' fill='#F0F5FC' stroke='#1E4FA8' strokeWidth='2' /&gt;&#10;        &lt;text x='440' y='208' textAnchor='middle' fill='#0E3F8C' fontSize='17' fontWeight='bold'&gt;methods: pay(), cancel()&lt;/text&gt;&#10;        &lt;rect x='330' y='240' width='220' height='52' rx='10' fill='#F0F5FC' stroke='#1E4FA8' strokeWidth='2' /&gt;&#10;        &lt;text x='440' y='272' textAnchor='middle' fill='#0E3F8C' fontSize='17' fontWeight='bold'&gt;a distinct reference&lt;/text&gt;&#10;        &lt;defs&gt;&#10;          &lt;marker id='arrow08' markerWidth='9' markerHeight='9' refX='8' refY='4.5' orient='auto'&gt;&#10;            &lt;path d='M0,0 L9,4.5 L0,9 z' fill='#3D7BD9' /&gt;&#10;          &lt;/marker&gt;&#10;        &lt;/defs&gt;&#10;        &lt;text x='290' y='322' textAnchor='middle' fill='#4A5568' fontSize='15'&gt;Attributes become fields. Things it can do become methods.&lt;/text&gt;&#10;      &lt;/svg&gt;&#10;    &lt;/Box&gt;&#10;    &lt;Box style={{ flex: 4, flexDirection: 'column', gap: 12, justifyContent: 'center' }}&gt;&#10;      &lt;Box style={{ padding: '18px 20px', background: '#F0F5FC', borderRadius: 10, borderLeft: '4px solid #1E4FA8' }}&gt;&#10;        &lt;Text style={{ fontSize: 17, fontWeight: 'bold', color: '#0E3F8C', lineHeight: 1.4 }}&gt;We model the part of the world the system cares about.&lt;/Text&gt;&#10;      &lt;/Box&gt;&#10;      &lt;Box style={{ padding: '18px 20px', background: '#F7F9FC', borderRadius: 10, border: '1px solid #E5E7EB' }}&gt;&#10;        &lt;Text style={{ fontSize: 16, color: '#4A5568', lineHeight: 1.55 }}&gt;A customer has a name, a phone and a dorm — but CampusBites only stores what the delivery needs.&lt;/Text&gt;&#10;      &lt;/Box&gt;&#10;      &lt;Box style={{ padding: '18px 20px', background: '#FDF3F3', borderRadius: 10, borderLeft: '4px solid #D9534F' }}&gt;&#10;        &lt;Text style={{ fontSize: 16, color: '#4A5568', lineHeight: 1.55 }}&gt;&lt;Text style={{ fontWeight: 'bold', color: '#D9534F' }}&gt;Choosing what to leave out&lt;/Text&gt; is the analyst's first real decision.&lt;/Text&gt;&#10;      &lt;/Box&gt;&#10;    &lt;/Box&gt;&#10;  &lt;/Box&gt;&#10;  &lt;Box style={{ height: 40, padding: '0 40px', flexDirection: 'row', alignItems: 'center', justifyContent: 'space-between' }}&gt;&#10;    &lt;Text style={{ fontSize: 13, color: '#8B97A8' }}&gt;ISAD · Fall 2026&lt;/Text&gt;&#10;    &lt;Text style={{ fontSize: 14, color: '#1E4FA8', fontWeight: 'bold' }}&gt;08 / 38&lt;/Text&gt;&#10;  &lt;/Box&gt;&#10;&lt;/Slide&gt;"/>
+        <p:cNvPr id="820" name=""/>
         <p:cNvGrpSpPr/>
         <p:nvPr/>
       </p:nvGrpSpPr>
@@ -28031,7 +28907,10 @@
         </p:spPr>
         <p:txBody>
           <a:bodyPr/>
-          <a:p/>
+          <a:p>
+            <a:pPr/>
+            <a:endParaRPr/>
+          </a:p>
         </p:txBody>
       </p:sp>
       <p:sp>
@@ -28055,7 +28934,10 @@
         </p:spPr>
         <p:txBody>
           <a:bodyPr/>
-          <a:p/>
+          <a:p>
+            <a:pPr/>
+            <a:endParaRPr/>
+          </a:p>
         </p:txBody>
       </p:sp>
       <p:sp>
@@ -28217,7 +29099,10 @@
         </p:spPr>
         <p:txBody>
           <a:bodyPr/>
-          <a:p/>
+          <a:p>
+            <a:pPr/>
+            <a:endParaRPr/>
+          </a:p>
         </p:txBody>
       </p:sp>
       <p:sp>
@@ -28274,7 +29159,10 @@
         </p:spPr>
         <p:txBody>
           <a:bodyPr/>
-          <a:p/>
+          <a:p>
+            <a:pPr/>
+            <a:endParaRPr/>
+          </a:p>
         </p:txBody>
       </p:sp>
       <p:sp>
@@ -28340,7 +29228,10 @@
         </p:spPr>
         <p:txBody>
           <a:bodyPr/>
-          <a:p/>
+          <a:p>
+            <a:pPr/>
+            <a:endParaRPr/>
+          </a:p>
         </p:txBody>
       </p:sp>
       <p:sp>
@@ -28403,7 +29294,10 @@
         </p:spPr>
         <p:txBody>
           <a:bodyPr/>
-          <a:p/>
+          <a:p>
+            <a:pPr/>
+            <a:endParaRPr/>
+          </a:p>
         </p:txBody>
       </p:sp>
       <p:sp>
@@ -28460,7 +29354,10 @@
         </p:spPr>
         <p:txBody>
           <a:bodyPr/>
-          <a:p/>
+          <a:p>
+            <a:pPr/>
+            <a:endParaRPr/>
+          </a:p>
         </p:txBody>
       </p:sp>
       <p:sp>
@@ -28588,7 +29485,7 @@
   <p:cSld>
     <p:spTree>
       <p:nvGrpSpPr>
-        <p:cNvPr id="837" name="" descr="&lt;Slide style={{ background: '#FFFFFF', padding: 0 }}&gt;&#10;  &lt;Box style={{ padding: '26px 40px 8px 40px', flexDirection: 'row', alignItems: 'center', justifyContent: 'space-between' }}&gt;&#10;    &lt;Text style={{ fontSize: 34, fontWeight: 'bold', color: '#0E3F8C' }}&gt;Anatomy of an Object&lt;/Text&gt;&#10;    &lt;Text style={{ fontSize: 14, color: '#1E4FA8', fontWeight: 'bold' }}&gt;09 / 38&lt;/Text&gt;&#10;  &lt;/Box&gt;&#10;  &lt;Box style={{ flex: 1, padding: '8px 40px 0 40px', justifyContent: 'center', alignItems: 'center' }}&gt;&#10;    &lt;svg width={1180} height={430} viewBox='0 0 1180 430'&gt;&#10;      &lt;rect x='60' y='40' width='470' height='80' rx='8' fill='#0E3F8C' /&gt;&#10;      &lt;text x='295' y='76' textAnchor='middle' fill='#FFFFFF' fontSize='26' fontWeight='bold'&gt;Order #A-1024&lt;/text&gt;&#10;      &lt;text x='295' y='104' textAnchor='middle' fill='#FFC107' fontSize='16'&gt;identity — this order, not another&lt;/text&gt;&#10;      &lt;rect x='60' y='120' width='470' height='132' rx='8' fill='#E8EFF8' stroke='#3D7BD9' strokeWidth='2' /&gt;&#10;      &lt;text x='82' y='150' fill='#0E3F8C' fontSize='17' fontWeight='bold'&gt;state&lt;/text&gt;&#10;      &lt;text x='82' y='178' fill='#1A2230' fontSize='16'&gt;lines: List&amp;amp;lt;OrderLine&amp;amp;gt;&lt;/text&gt;&#10;      &lt;text x='82' y='204' fill='#1A2230' fontSize='16'&gt;status: OrderStatus&lt;/text&gt;&#10;      &lt;text x='82' y='230' fill='#1A2230' fontSize='16'&gt;placedAt: LocalDateTime&lt;/text&gt;&#10;      &lt;rect x='60' y='252' width='470' height='132' rx='8' fill='#F0F5FC' stroke='#1E4FA8' strokeWidth='2' /&gt;&#10;      &lt;text x='82' y='282' fill='#0E3F8C' fontSize='17' fontWeight='bold'&gt;behaviour&lt;/text&gt;&#10;      &lt;text x='82' y='310' fill='#1A2230' fontSize='16'&gt;addItem(item, qty)&lt;/text&gt;&#10;      &lt;text x='82' y='336' fill='#1A2230' fontSize='16'&gt;pay(method)&lt;/text&gt;&#10;      &lt;text x='82' y='362' fill='#1A2230' fontSize='16'&gt;cancel(reason)&lt;/text&gt;&#10;      &lt;rect x='640' y='40' width='470' height='86' rx='12' fill='#F7F9FC' stroke='#D6DCE5' strokeWidth='1' /&gt;&#10;      &lt;text x='668' y='76' fill='#0E3F8C' fontSize='20' fontWeight='bold'&gt;Identity&lt;/text&gt;&#10;      &lt;text x='668' y='106' fill='#4A5568' fontSize='16'&gt;Two objects with identical state are still two objects.&lt;/text&gt;&#10;      &lt;rect x='640' y='142' width='470' height='86' rx='12' fill='#F7F9FC' stroke='#D6DCE5' strokeWidth='1' /&gt;&#10;      &lt;text x='668' y='178' fill='#0E3F8C' fontSize='20' fontWeight='bold'&gt;State&lt;/text&gt;&#10;      &lt;text x='668' y='208' fill='#4A5568' fontSize='16'&gt;What the object remembers right now.&lt;/text&gt;&#10;      &lt;rect x='640' y='244' width='470' height='86' rx='12' fill='#F7F9FC' stroke='#D6DCE5' strokeWidth='1' /&gt;&#10;      &lt;text x='668' y='280' fill='#0E3F8C' fontSize='20' fontWeight='bold'&gt;Behaviour&lt;/text&gt;&#10;      &lt;text x='668' y='310' fill='#4A5568' fontSize='16'&gt;What the object can be asked to do.&lt;/text&gt;&#10;      &lt;rect x='640' y='346' width='470' height='38' rx='10' fill='#0E3F8C' /&gt;&#10;      &lt;text x='875' y='372' textAnchor='middle' fill='#FFC107' fontSize='16' fontWeight='bold'&gt;This three-part box is a UML class. Week 03.&lt;/text&gt;&#10;    &lt;/svg&gt;&#10;  &lt;/Box&gt;&#10;  &lt;Box style={{ height: 56, background: '#0E3F8C', padding: '0 40px', flexDirection: 'row', alignItems: 'center', justifyContent: 'center' }}&gt;&#10;    &lt;Text style={{ fontSize: 18, color: '#FFFFFF', fontWeight: '600' }}&gt;State alone is a data record. State plus behaviour is an object.&lt;/Text&gt;&#10;  &lt;/Box&gt;&#10;&lt;/Slide&gt;"/>
+        <p:cNvPr id="837" name=""/>
         <p:cNvGrpSpPr/>
         <p:nvPr/>
       </p:nvGrpSpPr>
@@ -28621,7 +29518,10 @@
         </p:spPr>
         <p:txBody>
           <a:bodyPr/>
-          <a:p/>
+          <a:p>
+            <a:pPr/>
+            <a:endParaRPr/>
+          </a:p>
         </p:txBody>
       </p:sp>
       <p:sp>
@@ -28746,7 +29646,10 @@
         </p:spPr>
         <p:txBody>
           <a:bodyPr/>
-          <a:p/>
+          <a:p>
+            <a:pPr/>
+            <a:endParaRPr/>
+          </a:p>
         </p:txBody>
       </p:sp>
       <p:sp>
